--- a/pitch/Kmart-Delivery-Assist-Lab12.pptx
+++ b/pitch/Kmart-Delivery-Assist-Lab12.pptx
@@ -14,6 +14,7 @@
     <p:sldId id="262" r:id="rId14"/>
     <p:sldId id="263" r:id="rId15"/>
     <p:sldId id="264" r:id="rId16"/>
+    <p:sldId id="265" r:id="rId17"/>
   </p:sldIdLst>
   <p:sldSz cx="12191695" cy="6858000" type="screen4x3"/>
   <p:notesSz cx="6858000" cy="9144000"/>
@@ -535,6 +536,76 @@
 </p:notes>
 </file>
 
+<file path=ppt/notesSlides/notesSlide10.xml><?xml version="1.0" encoding="utf-8"?>
+<p:notes xmlns:a="http://schemas.openxmlformats.org/drawingml/2006/main" xmlns:p="http://schemas.openxmlformats.org/presentationml/2006/main" xmlns:r="http://schemas.openxmlformats.org/officeDocument/2006/relationships">
+  <p:cSld>
+    <p:spTree>
+      <p:nvGrpSpPr>
+        <p:cNvPr id="1" name=""/>
+        <p:cNvGrpSpPr/>
+        <p:nvPr/>
+      </p:nvGrpSpPr>
+      <p:grpSpPr>
+        <a:xfrm>
+          <a:off x="0" y="0"/>
+          <a:ext cx="0" cy="0"/>
+          <a:chOff x="0" y="0"/>
+          <a:chExt cx="0" cy="0"/>
+        </a:xfrm>
+      </p:grpSpPr>
+      <p:sp>
+        <p:nvSpPr>
+          <p:cNvPr id="2" name="Slide Image Placeholder 1"/>
+          <p:cNvSpPr>
+            <a:spLocks noGrp="1"/>
+          </p:cNvSpPr>
+          <p:nvPr>
+            <p:ph type="sldImg" idx="2"/>
+          </p:nvPr>
+        </p:nvSpPr>
+        <p:spPr/>
+      </p:sp>
+      <p:sp>
+        <p:nvSpPr>
+          <p:cNvPr id="3" name="Notes Placeholder 2"/>
+          <p:cNvSpPr>
+            <a:spLocks noGrp="1"/>
+          </p:cNvSpPr>
+          <p:nvPr>
+            <p:ph type="body" idx="3" sz="quarter"/>
+          </p:nvPr>
+        </p:nvSpPr>
+        <p:spPr/>
+        <p:txBody>
+          <a:bodyPr/>
+          <a:lstStyle/>
+          <a:p>
+            <a:r>
+              <a:t>Do not spend speaking time here unless asked. This slide has to be last in the file. Fill the three UPIs before Canvas upload. Confirm 34/33/33 with Taariq and Huy. If the split changes, change the percentages so they still total 100.</a:t>
+            </a:r>
+          </a:p>
+        </p:txBody>
+      </p:sp>
+      <p:sp>
+        <p:nvSpPr>
+          <p:cNvPr id="4" name="Slide Number Placeholder 3"/>
+          <p:cNvSpPr>
+            <a:spLocks noGrp="1"/>
+          </p:cNvSpPr>
+          <p:nvPr>
+            <p:ph type="sldNum" idx="5" sz="quarter"/>
+          </p:nvPr>
+        </p:nvSpPr>
+        <p:spPr/>
+      </p:sp>
+    </p:spTree>
+  </p:cSld>
+  <p:clrMapOvr>
+    <a:masterClrMapping/>
+  </p:clrMapOvr>
+</p:notes>
+</file>
+
 <file path=ppt/notesSlides/notesSlide2.xml><?xml version="1.0" encoding="utf-8"?>
 <p:notes xmlns:a="http://schemas.openxmlformats.org/drawingml/2006/main" xmlns:p="http://schemas.openxmlformats.org/presentationml/2006/main" xmlns:r="http://schemas.openxmlformats.org/officeDocument/2006/relationships">
   <p:cSld>
@@ -790,7 +861,7 @@
           <a:lstStyle/>
           <a:p>
             <a:r>
-              <a:t>1:50 to 2:15. This is the effort-impact choice. We did not drop the proposal. Routing automation is still the later, heavier step. A status page does not recover the order. Rebuilding order management duplicates what SAP already holds. Delivery Assist is the step we can implement, and it is the step the customer feels. One breath, then design.</a:t>
+              <a:t>1:50 to 2:20. Start from the A2 effort-impact result, do not invent a new winner. P2 scored 4.50 and stays the programme. P1 scored 4.10 and waits for shadow evidence. Say why the prototype is Delivery Assist: the API pool has no routing service and no cost dictionary, so the internal foundation cannot be built here. The pool can read the order journey and open a service request. That is the exception the customer feels. A status page with no choice does not recover it.</a:t>
             </a:r>
           </a:p>
         </p:txBody>
@@ -860,7 +931,7 @@
           <a:lstStyle/>
           <a:p>
             <a:r>
-              <a:t>2:15 to 2:40. Design thinking in one pass: empathise, define, ideate, prototype, test. Then the API change, because this is option 2. Say plainly: we did not pretend the billing API creates a refund. It can read, reject or delete. The service request is the write. AS-IS is carrier page plus call centre. TO-BE is these six steps. Usability, if asked: status stays on screen, words are the customer's, choices are visible, a refund is confirmed twice, and a healthy order is not forced into a problem. That is Nielsen, applied, not recited. Switch to the app.</a:t>
+              <a:t>2:20 to 2:45. This is option 3, not a small wrapper change. Name the five stages once: empathise, define, ideate, prototype, test. Then the models. AS-IS file is design/A3_AS-IS_Customer_Exception.bpmn. TO-BE file is design/A3_TO-BE_Delivery_Assist.bpmn. Say the billing API can read, reject or delete, and cannot create a refund. Do not claim a live refund posting. The write we do have is the service request.</a:t>
             </a:r>
           </a:p>
         </p:txBody>
@@ -930,7 +1001,7 @@
           <a:lstStyle/>
           <a:p>
             <a:r>
-              <a:t>2:40 to 4:20. Leave this slide only if the app is not yet on screen. Preferred: the app is already full screen and you do not linger here. Clicks: Storage box. See the problem. This is the problem. Continue, replacement is already selected. Check for an update. Check again. Review the outcome. Confirm replacement. Open the SAP service request and point at the sales order 450218 and the service request API. If time remains, say the lamp order offers redelivery, store collection or a full refund. Do not hunt for menus.</a:t>
+              <a:t>2:45 to 3:05. Do not read all ten. Say: status stays visible, the words are the customer’s, a refund asks twice, and a healthy order is not forced into a problem. The other six are on the slide if asked. Then go to the app.</a:t>
             </a:r>
           </a:p>
         </p:txBody>
@@ -1000,7 +1071,7 @@
           <a:lstStyle/>
           <a:p>
             <a:r>
-              <a:t>4:20 to 4:45. Close on the ask, not a summary of every slide. Today the customer can finish the recovery. The heavier routing work stays later. A refund is a decision, not a side effect. Thank them and take one question. Then the disclaimer slide is for the upload, not for a speech.</a:t>
+              <a:t>2:40 to 4:20. Leave this slide only if the app is not yet on screen. Preferred: the app is already full screen and you do not linger here. Clicks: Storage box. See the problem. This is the problem. Continue, replacement is already selected. Check for an update. Check again. Review the outcome. Confirm replacement. Open the SAP service request and point at the sales order 450218 and the service request API. If time remains, say the lamp order offers redelivery, store collection or a full refund. Do not hunt for menus.</a:t>
             </a:r>
           </a:p>
         </p:txBody>
@@ -1070,7 +1141,7 @@
           <a:lstStyle/>
           <a:p>
             <a:r>
-              <a:t>Do not spend speaking time here unless asked. This slide has to be last in the file. Fill the three UPIs before Canvas upload. Confirm 34/33/33 with Taariq and Huy. If the split changes, change the percentages so they still total 100.</a:t>
+              <a:t>4:20 to 4:45. Close on the ask, not a summary of every slide. Today the customer can finish the recovery. The heavier routing work stays later. A refund is a decision, not a side effect. Thank them and take one question. Then the disclaimer slide is for the upload, not for a speech.</a:t>
             </a:r>
           </a:p>
         </p:txBody>
@@ -4312,4228 +4383,7 @@
 </p:sld>
 </file>
 
-<file path=ppt/slides/slide2.xml><?xml version="1.0" encoding="utf-8"?>
-<p:sld xmlns:a="http://schemas.openxmlformats.org/drawingml/2006/main" xmlns:p="http://schemas.openxmlformats.org/presentationml/2006/main" xmlns:r="http://schemas.openxmlformats.org/officeDocument/2006/relationships">
-  <p:cSld>
-    <p:spTree>
-      <p:nvGrpSpPr>
-        <p:cNvPr id="1" name=""/>
-        <p:cNvGrpSpPr/>
-        <p:nvPr/>
-      </p:nvGrpSpPr>
-      <p:grpSpPr/>
-      <p:sp>
-        <p:nvSpPr>
-          <p:cNvPr id="2" name="Rectangle 1"/>
-          <p:cNvSpPr/>
-          <p:nvPr/>
-        </p:nvSpPr>
-        <p:spPr>
-          <a:xfrm>
-            <a:off x="0" y="0"/>
-            <a:ext cx="12191695" cy="6858000"/>
-          </a:xfrm>
-          <a:prstGeom prst="rect">
-            <a:avLst/>
-          </a:prstGeom>
-          <a:solidFill>
-            <a:srgbClr val="FFFFFF"/>
-          </a:solidFill>
-          <a:ln>
-            <a:noFill/>
-          </a:ln>
-        </p:spPr>
-        <p:style>
-          <a:lnRef idx="1">
-            <a:schemeClr val="accent1"/>
-          </a:lnRef>
-          <a:fillRef idx="3">
-            <a:schemeClr val="accent1"/>
-          </a:fillRef>
-          <a:effectRef idx="2">
-            <a:schemeClr val="accent1"/>
-          </a:effectRef>
-          <a:fontRef idx="minor">
-            <a:schemeClr val="lt1"/>
-          </a:fontRef>
-        </p:style>
-        <p:txBody>
-          <a:bodyPr rtlCol="0" anchor="ctr"/>
-          <a:lstStyle/>
-          <a:p>
-            <a:pPr algn="ctr"/>
-          </a:p>
-        </p:txBody>
-      </p:sp>
-      <p:sp>
-        <p:nvSpPr>
-          <p:cNvPr id="3" name="Rectangle 2"/>
-          <p:cNvSpPr/>
-          <p:nvPr/>
-        </p:nvSpPr>
-        <p:spPr>
-          <a:xfrm>
-            <a:off x="0" y="0"/>
-            <a:ext cx="12191695" cy="73152"/>
-          </a:xfrm>
-          <a:prstGeom prst="rect">
-            <a:avLst/>
-          </a:prstGeom>
-          <a:solidFill>
-            <a:srgbClr val="E10600"/>
-          </a:solidFill>
-          <a:ln>
-            <a:noFill/>
-          </a:ln>
-        </p:spPr>
-        <p:style>
-          <a:lnRef idx="1">
-            <a:schemeClr val="accent1"/>
-          </a:lnRef>
-          <a:fillRef idx="3">
-            <a:schemeClr val="accent1"/>
-          </a:fillRef>
-          <a:effectRef idx="2">
-            <a:schemeClr val="accent1"/>
-          </a:effectRef>
-          <a:fontRef idx="minor">
-            <a:schemeClr val="lt1"/>
-          </a:fontRef>
-        </p:style>
-        <p:txBody>
-          <a:bodyPr rtlCol="0" anchor="ctr"/>
-          <a:lstStyle/>
-          <a:p>
-            <a:pPr algn="ctr"/>
-          </a:p>
-        </p:txBody>
-      </p:sp>
-      <p:sp>
-        <p:nvSpPr>
-          <p:cNvPr id="4" name="TextBox 3"/>
-          <p:cNvSpPr txBox="1"/>
-          <p:nvPr/>
-        </p:nvSpPr>
-        <p:spPr>
-          <a:xfrm>
-            <a:off x="502920" y="6510528"/>
-            <a:ext cx="7315200" cy="256032"/>
-          </a:xfrm>
-          <a:prstGeom prst="rect">
-            <a:avLst/>
-          </a:prstGeom>
-          <a:noFill/>
-        </p:spPr>
-        <p:txBody>
-          <a:bodyPr wrap="square">
-            <a:spAutoFit/>
-          </a:bodyPr>
-          <a:lstStyle/>
-          <a:p>
-            <a:pPr algn="l"/>
-            <a:r>
-              <a:rPr sz="1200" b="0">
-                <a:solidFill>
-                  <a:srgbClr val="5E5A55"/>
-                </a:solidFill>
-                <a:latin typeface="Calibri"/>
-              </a:rPr>
-              <a:t>Kmart Delivery Assist  ·  Managing Director</a:t>
-            </a:r>
-          </a:p>
-        </p:txBody>
-      </p:sp>
-      <p:sp>
-        <p:nvSpPr>
-          <p:cNvPr id="5" name="TextBox 4"/>
-          <p:cNvSpPr txBox="1"/>
-          <p:nvPr/>
-        </p:nvSpPr>
-        <p:spPr>
-          <a:xfrm>
-            <a:off x="9509760" y="6510528"/>
-            <a:ext cx="2194560" cy="256032"/>
-          </a:xfrm>
-          <a:prstGeom prst="rect">
-            <a:avLst/>
-          </a:prstGeom>
-          <a:noFill/>
-        </p:spPr>
-        <p:txBody>
-          <a:bodyPr wrap="square">
-            <a:spAutoFit/>
-          </a:bodyPr>
-          <a:lstStyle/>
-          <a:p>
-            <a:pPr algn="r"/>
-            <a:r>
-              <a:rPr sz="1200" b="0">
-                <a:solidFill>
-                  <a:srgbClr val="5E5A55"/>
-                </a:solidFill>
-                <a:latin typeface="Calibri"/>
-              </a:rPr>
-              <a:t>2  /  9</a:t>
-            </a:r>
-          </a:p>
-        </p:txBody>
-      </p:sp>
-      <p:sp>
-        <p:nvSpPr>
-          <p:cNvPr id="6" name="TextBox 5"/>
-          <p:cNvSpPr txBox="1"/>
-          <p:nvPr/>
-        </p:nvSpPr>
-        <p:spPr>
-          <a:xfrm>
-            <a:off x="502920" y="320040"/>
-            <a:ext cx="3657600" cy="274320"/>
-          </a:xfrm>
-          <a:prstGeom prst="rect">
-            <a:avLst/>
-          </a:prstGeom>
-          <a:noFill/>
-        </p:spPr>
-        <p:txBody>
-          <a:bodyPr wrap="square">
-            <a:spAutoFit/>
-          </a:bodyPr>
-          <a:lstStyle/>
-          <a:p>
-            <a:pPr algn="l"/>
-            <a:r>
-              <a:rPr sz="1400" b="1">
-                <a:solidFill>
-                  <a:srgbClr val="E10600"/>
-                </a:solidFill>
-                <a:latin typeface="Calibri"/>
-              </a:rPr>
-              <a:t>SITUATION</a:t>
-            </a:r>
-          </a:p>
-        </p:txBody>
-      </p:sp>
-      <p:sp>
-        <p:nvSpPr>
-          <p:cNvPr id="7" name="TextBox 6"/>
-          <p:cNvSpPr txBox="1"/>
-          <p:nvPr/>
-        </p:nvSpPr>
-        <p:spPr>
-          <a:xfrm>
-            <a:off x="502920" y="685800"/>
-            <a:ext cx="10972800" cy="1188720"/>
-          </a:xfrm>
-          <a:prstGeom prst="rect">
-            <a:avLst/>
-          </a:prstGeom>
-          <a:noFill/>
-        </p:spPr>
-        <p:txBody>
-          <a:bodyPr wrap="square">
-            <a:spAutoFit/>
-          </a:bodyPr>
-          <a:lstStyle/>
-          <a:p>
-            <a:pPr algn="l"/>
-            <a:r>
-              <a:rPr sz="3200" b="1">
-                <a:solidFill>
-                  <a:srgbClr val="1C1B1A"/>
-                </a:solidFill>
-                <a:latin typeface="Calibri"/>
-              </a:rPr>
-              <a:t>The order is already in the business.
-The customer still cannot see one story.</a:t>
-            </a:r>
-          </a:p>
-        </p:txBody>
-      </p:sp>
-      <p:sp>
-        <p:nvSpPr>
-          <p:cNvPr id="8" name="Rectangle 7"/>
-          <p:cNvSpPr/>
-          <p:nvPr/>
-        </p:nvSpPr>
-        <p:spPr>
-          <a:xfrm>
-            <a:off x="502920" y="2880360"/>
-            <a:ext cx="3566160" cy="3017520"/>
-          </a:xfrm>
-          <a:prstGeom prst="rect">
-            <a:avLst/>
-          </a:prstGeom>
-          <a:solidFill>
-            <a:srgbClr val="F6F3EF"/>
-          </a:solidFill>
-          <a:ln>
-            <a:noFill/>
-          </a:ln>
-        </p:spPr>
-        <p:style>
-          <a:lnRef idx="1">
-            <a:schemeClr val="accent1"/>
-          </a:lnRef>
-          <a:fillRef idx="3">
-            <a:schemeClr val="accent1"/>
-          </a:fillRef>
-          <a:effectRef idx="2">
-            <a:schemeClr val="accent1"/>
-          </a:effectRef>
-          <a:fontRef idx="minor">
-            <a:schemeClr val="lt1"/>
-          </a:fontRef>
-        </p:style>
-        <p:txBody>
-          <a:bodyPr rtlCol="0" anchor="ctr"/>
-          <a:lstStyle/>
-          <a:p>
-            <a:pPr algn="ctr"/>
-          </a:p>
-        </p:txBody>
-      </p:sp>
-      <p:sp>
-        <p:nvSpPr>
-          <p:cNvPr id="9" name="TextBox 8"/>
-          <p:cNvSpPr txBox="1"/>
-          <p:nvPr/>
-        </p:nvSpPr>
-        <p:spPr>
-          <a:xfrm>
-            <a:off x="731520" y="3108960"/>
-            <a:ext cx="3108960" cy="1188720"/>
-          </a:xfrm>
-          <a:prstGeom prst="rect">
-            <a:avLst/>
-          </a:prstGeom>
-          <a:noFill/>
-        </p:spPr>
-        <p:txBody>
-          <a:bodyPr wrap="square">
-            <a:spAutoFit/>
-          </a:bodyPr>
-          <a:lstStyle/>
-          <a:p>
-            <a:pPr algn="l"/>
-            <a:r>
-              <a:rPr sz="2200" b="1">
-                <a:solidFill>
-                  <a:srgbClr val="1C1B1A"/>
-                </a:solidFill>
-                <a:latin typeface="Calibri"/>
-              </a:rPr>
-              <a:t>Capital is in delivery</a:t>
-            </a:r>
-          </a:p>
-        </p:txBody>
-      </p:sp>
-      <p:sp>
-        <p:nvSpPr>
-          <p:cNvPr id="10" name="TextBox 9"/>
-          <p:cNvSpPr txBox="1"/>
-          <p:nvPr/>
-        </p:nvSpPr>
-        <p:spPr>
-          <a:xfrm>
-            <a:off x="731520" y="4389120"/>
-            <a:ext cx="3108960" cy="1188720"/>
-          </a:xfrm>
-          <a:prstGeom prst="rect">
-            <a:avLst/>
-          </a:prstGeom>
-          <a:noFill/>
-        </p:spPr>
-        <p:txBody>
-          <a:bodyPr wrap="square">
-            <a:spAutoFit/>
-          </a:bodyPr>
-          <a:lstStyle/>
-          <a:p>
-            <a:pPr algn="l"/>
-            <a:r>
-              <a:rPr sz="1600" b="0">
-                <a:solidFill>
-                  <a:srgbClr val="5E5A55"/>
-                </a:solidFill>
-                <a:latin typeface="Calibri"/>
-              </a:rPr>
-              <a:t>CFCs and the online order system are there to make delivery faster and cheaper.</a:t>
-            </a:r>
-          </a:p>
-        </p:txBody>
-      </p:sp>
-      <p:sp>
-        <p:nvSpPr>
-          <p:cNvPr id="11" name="Rectangle 10"/>
-          <p:cNvSpPr/>
-          <p:nvPr/>
-        </p:nvSpPr>
-        <p:spPr>
-          <a:xfrm>
-            <a:off x="4297680" y="2880360"/>
-            <a:ext cx="3566160" cy="3017520"/>
-          </a:xfrm>
-          <a:prstGeom prst="rect">
-            <a:avLst/>
-          </a:prstGeom>
-          <a:solidFill>
-            <a:srgbClr val="F6F3EF"/>
-          </a:solidFill>
-          <a:ln>
-            <a:noFill/>
-          </a:ln>
-        </p:spPr>
-        <p:style>
-          <a:lnRef idx="1">
-            <a:schemeClr val="accent1"/>
-          </a:lnRef>
-          <a:fillRef idx="3">
-            <a:schemeClr val="accent1"/>
-          </a:fillRef>
-          <a:effectRef idx="2">
-            <a:schemeClr val="accent1"/>
-          </a:effectRef>
-          <a:fontRef idx="minor">
-            <a:schemeClr val="lt1"/>
-          </a:fontRef>
-        </p:style>
-        <p:txBody>
-          <a:bodyPr rtlCol="0" anchor="ctr"/>
-          <a:lstStyle/>
-          <a:p>
-            <a:pPr algn="ctr"/>
-          </a:p>
-        </p:txBody>
-      </p:sp>
-      <p:sp>
-        <p:nvSpPr>
-          <p:cNvPr id="12" name="TextBox 11"/>
-          <p:cNvSpPr txBox="1"/>
-          <p:nvPr/>
-        </p:nvSpPr>
-        <p:spPr>
-          <a:xfrm>
-            <a:off x="4526280" y="3108960"/>
-            <a:ext cx="3108960" cy="1188720"/>
-          </a:xfrm>
-          <a:prstGeom prst="rect">
-            <a:avLst/>
-          </a:prstGeom>
-          <a:noFill/>
-        </p:spPr>
-        <p:txBody>
-          <a:bodyPr wrap="square">
-            <a:spAutoFit/>
-          </a:bodyPr>
-          <a:lstStyle/>
-          <a:p>
-            <a:pPr algn="l"/>
-            <a:r>
-              <a:rPr sz="2200" b="1">
-                <a:solidFill>
-                  <a:srgbClr val="1C1B1A"/>
-                </a:solidFill>
-                <a:latin typeface="Calibri"/>
-              </a:rPr>
-              <a:t>The order has a record</a:t>
-            </a:r>
-          </a:p>
-        </p:txBody>
-      </p:sp>
-      <p:sp>
-        <p:nvSpPr>
-          <p:cNvPr id="13" name="TextBox 12"/>
-          <p:cNvSpPr txBox="1"/>
-          <p:nvPr/>
-        </p:nvSpPr>
-        <p:spPr>
-          <a:xfrm>
-            <a:off x="4526280" y="4389120"/>
-            <a:ext cx="3108960" cy="1188720"/>
-          </a:xfrm>
-          <a:prstGeom prst="rect">
-            <a:avLst/>
-          </a:prstGeom>
-          <a:noFill/>
-        </p:spPr>
-        <p:txBody>
-          <a:bodyPr wrap="square">
-            <a:spAutoFit/>
-          </a:bodyPr>
-          <a:lstStyle/>
-          <a:p>
-            <a:pPr algn="l"/>
-            <a:r>
-              <a:rPr sz="1600" b="0">
-                <a:solidFill>
-                  <a:srgbClr val="5E5A55"/>
-                </a:solidFill>
-                <a:latin typeface="Calibri"/>
-              </a:rPr>
-              <a:t>A sales order, an outbound delivery and a freight order already describe the journey.</a:t>
-            </a:r>
-          </a:p>
-        </p:txBody>
-      </p:sp>
-      <p:sp>
-        <p:nvSpPr>
-          <p:cNvPr id="14" name="Rectangle 13"/>
-          <p:cNvSpPr/>
-          <p:nvPr/>
-        </p:nvSpPr>
-        <p:spPr>
-          <a:xfrm>
-            <a:off x="8092440" y="2880360"/>
-            <a:ext cx="3566160" cy="3017520"/>
-          </a:xfrm>
-          <a:prstGeom prst="rect">
-            <a:avLst/>
-          </a:prstGeom>
-          <a:solidFill>
-            <a:srgbClr val="F6F3EF"/>
-          </a:solidFill>
-          <a:ln>
-            <a:noFill/>
-          </a:ln>
-        </p:spPr>
-        <p:style>
-          <a:lnRef idx="1">
-            <a:schemeClr val="accent1"/>
-          </a:lnRef>
-          <a:fillRef idx="3">
-            <a:schemeClr val="accent1"/>
-          </a:fillRef>
-          <a:effectRef idx="2">
-            <a:schemeClr val="accent1"/>
-          </a:effectRef>
-          <a:fontRef idx="minor">
-            <a:schemeClr val="lt1"/>
-          </a:fontRef>
-        </p:style>
-        <p:txBody>
-          <a:bodyPr rtlCol="0" anchor="ctr"/>
-          <a:lstStyle/>
-          <a:p>
-            <a:pPr algn="ctr"/>
-          </a:p>
-        </p:txBody>
-      </p:sp>
-      <p:sp>
-        <p:nvSpPr>
-          <p:cNvPr id="15" name="TextBox 14"/>
-          <p:cNvSpPr txBox="1"/>
-          <p:nvPr/>
-        </p:nvSpPr>
-        <p:spPr>
-          <a:xfrm>
-            <a:off x="8321040" y="3108960"/>
-            <a:ext cx="3108960" cy="1188720"/>
-          </a:xfrm>
-          <a:prstGeom prst="rect">
-            <a:avLst/>
-          </a:prstGeom>
-          <a:noFill/>
-        </p:spPr>
-        <p:txBody>
-          <a:bodyPr wrap="square">
-            <a:spAutoFit/>
-          </a:bodyPr>
-          <a:lstStyle/>
-          <a:p>
-            <a:pPr algn="l"/>
-            <a:r>
-              <a:rPr sz="2200" b="1">
-                <a:solidFill>
-                  <a:srgbClr val="1C1B1A"/>
-                </a:solidFill>
-                <a:latin typeface="Calibri"/>
-              </a:rPr>
-              <a:t>The customer gets fragments</a:t>
-            </a:r>
-          </a:p>
-        </p:txBody>
-      </p:sp>
-      <p:sp>
-        <p:nvSpPr>
-          <p:cNvPr id="16" name="TextBox 15"/>
-          <p:cNvSpPr txBox="1"/>
-          <p:nvPr/>
-        </p:nvSpPr>
-        <p:spPr>
-          <a:xfrm>
-            <a:off x="8321040" y="4389120"/>
-            <a:ext cx="3108960" cy="1188720"/>
-          </a:xfrm>
-          <a:prstGeom prst="rect">
-            <a:avLst/>
-          </a:prstGeom>
-          <a:noFill/>
-        </p:spPr>
-        <p:txBody>
-          <a:bodyPr wrap="square">
-            <a:spAutoFit/>
-          </a:bodyPr>
-          <a:lstStyle/>
-          <a:p>
-            <a:pPr algn="l"/>
-            <a:r>
-              <a:rPr sz="1600" b="0">
-                <a:solidFill>
-                  <a:srgbClr val="5E5A55"/>
-                </a:solidFill>
-                <a:latin typeface="Calibri"/>
-              </a:rPr>
-              <a:t>A carrier page, then a phone call, then a refund somewhere else.</a:t>
-            </a:r>
-          </a:p>
-        </p:txBody>
-      </p:sp>
-    </p:spTree>
-  </p:cSld>
-  <p:clrMapOvr>
-    <a:masterClrMapping/>
-  </p:clrMapOvr>
-</p:sld>
-</file>
-
-<file path=ppt/slides/slide3.xml><?xml version="1.0" encoding="utf-8"?>
-<p:sld xmlns:a="http://schemas.openxmlformats.org/drawingml/2006/main" xmlns:p="http://schemas.openxmlformats.org/presentationml/2006/main" xmlns:r="http://schemas.openxmlformats.org/officeDocument/2006/relationships">
-  <p:cSld>
-    <p:spTree>
-      <p:nvGrpSpPr>
-        <p:cNvPr id="1" name=""/>
-        <p:cNvGrpSpPr/>
-        <p:nvPr/>
-      </p:nvGrpSpPr>
-      <p:grpSpPr/>
-      <p:sp>
-        <p:nvSpPr>
-          <p:cNvPr id="2" name="Rectangle 1"/>
-          <p:cNvSpPr/>
-          <p:nvPr/>
-        </p:nvSpPr>
-        <p:spPr>
-          <a:xfrm>
-            <a:off x="0" y="0"/>
-            <a:ext cx="12191695" cy="6858000"/>
-          </a:xfrm>
-          <a:prstGeom prst="rect">
-            <a:avLst/>
-          </a:prstGeom>
-          <a:solidFill>
-            <a:srgbClr val="FFFFFF"/>
-          </a:solidFill>
-          <a:ln>
-            <a:noFill/>
-          </a:ln>
-        </p:spPr>
-        <p:style>
-          <a:lnRef idx="1">
-            <a:schemeClr val="accent1"/>
-          </a:lnRef>
-          <a:fillRef idx="3">
-            <a:schemeClr val="accent1"/>
-          </a:fillRef>
-          <a:effectRef idx="2">
-            <a:schemeClr val="accent1"/>
-          </a:effectRef>
-          <a:fontRef idx="minor">
-            <a:schemeClr val="lt1"/>
-          </a:fontRef>
-        </p:style>
-        <p:txBody>
-          <a:bodyPr rtlCol="0" anchor="ctr"/>
-          <a:lstStyle/>
-          <a:p>
-            <a:pPr algn="ctr"/>
-          </a:p>
-        </p:txBody>
-      </p:sp>
-      <p:sp>
-        <p:nvSpPr>
-          <p:cNvPr id="3" name="Rectangle 2"/>
-          <p:cNvSpPr/>
-          <p:nvPr/>
-        </p:nvSpPr>
-        <p:spPr>
-          <a:xfrm>
-            <a:off x="0" y="0"/>
-            <a:ext cx="12191695" cy="73152"/>
-          </a:xfrm>
-          <a:prstGeom prst="rect">
-            <a:avLst/>
-          </a:prstGeom>
-          <a:solidFill>
-            <a:srgbClr val="E10600"/>
-          </a:solidFill>
-          <a:ln>
-            <a:noFill/>
-          </a:ln>
-        </p:spPr>
-        <p:style>
-          <a:lnRef idx="1">
-            <a:schemeClr val="accent1"/>
-          </a:lnRef>
-          <a:fillRef idx="3">
-            <a:schemeClr val="accent1"/>
-          </a:fillRef>
-          <a:effectRef idx="2">
-            <a:schemeClr val="accent1"/>
-          </a:effectRef>
-          <a:fontRef idx="minor">
-            <a:schemeClr val="lt1"/>
-          </a:fontRef>
-        </p:style>
-        <p:txBody>
-          <a:bodyPr rtlCol="0" anchor="ctr"/>
-          <a:lstStyle/>
-          <a:p>
-            <a:pPr algn="ctr"/>
-          </a:p>
-        </p:txBody>
-      </p:sp>
-      <p:sp>
-        <p:nvSpPr>
-          <p:cNvPr id="4" name="TextBox 3"/>
-          <p:cNvSpPr txBox="1"/>
-          <p:nvPr/>
-        </p:nvSpPr>
-        <p:spPr>
-          <a:xfrm>
-            <a:off x="502920" y="6510528"/>
-            <a:ext cx="7315200" cy="256032"/>
-          </a:xfrm>
-          <a:prstGeom prst="rect">
-            <a:avLst/>
-          </a:prstGeom>
-          <a:noFill/>
-        </p:spPr>
-        <p:txBody>
-          <a:bodyPr wrap="square">
-            <a:spAutoFit/>
-          </a:bodyPr>
-          <a:lstStyle/>
-          <a:p>
-            <a:pPr algn="l"/>
-            <a:r>
-              <a:rPr sz="1200" b="0">
-                <a:solidFill>
-                  <a:srgbClr val="5E5A55"/>
-                </a:solidFill>
-                <a:latin typeface="Calibri"/>
-              </a:rPr>
-              <a:t>Kmart Delivery Assist  ·  Managing Director</a:t>
-            </a:r>
-          </a:p>
-        </p:txBody>
-      </p:sp>
-      <p:sp>
-        <p:nvSpPr>
-          <p:cNvPr id="5" name="TextBox 4"/>
-          <p:cNvSpPr txBox="1"/>
-          <p:nvPr/>
-        </p:nvSpPr>
-        <p:spPr>
-          <a:xfrm>
-            <a:off x="9509760" y="6510528"/>
-            <a:ext cx="2194560" cy="256032"/>
-          </a:xfrm>
-          <a:prstGeom prst="rect">
-            <a:avLst/>
-          </a:prstGeom>
-          <a:noFill/>
-        </p:spPr>
-        <p:txBody>
-          <a:bodyPr wrap="square">
-            <a:spAutoFit/>
-          </a:bodyPr>
-          <a:lstStyle/>
-          <a:p>
-            <a:pPr algn="r"/>
-            <a:r>
-              <a:rPr sz="1200" b="0">
-                <a:solidFill>
-                  <a:srgbClr val="5E5A55"/>
-                </a:solidFill>
-                <a:latin typeface="Calibri"/>
-              </a:rPr>
-              <a:t>3  /  9</a:t>
-            </a:r>
-          </a:p>
-        </p:txBody>
-      </p:sp>
-      <p:sp>
-        <p:nvSpPr>
-          <p:cNvPr id="6" name="TextBox 5"/>
-          <p:cNvSpPr txBox="1"/>
-          <p:nvPr/>
-        </p:nvSpPr>
-        <p:spPr>
-          <a:xfrm>
-            <a:off x="502920" y="320040"/>
-            <a:ext cx="3657600" cy="274320"/>
-          </a:xfrm>
-          <a:prstGeom prst="rect">
-            <a:avLst/>
-          </a:prstGeom>
-          <a:noFill/>
-        </p:spPr>
-        <p:txBody>
-          <a:bodyPr wrap="square">
-            <a:spAutoFit/>
-          </a:bodyPr>
-          <a:lstStyle/>
-          <a:p>
-            <a:pPr algn="l"/>
-            <a:r>
-              <a:rPr sz="1400" b="1">
-                <a:solidFill>
-                  <a:srgbClr val="E10600"/>
-                </a:solidFill>
-                <a:latin typeface="Calibri"/>
-              </a:rPr>
-              <a:t>COMPLICATION</a:t>
-            </a:r>
-          </a:p>
-        </p:txBody>
-      </p:sp>
-      <p:sp>
-        <p:nvSpPr>
-          <p:cNvPr id="7" name="TextBox 6"/>
-          <p:cNvSpPr txBox="1"/>
-          <p:nvPr/>
-        </p:nvSpPr>
-        <p:spPr>
-          <a:xfrm>
-            <a:off x="502920" y="685800"/>
-            <a:ext cx="10972800" cy="1371600"/>
-          </a:xfrm>
-          <a:prstGeom prst="rect">
-            <a:avLst/>
-          </a:prstGeom>
-          <a:noFill/>
-        </p:spPr>
-        <p:txBody>
-          <a:bodyPr wrap="square">
-            <a:spAutoFit/>
-          </a:bodyPr>
-          <a:lstStyle/>
-          <a:p>
-            <a:pPr algn="l"/>
-            <a:r>
-              <a:rPr sz="3200" b="1">
-                <a:solidFill>
-                  <a:srgbClr val="1C1B1A"/>
-                </a:solidFill>
-                <a:latin typeface="Calibri"/>
-              </a:rPr>
-              <a:t>A failed delivery becomes an exception
-nobody closes with the customer.</a:t>
-            </a:r>
-          </a:p>
-        </p:txBody>
-      </p:sp>
-      <p:sp>
-        <p:nvSpPr>
-          <p:cNvPr id="8" name="TextBox 7"/>
-          <p:cNvSpPr txBox="1"/>
-          <p:nvPr/>
-        </p:nvSpPr>
-        <p:spPr>
-          <a:xfrm>
-            <a:off x="502920" y="2468880"/>
-            <a:ext cx="2926080" cy="731520"/>
-          </a:xfrm>
-          <a:prstGeom prst="rect">
-            <a:avLst/>
-          </a:prstGeom>
-          <a:noFill/>
-        </p:spPr>
-        <p:txBody>
-          <a:bodyPr wrap="square">
-            <a:spAutoFit/>
-          </a:bodyPr>
-          <a:lstStyle/>
-          <a:p>
-            <a:pPr algn="l"/>
-            <a:r>
-              <a:rPr sz="2200" b="1">
-                <a:solidFill>
-                  <a:srgbClr val="E10600"/>
-                </a:solidFill>
-                <a:latin typeface="Calibri"/>
-              </a:rPr>
-              <a:t>The customer</a:t>
-            </a:r>
-          </a:p>
-        </p:txBody>
-      </p:sp>
-      <p:sp>
-        <p:nvSpPr>
-          <p:cNvPr id="9" name="TextBox 8"/>
-          <p:cNvSpPr txBox="1"/>
-          <p:nvPr/>
-        </p:nvSpPr>
-        <p:spPr>
-          <a:xfrm>
-            <a:off x="3474720" y="2468880"/>
-            <a:ext cx="7863840" cy="822960"/>
-          </a:xfrm>
-          <a:prstGeom prst="rect">
-            <a:avLst/>
-          </a:prstGeom>
-          <a:noFill/>
-        </p:spPr>
-        <p:txBody>
-          <a:bodyPr wrap="square">
-            <a:spAutoFit/>
-          </a:bodyPr>
-          <a:lstStyle/>
-          <a:p>
-            <a:pPr algn="l"/>
-            <a:r>
-              <a:rPr sz="2200" b="0">
-                <a:solidFill>
-                  <a:srgbClr val="1C1B1A"/>
-                </a:solidFill>
-                <a:latin typeface="Calibri"/>
-              </a:rPr>
-              <a:t>Cannot tell a delay from a failed attempt, or choose the next step.</a:t>
-            </a:r>
-          </a:p>
-        </p:txBody>
-      </p:sp>
-      <p:sp>
-        <p:nvSpPr>
-          <p:cNvPr id="10" name="TextBox 9"/>
-          <p:cNvSpPr txBox="1"/>
-          <p:nvPr/>
-        </p:nvSpPr>
-        <p:spPr>
-          <a:xfrm>
-            <a:off x="502920" y="3611880"/>
-            <a:ext cx="2926080" cy="731520"/>
-          </a:xfrm>
-          <a:prstGeom prst="rect">
-            <a:avLst/>
-          </a:prstGeom>
-          <a:noFill/>
-        </p:spPr>
-        <p:txBody>
-          <a:bodyPr wrap="square">
-            <a:spAutoFit/>
-          </a:bodyPr>
-          <a:lstStyle/>
-          <a:p>
-            <a:pPr algn="l"/>
-            <a:r>
-              <a:rPr sz="2200" b="1">
-                <a:solidFill>
-                  <a:srgbClr val="E10600"/>
-                </a:solidFill>
-                <a:latin typeface="Calibri"/>
-              </a:rPr>
-              <a:t>The order</a:t>
-            </a:r>
-          </a:p>
-        </p:txBody>
-      </p:sp>
-      <p:sp>
-        <p:nvSpPr>
-          <p:cNvPr id="11" name="TextBox 10"/>
-          <p:cNvSpPr txBox="1"/>
-          <p:nvPr/>
-        </p:nvSpPr>
-        <p:spPr>
-          <a:xfrm>
-            <a:off x="3474720" y="3611880"/>
-            <a:ext cx="7863840" cy="822960"/>
-          </a:xfrm>
-          <a:prstGeom prst="rect">
-            <a:avLst/>
-          </a:prstGeom>
-          <a:noFill/>
-        </p:spPr>
-        <p:txBody>
-          <a:bodyPr wrap="square">
-            <a:spAutoFit/>
-          </a:bodyPr>
-          <a:lstStyle/>
-          <a:p>
-            <a:pPr algn="l"/>
-            <a:r>
-              <a:rPr sz="2200" b="0">
-                <a:solidFill>
-                  <a:srgbClr val="1C1B1A"/>
-                </a:solidFill>
-                <a:latin typeface="Calibri"/>
-              </a:rPr>
-              <a:t>Waits. A redelivery, a collection, a replacement or a refund are separate queues.</a:t>
-            </a:r>
-          </a:p>
-        </p:txBody>
-      </p:sp>
-      <p:sp>
-        <p:nvSpPr>
-          <p:cNvPr id="12" name="TextBox 11"/>
-          <p:cNvSpPr txBox="1"/>
-          <p:nvPr/>
-        </p:nvSpPr>
-        <p:spPr>
-          <a:xfrm>
-            <a:off x="502920" y="4754880"/>
-            <a:ext cx="2926080" cy="731520"/>
-          </a:xfrm>
-          <a:prstGeom prst="rect">
-            <a:avLst/>
-          </a:prstGeom>
-          <a:noFill/>
-        </p:spPr>
-        <p:txBody>
-          <a:bodyPr wrap="square">
-            <a:spAutoFit/>
-          </a:bodyPr>
-          <a:lstStyle/>
-          <a:p>
-            <a:pPr algn="l"/>
-            <a:r>
-              <a:rPr sz="2200" b="1">
-                <a:solidFill>
-                  <a:srgbClr val="E10600"/>
-                </a:solidFill>
-                <a:latin typeface="Calibri"/>
-              </a:rPr>
-              <a:t>The result</a:t>
-            </a:r>
-          </a:p>
-        </p:txBody>
-      </p:sp>
-      <p:sp>
-        <p:nvSpPr>
-          <p:cNvPr id="13" name="TextBox 12"/>
-          <p:cNvSpPr txBox="1"/>
-          <p:nvPr/>
-        </p:nvSpPr>
-        <p:spPr>
-          <a:xfrm>
-            <a:off x="3474720" y="4754880"/>
-            <a:ext cx="7863840" cy="822960"/>
-          </a:xfrm>
-          <a:prstGeom prst="rect">
-            <a:avLst/>
-          </a:prstGeom>
-          <a:noFill/>
-        </p:spPr>
-        <p:txBody>
-          <a:bodyPr wrap="square">
-            <a:spAutoFit/>
-          </a:bodyPr>
-          <a:lstStyle/>
-          <a:p>
-            <a:pPr algn="l"/>
-            <a:r>
-              <a:rPr sz="2200" b="0">
-                <a:solidFill>
-                  <a:srgbClr val="1C1B1A"/>
-                </a:solidFill>
-                <a:latin typeface="Calibri"/>
-              </a:rPr>
-              <a:t>Service slips, and a completed order — the outcome the programme protects — is lost.</a:t>
-            </a:r>
-          </a:p>
-        </p:txBody>
-      </p:sp>
-    </p:spTree>
-  </p:cSld>
-  <p:clrMapOvr>
-    <a:masterClrMapping/>
-  </p:clrMapOvr>
-</p:sld>
-</file>
-
-<file path=ppt/slides/slide4.xml><?xml version="1.0" encoding="utf-8"?>
-<p:sld xmlns:a="http://schemas.openxmlformats.org/drawingml/2006/main" xmlns:p="http://schemas.openxmlformats.org/presentationml/2006/main" xmlns:r="http://schemas.openxmlformats.org/officeDocument/2006/relationships">
-  <p:cSld>
-    <p:spTree>
-      <p:nvGrpSpPr>
-        <p:cNvPr id="1" name=""/>
-        <p:cNvGrpSpPr/>
-        <p:nvPr/>
-      </p:nvGrpSpPr>
-      <p:grpSpPr/>
-      <p:sp>
-        <p:nvSpPr>
-          <p:cNvPr id="2" name="Rectangle 1"/>
-          <p:cNvSpPr/>
-          <p:nvPr/>
-        </p:nvSpPr>
-        <p:spPr>
-          <a:xfrm>
-            <a:off x="0" y="0"/>
-            <a:ext cx="12191695" cy="6858000"/>
-          </a:xfrm>
-          <a:prstGeom prst="rect">
-            <a:avLst/>
-          </a:prstGeom>
-          <a:solidFill>
-            <a:srgbClr val="FFFFFF"/>
-          </a:solidFill>
-          <a:ln>
-            <a:noFill/>
-          </a:ln>
-        </p:spPr>
-        <p:style>
-          <a:lnRef idx="1">
-            <a:schemeClr val="accent1"/>
-          </a:lnRef>
-          <a:fillRef idx="3">
-            <a:schemeClr val="accent1"/>
-          </a:fillRef>
-          <a:effectRef idx="2">
-            <a:schemeClr val="accent1"/>
-          </a:effectRef>
-          <a:fontRef idx="minor">
-            <a:schemeClr val="lt1"/>
-          </a:fontRef>
-        </p:style>
-        <p:txBody>
-          <a:bodyPr rtlCol="0" anchor="ctr"/>
-          <a:lstStyle/>
-          <a:p>
-            <a:pPr algn="ctr"/>
-          </a:p>
-        </p:txBody>
-      </p:sp>
-      <p:sp>
-        <p:nvSpPr>
-          <p:cNvPr id="3" name="Rectangle 2"/>
-          <p:cNvSpPr/>
-          <p:nvPr/>
-        </p:nvSpPr>
-        <p:spPr>
-          <a:xfrm>
-            <a:off x="0" y="0"/>
-            <a:ext cx="12191695" cy="73152"/>
-          </a:xfrm>
-          <a:prstGeom prst="rect">
-            <a:avLst/>
-          </a:prstGeom>
-          <a:solidFill>
-            <a:srgbClr val="E10600"/>
-          </a:solidFill>
-          <a:ln>
-            <a:noFill/>
-          </a:ln>
-        </p:spPr>
-        <p:style>
-          <a:lnRef idx="1">
-            <a:schemeClr val="accent1"/>
-          </a:lnRef>
-          <a:fillRef idx="3">
-            <a:schemeClr val="accent1"/>
-          </a:fillRef>
-          <a:effectRef idx="2">
-            <a:schemeClr val="accent1"/>
-          </a:effectRef>
-          <a:fontRef idx="minor">
-            <a:schemeClr val="lt1"/>
-          </a:fontRef>
-        </p:style>
-        <p:txBody>
-          <a:bodyPr rtlCol="0" anchor="ctr"/>
-          <a:lstStyle/>
-          <a:p>
-            <a:pPr algn="ctr"/>
-          </a:p>
-        </p:txBody>
-      </p:sp>
-      <p:sp>
-        <p:nvSpPr>
-          <p:cNvPr id="4" name="TextBox 3"/>
-          <p:cNvSpPr txBox="1"/>
-          <p:nvPr/>
-        </p:nvSpPr>
-        <p:spPr>
-          <a:xfrm>
-            <a:off x="502920" y="6510528"/>
-            <a:ext cx="7315200" cy="256032"/>
-          </a:xfrm>
-          <a:prstGeom prst="rect">
-            <a:avLst/>
-          </a:prstGeom>
-          <a:noFill/>
-        </p:spPr>
-        <p:txBody>
-          <a:bodyPr wrap="square">
-            <a:spAutoFit/>
-          </a:bodyPr>
-          <a:lstStyle/>
-          <a:p>
-            <a:pPr algn="l"/>
-            <a:r>
-              <a:rPr sz="1200" b="0">
-                <a:solidFill>
-                  <a:srgbClr val="5E5A55"/>
-                </a:solidFill>
-                <a:latin typeface="Calibri"/>
-              </a:rPr>
-              <a:t>Kmart Delivery Assist  ·  Managing Director</a:t>
-            </a:r>
-          </a:p>
-        </p:txBody>
-      </p:sp>
-      <p:sp>
-        <p:nvSpPr>
-          <p:cNvPr id="5" name="TextBox 4"/>
-          <p:cNvSpPr txBox="1"/>
-          <p:nvPr/>
-        </p:nvSpPr>
-        <p:spPr>
-          <a:xfrm>
-            <a:off x="9509760" y="6510528"/>
-            <a:ext cx="2194560" cy="256032"/>
-          </a:xfrm>
-          <a:prstGeom prst="rect">
-            <a:avLst/>
-          </a:prstGeom>
-          <a:noFill/>
-        </p:spPr>
-        <p:txBody>
-          <a:bodyPr wrap="square">
-            <a:spAutoFit/>
-          </a:bodyPr>
-          <a:lstStyle/>
-          <a:p>
-            <a:pPr algn="r"/>
-            <a:r>
-              <a:rPr sz="1200" b="0">
-                <a:solidFill>
-                  <a:srgbClr val="5E5A55"/>
-                </a:solidFill>
-                <a:latin typeface="Calibri"/>
-              </a:rPr>
-              <a:t>4  /  9</a:t>
-            </a:r>
-          </a:p>
-        </p:txBody>
-      </p:sp>
-      <p:sp>
-        <p:nvSpPr>
-          <p:cNvPr id="6" name="TextBox 5"/>
-          <p:cNvSpPr txBox="1"/>
-          <p:nvPr/>
-        </p:nvSpPr>
-        <p:spPr>
-          <a:xfrm>
-            <a:off x="502920" y="320040"/>
-            <a:ext cx="3657600" cy="274320"/>
-          </a:xfrm>
-          <a:prstGeom prst="rect">
-            <a:avLst/>
-          </a:prstGeom>
-          <a:noFill/>
-        </p:spPr>
-        <p:txBody>
-          <a:bodyPr wrap="square">
-            <a:spAutoFit/>
-          </a:bodyPr>
-          <a:lstStyle/>
-          <a:p>
-            <a:pPr algn="l"/>
-            <a:r>
-              <a:rPr sz="1400" b="1">
-                <a:solidFill>
-                  <a:srgbClr val="E10600"/>
-                </a:solidFill>
-                <a:latin typeface="Calibri"/>
-              </a:rPr>
-              <a:t>RESOLUTION</a:t>
-            </a:r>
-          </a:p>
-        </p:txBody>
-      </p:sp>
-      <p:sp>
-        <p:nvSpPr>
-          <p:cNvPr id="7" name="TextBox 6"/>
-          <p:cNvSpPr txBox="1"/>
-          <p:nvPr/>
-        </p:nvSpPr>
-        <p:spPr>
-          <a:xfrm>
-            <a:off x="502920" y="640080"/>
-            <a:ext cx="10972800" cy="914400"/>
-          </a:xfrm>
-          <a:prstGeom prst="rect">
-            <a:avLst/>
-          </a:prstGeom>
-          <a:noFill/>
-        </p:spPr>
-        <p:txBody>
-          <a:bodyPr wrap="square">
-            <a:spAutoFit/>
-          </a:bodyPr>
-          <a:lstStyle/>
-          <a:p>
-            <a:pPr algn="l"/>
-            <a:r>
-              <a:rPr sz="3200" b="1">
-                <a:solidFill>
-                  <a:srgbClr val="1C1B1A"/>
-                </a:solidFill>
-                <a:latin typeface="Calibri"/>
-              </a:rPr>
-              <a:t>One Kmart journey. One service request.</a:t>
-            </a:r>
-          </a:p>
-        </p:txBody>
-      </p:sp>
-      <p:sp>
-        <p:nvSpPr>
-          <p:cNvPr id="8" name="Rectangle 7"/>
-          <p:cNvSpPr/>
-          <p:nvPr/>
-        </p:nvSpPr>
-        <p:spPr>
-          <a:xfrm>
-            <a:off x="457200" y="2286000"/>
-            <a:ext cx="1783080" cy="2286000"/>
-          </a:xfrm>
-          <a:prstGeom prst="rect">
-            <a:avLst/>
-          </a:prstGeom>
-          <a:solidFill>
-            <a:srgbClr val="E10600"/>
-          </a:solidFill>
-          <a:ln>
-            <a:noFill/>
-          </a:ln>
-        </p:spPr>
-        <p:style>
-          <a:lnRef idx="1">
-            <a:schemeClr val="accent1"/>
-          </a:lnRef>
-          <a:fillRef idx="3">
-            <a:schemeClr val="accent1"/>
-          </a:fillRef>
-          <a:effectRef idx="2">
-            <a:schemeClr val="accent1"/>
-          </a:effectRef>
-          <a:fontRef idx="minor">
-            <a:schemeClr val="lt1"/>
-          </a:fontRef>
-        </p:style>
-        <p:txBody>
-          <a:bodyPr rtlCol="0" anchor="ctr"/>
-          <a:lstStyle/>
-          <a:p>
-            <a:pPr algn="ctr"/>
-          </a:p>
-        </p:txBody>
-      </p:sp>
-      <p:sp>
-        <p:nvSpPr>
-          <p:cNvPr id="9" name="TextBox 8"/>
-          <p:cNvSpPr txBox="1"/>
-          <p:nvPr/>
-        </p:nvSpPr>
-        <p:spPr>
-          <a:xfrm>
-            <a:off x="566928" y="2423160"/>
-            <a:ext cx="1554480" cy="365760"/>
-          </a:xfrm>
-          <a:prstGeom prst="rect">
-            <a:avLst/>
-          </a:prstGeom>
-          <a:noFill/>
-        </p:spPr>
-        <p:txBody>
-          <a:bodyPr wrap="square">
-            <a:spAutoFit/>
-          </a:bodyPr>
-          <a:lstStyle/>
-          <a:p>
-            <a:pPr algn="l"/>
-            <a:r>
-              <a:rPr sz="1400" b="1">
-                <a:solidFill>
-                  <a:srgbClr val="FFFFFF"/>
-                </a:solidFill>
-                <a:latin typeface="Calibri"/>
-              </a:rPr>
-              <a:t>01</a:t>
-            </a:r>
-          </a:p>
-        </p:txBody>
-      </p:sp>
-      <p:sp>
-        <p:nvSpPr>
-          <p:cNvPr id="10" name="TextBox 9"/>
-          <p:cNvSpPr txBox="1"/>
-          <p:nvPr/>
-        </p:nvSpPr>
-        <p:spPr>
-          <a:xfrm>
-            <a:off x="566928" y="2880360"/>
-            <a:ext cx="1554480" cy="1371600"/>
-          </a:xfrm>
-          <a:prstGeom prst="rect">
-            <a:avLst/>
-          </a:prstGeom>
-          <a:noFill/>
-        </p:spPr>
-        <p:txBody>
-          <a:bodyPr wrap="square">
-            <a:spAutoFit/>
-          </a:bodyPr>
-          <a:lstStyle/>
-          <a:p>
-            <a:pPr algn="l"/>
-            <a:r>
-              <a:rPr sz="1600" b="1">
-                <a:solidFill>
-                  <a:srgbClr val="FFFFFF"/>
-                </a:solidFill>
-                <a:latin typeface="Calibri"/>
-              </a:rPr>
-              <a:t>Track my
-order</a:t>
-            </a:r>
-          </a:p>
-        </p:txBody>
-      </p:sp>
-      <p:sp>
-        <p:nvSpPr>
-          <p:cNvPr id="11" name="Rectangle 10"/>
-          <p:cNvSpPr/>
-          <p:nvPr/>
-        </p:nvSpPr>
-        <p:spPr>
-          <a:xfrm>
-            <a:off x="2395728" y="2286000"/>
-            <a:ext cx="1783080" cy="2286000"/>
-          </a:xfrm>
-          <a:prstGeom prst="rect">
-            <a:avLst/>
-          </a:prstGeom>
-          <a:solidFill>
-            <a:srgbClr val="F6F3EF"/>
-          </a:solidFill>
-          <a:ln>
-            <a:noFill/>
-          </a:ln>
-        </p:spPr>
-        <p:style>
-          <a:lnRef idx="1">
-            <a:schemeClr val="accent1"/>
-          </a:lnRef>
-          <a:fillRef idx="3">
-            <a:schemeClr val="accent1"/>
-          </a:fillRef>
-          <a:effectRef idx="2">
-            <a:schemeClr val="accent1"/>
-          </a:effectRef>
-          <a:fontRef idx="minor">
-            <a:schemeClr val="lt1"/>
-          </a:fontRef>
-        </p:style>
-        <p:txBody>
-          <a:bodyPr rtlCol="0" anchor="ctr"/>
-          <a:lstStyle/>
-          <a:p>
-            <a:pPr algn="ctr"/>
-          </a:p>
-        </p:txBody>
-      </p:sp>
-      <p:sp>
-        <p:nvSpPr>
-          <p:cNvPr id="12" name="TextBox 11"/>
-          <p:cNvSpPr txBox="1"/>
-          <p:nvPr/>
-        </p:nvSpPr>
-        <p:spPr>
-          <a:xfrm>
-            <a:off x="2505456" y="2423160"/>
-            <a:ext cx="1554480" cy="365760"/>
-          </a:xfrm>
-          <a:prstGeom prst="rect">
-            <a:avLst/>
-          </a:prstGeom>
-          <a:noFill/>
-        </p:spPr>
-        <p:txBody>
-          <a:bodyPr wrap="square">
-            <a:spAutoFit/>
-          </a:bodyPr>
-          <a:lstStyle/>
-          <a:p>
-            <a:pPr algn="l"/>
-            <a:r>
-              <a:rPr sz="1400" b="1">
-                <a:solidFill>
-                  <a:srgbClr val="E10600"/>
-                </a:solidFill>
-                <a:latin typeface="Calibri"/>
-              </a:rPr>
-              <a:t>02</a:t>
-            </a:r>
-          </a:p>
-        </p:txBody>
-      </p:sp>
-      <p:sp>
-        <p:nvSpPr>
-          <p:cNvPr id="13" name="TextBox 12"/>
-          <p:cNvSpPr txBox="1"/>
-          <p:nvPr/>
-        </p:nvSpPr>
-        <p:spPr>
-          <a:xfrm>
-            <a:off x="2505456" y="2880360"/>
-            <a:ext cx="1554480" cy="1371600"/>
-          </a:xfrm>
-          <a:prstGeom prst="rect">
-            <a:avLst/>
-          </a:prstGeom>
-          <a:noFill/>
-        </p:spPr>
-        <p:txBody>
-          <a:bodyPr wrap="square">
-            <a:spAutoFit/>
-          </a:bodyPr>
-          <a:lstStyle/>
-          <a:p>
-            <a:pPr algn="l"/>
-            <a:r>
-              <a:rPr sz="1600" b="1">
-                <a:solidFill>
-                  <a:srgbClr val="1C1B1A"/>
-                </a:solidFill>
-                <a:latin typeface="Calibri"/>
-              </a:rPr>
-              <a:t>Understand
-what is happening</a:t>
-            </a:r>
-          </a:p>
-        </p:txBody>
-      </p:sp>
-      <p:sp>
-        <p:nvSpPr>
-          <p:cNvPr id="14" name="Rectangle 13"/>
-          <p:cNvSpPr/>
-          <p:nvPr/>
-        </p:nvSpPr>
-        <p:spPr>
-          <a:xfrm>
-            <a:off x="4334256" y="2286000"/>
-            <a:ext cx="1783080" cy="2286000"/>
-          </a:xfrm>
-          <a:prstGeom prst="rect">
-            <a:avLst/>
-          </a:prstGeom>
-          <a:solidFill>
-            <a:srgbClr val="F6F3EF"/>
-          </a:solidFill>
-          <a:ln>
-            <a:noFill/>
-          </a:ln>
-        </p:spPr>
-        <p:style>
-          <a:lnRef idx="1">
-            <a:schemeClr val="accent1"/>
-          </a:lnRef>
-          <a:fillRef idx="3">
-            <a:schemeClr val="accent1"/>
-          </a:fillRef>
-          <a:effectRef idx="2">
-            <a:schemeClr val="accent1"/>
-          </a:effectRef>
-          <a:fontRef idx="minor">
-            <a:schemeClr val="lt1"/>
-          </a:fontRef>
-        </p:style>
-        <p:txBody>
-          <a:bodyPr rtlCol="0" anchor="ctr"/>
-          <a:lstStyle/>
-          <a:p>
-            <a:pPr algn="ctr"/>
-          </a:p>
-        </p:txBody>
-      </p:sp>
-      <p:sp>
-        <p:nvSpPr>
-          <p:cNvPr id="15" name="TextBox 14"/>
-          <p:cNvSpPr txBox="1"/>
-          <p:nvPr/>
-        </p:nvSpPr>
-        <p:spPr>
-          <a:xfrm>
-            <a:off x="4443984" y="2423160"/>
-            <a:ext cx="1554480" cy="365760"/>
-          </a:xfrm>
-          <a:prstGeom prst="rect">
-            <a:avLst/>
-          </a:prstGeom>
-          <a:noFill/>
-        </p:spPr>
-        <p:txBody>
-          <a:bodyPr wrap="square">
-            <a:spAutoFit/>
-          </a:bodyPr>
-          <a:lstStyle/>
-          <a:p>
-            <a:pPr algn="l"/>
-            <a:r>
-              <a:rPr sz="1400" b="1">
-                <a:solidFill>
-                  <a:srgbClr val="E10600"/>
-                </a:solidFill>
-                <a:latin typeface="Calibri"/>
-              </a:rPr>
-              <a:t>03</a:t>
-            </a:r>
-          </a:p>
-        </p:txBody>
-      </p:sp>
-      <p:sp>
-        <p:nvSpPr>
-          <p:cNvPr id="16" name="TextBox 15"/>
-          <p:cNvSpPr txBox="1"/>
-          <p:nvPr/>
-        </p:nvSpPr>
-        <p:spPr>
-          <a:xfrm>
-            <a:off x="4443984" y="2880360"/>
-            <a:ext cx="1554480" cy="1371600"/>
-          </a:xfrm>
-          <a:prstGeom prst="rect">
-            <a:avLst/>
-          </a:prstGeom>
-          <a:noFill/>
-        </p:spPr>
-        <p:txBody>
-          <a:bodyPr wrap="square">
-            <a:spAutoFit/>
-          </a:bodyPr>
-          <a:lstStyle/>
-          <a:p>
-            <a:pPr algn="l"/>
-            <a:r>
-              <a:rPr sz="1600" b="1">
-                <a:solidFill>
-                  <a:srgbClr val="1C1B1A"/>
-                </a:solidFill>
-                <a:latin typeface="Calibri"/>
-              </a:rPr>
-              <a:t>Identify the
-problem</a:t>
-            </a:r>
-          </a:p>
-        </p:txBody>
-      </p:sp>
-      <p:sp>
-        <p:nvSpPr>
-          <p:cNvPr id="17" name="Rectangle 16"/>
-          <p:cNvSpPr/>
-          <p:nvPr/>
-        </p:nvSpPr>
-        <p:spPr>
-          <a:xfrm>
-            <a:off x="6272784" y="2286000"/>
-            <a:ext cx="1783080" cy="2286000"/>
-          </a:xfrm>
-          <a:prstGeom prst="rect">
-            <a:avLst/>
-          </a:prstGeom>
-          <a:solidFill>
-            <a:srgbClr val="F6F3EF"/>
-          </a:solidFill>
-          <a:ln>
-            <a:noFill/>
-          </a:ln>
-        </p:spPr>
-        <p:style>
-          <a:lnRef idx="1">
-            <a:schemeClr val="accent1"/>
-          </a:lnRef>
-          <a:fillRef idx="3">
-            <a:schemeClr val="accent1"/>
-          </a:fillRef>
-          <a:effectRef idx="2">
-            <a:schemeClr val="accent1"/>
-          </a:effectRef>
-          <a:fontRef idx="minor">
-            <a:schemeClr val="lt1"/>
-          </a:fontRef>
-        </p:style>
-        <p:txBody>
-          <a:bodyPr rtlCol="0" anchor="ctr"/>
-          <a:lstStyle/>
-          <a:p>
-            <a:pPr algn="ctr"/>
-          </a:p>
-        </p:txBody>
-      </p:sp>
-      <p:sp>
-        <p:nvSpPr>
-          <p:cNvPr id="18" name="TextBox 17"/>
-          <p:cNvSpPr txBox="1"/>
-          <p:nvPr/>
-        </p:nvSpPr>
-        <p:spPr>
-          <a:xfrm>
-            <a:off x="6382512" y="2423160"/>
-            <a:ext cx="1554480" cy="365760"/>
-          </a:xfrm>
-          <a:prstGeom prst="rect">
-            <a:avLst/>
-          </a:prstGeom>
-          <a:noFill/>
-        </p:spPr>
-        <p:txBody>
-          <a:bodyPr wrap="square">
-            <a:spAutoFit/>
-          </a:bodyPr>
-          <a:lstStyle/>
-          <a:p>
-            <a:pPr algn="l"/>
-            <a:r>
-              <a:rPr sz="1400" b="1">
-                <a:solidFill>
-                  <a:srgbClr val="E10600"/>
-                </a:solidFill>
-                <a:latin typeface="Calibri"/>
-              </a:rPr>
-              <a:t>04</a:t>
-            </a:r>
-          </a:p>
-        </p:txBody>
-      </p:sp>
-      <p:sp>
-        <p:nvSpPr>
-          <p:cNvPr id="19" name="TextBox 18"/>
-          <p:cNvSpPr txBox="1"/>
-          <p:nvPr/>
-        </p:nvSpPr>
-        <p:spPr>
-          <a:xfrm>
-            <a:off x="6382512" y="2880360"/>
-            <a:ext cx="1554480" cy="1371600"/>
-          </a:xfrm>
-          <a:prstGeom prst="rect">
-            <a:avLst/>
-          </a:prstGeom>
-          <a:noFill/>
-        </p:spPr>
-        <p:txBody>
-          <a:bodyPr wrap="square">
-            <a:spAutoFit/>
-          </a:bodyPr>
-          <a:lstStyle/>
-          <a:p>
-            <a:pPr algn="l"/>
-            <a:r>
-              <a:rPr sz="1600" b="1">
-                <a:solidFill>
-                  <a:srgbClr val="1C1B1A"/>
-                </a:solidFill>
-                <a:latin typeface="Calibri"/>
-              </a:rPr>
-              <a:t>Choose
-what to do</a:t>
-            </a:r>
-          </a:p>
-        </p:txBody>
-      </p:sp>
-      <p:sp>
-        <p:nvSpPr>
-          <p:cNvPr id="20" name="Rectangle 19"/>
-          <p:cNvSpPr/>
-          <p:nvPr/>
-        </p:nvSpPr>
-        <p:spPr>
-          <a:xfrm>
-            <a:off x="8211312" y="2286000"/>
-            <a:ext cx="1783080" cy="2286000"/>
-          </a:xfrm>
-          <a:prstGeom prst="rect">
-            <a:avLst/>
-          </a:prstGeom>
-          <a:solidFill>
-            <a:srgbClr val="F6F3EF"/>
-          </a:solidFill>
-          <a:ln>
-            <a:noFill/>
-          </a:ln>
-        </p:spPr>
-        <p:style>
-          <a:lnRef idx="1">
-            <a:schemeClr val="accent1"/>
-          </a:lnRef>
-          <a:fillRef idx="3">
-            <a:schemeClr val="accent1"/>
-          </a:fillRef>
-          <a:effectRef idx="2">
-            <a:schemeClr val="accent1"/>
-          </a:effectRef>
-          <a:fontRef idx="minor">
-            <a:schemeClr val="lt1"/>
-          </a:fontRef>
-        </p:style>
-        <p:txBody>
-          <a:bodyPr rtlCol="0" anchor="ctr"/>
-          <a:lstStyle/>
-          <a:p>
-            <a:pPr algn="ctr"/>
-          </a:p>
-        </p:txBody>
-      </p:sp>
-      <p:sp>
-        <p:nvSpPr>
-          <p:cNvPr id="21" name="TextBox 20"/>
-          <p:cNvSpPr txBox="1"/>
-          <p:nvPr/>
-        </p:nvSpPr>
-        <p:spPr>
-          <a:xfrm>
-            <a:off x="8321040" y="2423160"/>
-            <a:ext cx="1554480" cy="365760"/>
-          </a:xfrm>
-          <a:prstGeom prst="rect">
-            <a:avLst/>
-          </a:prstGeom>
-          <a:noFill/>
-        </p:spPr>
-        <p:txBody>
-          <a:bodyPr wrap="square">
-            <a:spAutoFit/>
-          </a:bodyPr>
-          <a:lstStyle/>
-          <a:p>
-            <a:pPr algn="l"/>
-            <a:r>
-              <a:rPr sz="1400" b="1">
-                <a:solidFill>
-                  <a:srgbClr val="E10600"/>
-                </a:solidFill>
-                <a:latin typeface="Calibri"/>
-              </a:rPr>
-              <a:t>05</a:t>
-            </a:r>
-          </a:p>
-        </p:txBody>
-      </p:sp>
-      <p:sp>
-        <p:nvSpPr>
-          <p:cNvPr id="22" name="TextBox 21"/>
-          <p:cNvSpPr txBox="1"/>
-          <p:nvPr/>
-        </p:nvSpPr>
-        <p:spPr>
-          <a:xfrm>
-            <a:off x="8321040" y="2880360"/>
-            <a:ext cx="1554480" cy="1371600"/>
-          </a:xfrm>
-          <a:prstGeom prst="rect">
-            <a:avLst/>
-          </a:prstGeom>
-          <a:noFill/>
-        </p:spPr>
-        <p:txBody>
-          <a:bodyPr wrap="square">
-            <a:spAutoFit/>
-          </a:bodyPr>
-          <a:lstStyle/>
-          <a:p>
-            <a:pPr algn="l"/>
-            <a:r>
-              <a:rPr sz="1600" b="1">
-                <a:solidFill>
-                  <a:srgbClr val="1C1B1A"/>
-                </a:solidFill>
-                <a:latin typeface="Calibri"/>
-              </a:rPr>
-              <a:t>Track the
-recovery</a:t>
-            </a:r>
-          </a:p>
-        </p:txBody>
-      </p:sp>
-      <p:sp>
-        <p:nvSpPr>
-          <p:cNvPr id="23" name="Rectangle 22"/>
-          <p:cNvSpPr/>
-          <p:nvPr/>
-        </p:nvSpPr>
-        <p:spPr>
-          <a:xfrm>
-            <a:off x="10149840" y="2286000"/>
-            <a:ext cx="1783080" cy="2286000"/>
-          </a:xfrm>
-          <a:prstGeom prst="rect">
-            <a:avLst/>
-          </a:prstGeom>
-          <a:solidFill>
-            <a:srgbClr val="F6F3EF"/>
-          </a:solidFill>
-          <a:ln>
-            <a:noFill/>
-          </a:ln>
-        </p:spPr>
-        <p:style>
-          <a:lnRef idx="1">
-            <a:schemeClr val="accent1"/>
-          </a:lnRef>
-          <a:fillRef idx="3">
-            <a:schemeClr val="accent1"/>
-          </a:fillRef>
-          <a:effectRef idx="2">
-            <a:schemeClr val="accent1"/>
-          </a:effectRef>
-          <a:fontRef idx="minor">
-            <a:schemeClr val="lt1"/>
-          </a:fontRef>
-        </p:style>
-        <p:txBody>
-          <a:bodyPr rtlCol="0" anchor="ctr"/>
-          <a:lstStyle/>
-          <a:p>
-            <a:pPr algn="ctr"/>
-          </a:p>
-        </p:txBody>
-      </p:sp>
-      <p:sp>
-        <p:nvSpPr>
-          <p:cNvPr id="24" name="TextBox 23"/>
-          <p:cNvSpPr txBox="1"/>
-          <p:nvPr/>
-        </p:nvSpPr>
-        <p:spPr>
-          <a:xfrm>
-            <a:off x="10259568" y="2423160"/>
-            <a:ext cx="1554480" cy="365760"/>
-          </a:xfrm>
-          <a:prstGeom prst="rect">
-            <a:avLst/>
-          </a:prstGeom>
-          <a:noFill/>
-        </p:spPr>
-        <p:txBody>
-          <a:bodyPr wrap="square">
-            <a:spAutoFit/>
-          </a:bodyPr>
-          <a:lstStyle/>
-          <a:p>
-            <a:pPr algn="l"/>
-            <a:r>
-              <a:rPr sz="1400" b="1">
-                <a:solidFill>
-                  <a:srgbClr val="E10600"/>
-                </a:solidFill>
-                <a:latin typeface="Calibri"/>
-              </a:rPr>
-              <a:t>06</a:t>
-            </a:r>
-          </a:p>
-        </p:txBody>
-      </p:sp>
-      <p:sp>
-        <p:nvSpPr>
-          <p:cNvPr id="25" name="TextBox 24"/>
-          <p:cNvSpPr txBox="1"/>
-          <p:nvPr/>
-        </p:nvSpPr>
-        <p:spPr>
-          <a:xfrm>
-            <a:off x="10259568" y="2880360"/>
-            <a:ext cx="1554480" cy="1371600"/>
-          </a:xfrm>
-          <a:prstGeom prst="rect">
-            <a:avLst/>
-          </a:prstGeom>
-          <a:noFill/>
-        </p:spPr>
-        <p:txBody>
-          <a:bodyPr wrap="square">
-            <a:spAutoFit/>
-          </a:bodyPr>
-          <a:lstStyle/>
-          <a:p>
-            <a:pPr algn="l"/>
-            <a:r>
-              <a:rPr sz="1600" b="1">
-                <a:solidFill>
-                  <a:srgbClr val="1C1B1A"/>
-                </a:solidFill>
-                <a:latin typeface="Calibri"/>
-              </a:rPr>
-              <a:t>Complete refund
-or replacement</a:t>
-            </a:r>
-          </a:p>
-        </p:txBody>
-      </p:sp>
-      <p:sp>
-        <p:nvSpPr>
-          <p:cNvPr id="26" name="TextBox 25"/>
-          <p:cNvSpPr txBox="1"/>
-          <p:nvPr/>
-        </p:nvSpPr>
-        <p:spPr>
-          <a:xfrm>
-            <a:off x="502920" y="4937760"/>
-            <a:ext cx="10972800" cy="1097280"/>
-          </a:xfrm>
-          <a:prstGeom prst="rect">
-            <a:avLst/>
-          </a:prstGeom>
-          <a:noFill/>
-        </p:spPr>
-        <p:txBody>
-          <a:bodyPr wrap="square">
-            <a:spAutoFit/>
-          </a:bodyPr>
-          <a:lstStyle/>
-          <a:p>
-            <a:pPr algn="l"/>
-            <a:r>
-              <a:rPr sz="2000" b="0">
-                <a:solidFill>
-                  <a:srgbClr val="5E5A55"/>
-                </a:solidFill>
-                <a:latin typeface="Calibri"/>
-              </a:rPr>
-              <a:t>The customer stays in Kmart. The case is a SAP service request on the sales order.
-Demo order KM185002 — the damaged storage box.</a:t>
-            </a:r>
-          </a:p>
-        </p:txBody>
-      </p:sp>
-    </p:spTree>
-  </p:cSld>
-  <p:clrMapOvr>
-    <a:masterClrMapping/>
-  </p:clrMapOvr>
-</p:sld>
-</file>
-
-<file path=ppt/slides/slide5.xml><?xml version="1.0" encoding="utf-8"?>
-<p:sld xmlns:a="http://schemas.openxmlformats.org/drawingml/2006/main" xmlns:p="http://schemas.openxmlformats.org/presentationml/2006/main" xmlns:r="http://schemas.openxmlformats.org/officeDocument/2006/relationships">
-  <p:cSld>
-    <p:spTree>
-      <p:nvGrpSpPr>
-        <p:cNvPr id="1" name=""/>
-        <p:cNvGrpSpPr/>
-        <p:nvPr/>
-      </p:nvGrpSpPr>
-      <p:grpSpPr/>
-      <p:sp>
-        <p:nvSpPr>
-          <p:cNvPr id="2" name="Rectangle 1"/>
-          <p:cNvSpPr/>
-          <p:nvPr/>
-        </p:nvSpPr>
-        <p:spPr>
-          <a:xfrm>
-            <a:off x="0" y="0"/>
-            <a:ext cx="12191695" cy="6858000"/>
-          </a:xfrm>
-          <a:prstGeom prst="rect">
-            <a:avLst/>
-          </a:prstGeom>
-          <a:solidFill>
-            <a:srgbClr val="FFFFFF"/>
-          </a:solidFill>
-          <a:ln>
-            <a:noFill/>
-          </a:ln>
-        </p:spPr>
-        <p:style>
-          <a:lnRef idx="1">
-            <a:schemeClr val="accent1"/>
-          </a:lnRef>
-          <a:fillRef idx="3">
-            <a:schemeClr val="accent1"/>
-          </a:fillRef>
-          <a:effectRef idx="2">
-            <a:schemeClr val="accent1"/>
-          </a:effectRef>
-          <a:fontRef idx="minor">
-            <a:schemeClr val="lt1"/>
-          </a:fontRef>
-        </p:style>
-        <p:txBody>
-          <a:bodyPr rtlCol="0" anchor="ctr"/>
-          <a:lstStyle/>
-          <a:p>
-            <a:pPr algn="ctr"/>
-          </a:p>
-        </p:txBody>
-      </p:sp>
-      <p:sp>
-        <p:nvSpPr>
-          <p:cNvPr id="3" name="Rectangle 2"/>
-          <p:cNvSpPr/>
-          <p:nvPr/>
-        </p:nvSpPr>
-        <p:spPr>
-          <a:xfrm>
-            <a:off x="0" y="0"/>
-            <a:ext cx="12191695" cy="73152"/>
-          </a:xfrm>
-          <a:prstGeom prst="rect">
-            <a:avLst/>
-          </a:prstGeom>
-          <a:solidFill>
-            <a:srgbClr val="E10600"/>
-          </a:solidFill>
-          <a:ln>
-            <a:noFill/>
-          </a:ln>
-        </p:spPr>
-        <p:style>
-          <a:lnRef idx="1">
-            <a:schemeClr val="accent1"/>
-          </a:lnRef>
-          <a:fillRef idx="3">
-            <a:schemeClr val="accent1"/>
-          </a:fillRef>
-          <a:effectRef idx="2">
-            <a:schemeClr val="accent1"/>
-          </a:effectRef>
-          <a:fontRef idx="minor">
-            <a:schemeClr val="lt1"/>
-          </a:fontRef>
-        </p:style>
-        <p:txBody>
-          <a:bodyPr rtlCol="0" anchor="ctr"/>
-          <a:lstStyle/>
-          <a:p>
-            <a:pPr algn="ctr"/>
-          </a:p>
-        </p:txBody>
-      </p:sp>
-      <p:sp>
-        <p:nvSpPr>
-          <p:cNvPr id="4" name="TextBox 3"/>
-          <p:cNvSpPr txBox="1"/>
-          <p:nvPr/>
-        </p:nvSpPr>
-        <p:spPr>
-          <a:xfrm>
-            <a:off x="502920" y="6510528"/>
-            <a:ext cx="7315200" cy="256032"/>
-          </a:xfrm>
-          <a:prstGeom prst="rect">
-            <a:avLst/>
-          </a:prstGeom>
-          <a:noFill/>
-        </p:spPr>
-        <p:txBody>
-          <a:bodyPr wrap="square">
-            <a:spAutoFit/>
-          </a:bodyPr>
-          <a:lstStyle/>
-          <a:p>
-            <a:pPr algn="l"/>
-            <a:r>
-              <a:rPr sz="1200" b="0">
-                <a:solidFill>
-                  <a:srgbClr val="5E5A55"/>
-                </a:solidFill>
-                <a:latin typeface="Calibri"/>
-              </a:rPr>
-              <a:t>Kmart Delivery Assist  ·  Managing Director</a:t>
-            </a:r>
-          </a:p>
-        </p:txBody>
-      </p:sp>
-      <p:sp>
-        <p:nvSpPr>
-          <p:cNvPr id="5" name="TextBox 4"/>
-          <p:cNvSpPr txBox="1"/>
-          <p:nvPr/>
-        </p:nvSpPr>
-        <p:spPr>
-          <a:xfrm>
-            <a:off x="9509760" y="6510528"/>
-            <a:ext cx="2194560" cy="256032"/>
-          </a:xfrm>
-          <a:prstGeom prst="rect">
-            <a:avLst/>
-          </a:prstGeom>
-          <a:noFill/>
-        </p:spPr>
-        <p:txBody>
-          <a:bodyPr wrap="square">
-            <a:spAutoFit/>
-          </a:bodyPr>
-          <a:lstStyle/>
-          <a:p>
-            <a:pPr algn="r"/>
-            <a:r>
-              <a:rPr sz="1200" b="0">
-                <a:solidFill>
-                  <a:srgbClr val="5E5A55"/>
-                </a:solidFill>
-                <a:latin typeface="Calibri"/>
-              </a:rPr>
-              <a:t>5  /  9</a:t>
-            </a:r>
-          </a:p>
-        </p:txBody>
-      </p:sp>
-      <p:sp>
-        <p:nvSpPr>
-          <p:cNvPr id="6" name="TextBox 5"/>
-          <p:cNvSpPr txBox="1"/>
-          <p:nvPr/>
-        </p:nvSpPr>
-        <p:spPr>
-          <a:xfrm>
-            <a:off x="502920" y="320040"/>
-            <a:ext cx="5486400" cy="274320"/>
-          </a:xfrm>
-          <a:prstGeom prst="rect">
-            <a:avLst/>
-          </a:prstGeom>
-          <a:noFill/>
-        </p:spPr>
-        <p:txBody>
-          <a:bodyPr wrap="square">
-            <a:spAutoFit/>
-          </a:bodyPr>
-          <a:lstStyle/>
-          <a:p>
-            <a:pPr algn="l"/>
-            <a:r>
-              <a:rPr sz="1400" b="1">
-                <a:solidFill>
-                  <a:srgbClr val="E10600"/>
-                </a:solidFill>
-                <a:latin typeface="Calibri"/>
-              </a:rPr>
-              <a:t>WHY THIS SOLUTION</a:t>
-            </a:r>
-          </a:p>
-        </p:txBody>
-      </p:sp>
-      <p:sp>
-        <p:nvSpPr>
-          <p:cNvPr id="7" name="TextBox 6"/>
-          <p:cNvSpPr txBox="1"/>
-          <p:nvPr/>
-        </p:nvSpPr>
-        <p:spPr>
-          <a:xfrm>
-            <a:off x="502920" y="640080"/>
-            <a:ext cx="10972800" cy="640080"/>
-          </a:xfrm>
-          <a:prstGeom prst="rect">
-            <a:avLst/>
-          </a:prstGeom>
-          <a:noFill/>
-        </p:spPr>
-        <p:txBody>
-          <a:bodyPr wrap="square">
-            <a:spAutoFit/>
-          </a:bodyPr>
-          <a:lstStyle/>
-          <a:p>
-            <a:pPr algn="l"/>
-            <a:r>
-              <a:rPr sz="2800" b="1">
-                <a:solidFill>
-                  <a:srgbClr val="1C1B1A"/>
-                </a:solidFill>
-                <a:latin typeface="Calibri"/>
-              </a:rPr>
-              <a:t>High impact. Feasible on the APIs we have.</a:t>
-            </a:r>
-          </a:p>
-        </p:txBody>
-      </p:sp>
-      <p:sp>
-        <p:nvSpPr>
-          <p:cNvPr id="8" name="Rectangle 7"/>
-          <p:cNvSpPr/>
-          <p:nvPr/>
-        </p:nvSpPr>
-        <p:spPr>
-          <a:xfrm>
-            <a:off x="502920" y="1645920"/>
-            <a:ext cx="5440680" cy="2011680"/>
-          </a:xfrm>
-          <a:prstGeom prst="rect">
-            <a:avLst/>
-          </a:prstGeom>
-          <a:solidFill>
-            <a:srgbClr val="F6F3EF"/>
-          </a:solidFill>
-          <a:ln>
-            <a:noFill/>
-          </a:ln>
-        </p:spPr>
-        <p:style>
-          <a:lnRef idx="1">
-            <a:schemeClr val="accent1"/>
-          </a:lnRef>
-          <a:fillRef idx="3">
-            <a:schemeClr val="accent1"/>
-          </a:fillRef>
-          <a:effectRef idx="2">
-            <a:schemeClr val="accent1"/>
-          </a:effectRef>
-          <a:fontRef idx="minor">
-            <a:schemeClr val="lt1"/>
-          </a:fontRef>
-        </p:style>
-        <p:txBody>
-          <a:bodyPr rtlCol="0" anchor="ctr"/>
-          <a:lstStyle/>
-          <a:p>
-            <a:pPr algn="ctr"/>
-          </a:p>
-        </p:txBody>
-      </p:sp>
-      <p:sp>
-        <p:nvSpPr>
-          <p:cNvPr id="9" name="TextBox 8"/>
-          <p:cNvSpPr txBox="1"/>
-          <p:nvPr/>
-        </p:nvSpPr>
-        <p:spPr>
-          <a:xfrm>
-            <a:off x="777240" y="1828800"/>
-            <a:ext cx="4846320" cy="320040"/>
-          </a:xfrm>
-          <a:prstGeom prst="rect">
-            <a:avLst/>
-          </a:prstGeom>
-          <a:noFill/>
-        </p:spPr>
-        <p:txBody>
-          <a:bodyPr wrap="square">
-            <a:spAutoFit/>
-          </a:bodyPr>
-          <a:lstStyle/>
-          <a:p>
-            <a:pPr algn="l"/>
-            <a:r>
-              <a:rPr sz="1300" b="1">
-                <a:solidFill>
-                  <a:srgbClr val="E10600"/>
-                </a:solidFill>
-                <a:latin typeface="Calibri"/>
-              </a:rPr>
-              <a:t>DO LATER</a:t>
-            </a:r>
-          </a:p>
-        </p:txBody>
-      </p:sp>
-      <p:sp>
-        <p:nvSpPr>
-          <p:cNvPr id="10" name="TextBox 9"/>
-          <p:cNvSpPr txBox="1"/>
-          <p:nvPr/>
-        </p:nvSpPr>
-        <p:spPr>
-          <a:xfrm>
-            <a:off x="777240" y="2194560"/>
-            <a:ext cx="4846320" cy="1280160"/>
-          </a:xfrm>
-          <a:prstGeom prst="rect">
-            <a:avLst/>
-          </a:prstGeom>
-          <a:noFill/>
-        </p:spPr>
-        <p:txBody>
-          <a:bodyPr wrap="square">
-            <a:spAutoFit/>
-          </a:bodyPr>
-          <a:lstStyle/>
-          <a:p>
-            <a:pPr algn="l"/>
-            <a:r>
-              <a:rPr sz="2000" b="1">
-                <a:solidFill>
-                  <a:srgbClr val="1C1B1A"/>
-                </a:solidFill>
-                <a:latin typeface="Calibri"/>
-              </a:rPr>
-              <a:t>P1 routing automation
-High impact, high effort.
-After shadow evidence.</a:t>
-            </a:r>
-          </a:p>
-        </p:txBody>
-      </p:sp>
-      <p:sp>
-        <p:nvSpPr>
-          <p:cNvPr id="11" name="Rectangle 10"/>
-          <p:cNvSpPr/>
-          <p:nvPr/>
-        </p:nvSpPr>
-        <p:spPr>
-          <a:xfrm>
-            <a:off x="6172200" y="1645920"/>
-            <a:ext cx="5440680" cy="2011680"/>
-          </a:xfrm>
-          <a:prstGeom prst="rect">
-            <a:avLst/>
-          </a:prstGeom>
-          <a:solidFill>
-            <a:srgbClr val="E10600"/>
-          </a:solidFill>
-          <a:ln>
-            <a:noFill/>
-          </a:ln>
-        </p:spPr>
-        <p:style>
-          <a:lnRef idx="1">
-            <a:schemeClr val="accent1"/>
-          </a:lnRef>
-          <a:fillRef idx="3">
-            <a:schemeClr val="accent1"/>
-          </a:fillRef>
-          <a:effectRef idx="2">
-            <a:schemeClr val="accent1"/>
-          </a:effectRef>
-          <a:fontRef idx="minor">
-            <a:schemeClr val="lt1"/>
-          </a:fontRef>
-        </p:style>
-        <p:txBody>
-          <a:bodyPr rtlCol="0" anchor="ctr"/>
-          <a:lstStyle/>
-          <a:p>
-            <a:pPr algn="ctr"/>
-          </a:p>
-        </p:txBody>
-      </p:sp>
-      <p:sp>
-        <p:nvSpPr>
-          <p:cNvPr id="12" name="TextBox 11"/>
-          <p:cNvSpPr txBox="1"/>
-          <p:nvPr/>
-        </p:nvSpPr>
-        <p:spPr>
-          <a:xfrm>
-            <a:off x="6446520" y="1828800"/>
-            <a:ext cx="4846320" cy="320040"/>
-          </a:xfrm>
-          <a:prstGeom prst="rect">
-            <a:avLst/>
-          </a:prstGeom>
-          <a:noFill/>
-        </p:spPr>
-        <p:txBody>
-          <a:bodyPr wrap="square">
-            <a:spAutoFit/>
-          </a:bodyPr>
-          <a:lstStyle/>
-          <a:p>
-            <a:pPr algn="l"/>
-            <a:r>
-              <a:rPr sz="1300" b="1">
-                <a:solidFill>
-                  <a:srgbClr val="FFFFFF"/>
-                </a:solidFill>
-                <a:latin typeface="Calibri"/>
-              </a:rPr>
-              <a:t>BUILD NOW</a:t>
-            </a:r>
-          </a:p>
-        </p:txBody>
-      </p:sp>
-      <p:sp>
-        <p:nvSpPr>
-          <p:cNvPr id="13" name="TextBox 12"/>
-          <p:cNvSpPr txBox="1"/>
-          <p:nvPr/>
-        </p:nvSpPr>
-        <p:spPr>
-          <a:xfrm>
-            <a:off x="6446520" y="2194560"/>
-            <a:ext cx="4846320" cy="1280160"/>
-          </a:xfrm>
-          <a:prstGeom prst="rect">
-            <a:avLst/>
-          </a:prstGeom>
-          <a:noFill/>
-        </p:spPr>
-        <p:txBody>
-          <a:bodyPr wrap="square">
-            <a:spAutoFit/>
-          </a:bodyPr>
-          <a:lstStyle/>
-          <a:p>
-            <a:pPr algn="l"/>
-            <a:r>
-              <a:rPr sz="2000" b="1">
-                <a:solidFill>
-                  <a:srgbClr val="FFFFFF"/>
-                </a:solidFill>
-                <a:latin typeface="Calibri"/>
-              </a:rPr>
-              <a:t>Delivery Assist
-High impact, lower effort.
-The customer feels it.</a:t>
-            </a:r>
-          </a:p>
-        </p:txBody>
-      </p:sp>
-      <p:sp>
-        <p:nvSpPr>
-          <p:cNvPr id="14" name="Rectangle 13"/>
-          <p:cNvSpPr/>
-          <p:nvPr/>
-        </p:nvSpPr>
-        <p:spPr>
-          <a:xfrm>
-            <a:off x="502920" y="3794760"/>
-            <a:ext cx="5440680" cy="2011680"/>
-          </a:xfrm>
-          <a:prstGeom prst="rect">
-            <a:avLst/>
-          </a:prstGeom>
-          <a:solidFill>
-            <a:srgbClr val="FFFFFF"/>
-          </a:solidFill>
-          <a:ln>
-            <a:noFill/>
-          </a:ln>
-        </p:spPr>
-        <p:style>
-          <a:lnRef idx="1">
-            <a:schemeClr val="accent1"/>
-          </a:lnRef>
-          <a:fillRef idx="3">
-            <a:schemeClr val="accent1"/>
-          </a:fillRef>
-          <a:effectRef idx="2">
-            <a:schemeClr val="accent1"/>
-          </a:effectRef>
-          <a:fontRef idx="minor">
-            <a:schemeClr val="lt1"/>
-          </a:fontRef>
-        </p:style>
-        <p:txBody>
-          <a:bodyPr rtlCol="0" anchor="ctr"/>
-          <a:lstStyle/>
-          <a:p>
-            <a:pPr algn="ctr"/>
-          </a:p>
-        </p:txBody>
-      </p:sp>
-      <p:sp>
-        <p:nvSpPr>
-          <p:cNvPr id="15" name="TextBox 14"/>
-          <p:cNvSpPr txBox="1"/>
-          <p:nvPr/>
-        </p:nvSpPr>
-        <p:spPr>
-          <a:xfrm>
-            <a:off x="777240" y="3977640"/>
-            <a:ext cx="4846320" cy="320040"/>
-          </a:xfrm>
-          <a:prstGeom prst="rect">
-            <a:avLst/>
-          </a:prstGeom>
-          <a:noFill/>
-        </p:spPr>
-        <p:txBody>
-          <a:bodyPr wrap="square">
-            <a:spAutoFit/>
-          </a:bodyPr>
-          <a:lstStyle/>
-          <a:p>
-            <a:pPr algn="l"/>
-            <a:r>
-              <a:rPr sz="1300" b="1">
-                <a:solidFill>
-                  <a:srgbClr val="E10600"/>
-                </a:solidFill>
-                <a:latin typeface="Calibri"/>
-              </a:rPr>
-              <a:t>LEAVE</a:t>
-            </a:r>
-          </a:p>
-        </p:txBody>
-      </p:sp>
-      <p:sp>
-        <p:nvSpPr>
-          <p:cNvPr id="16" name="TextBox 15"/>
-          <p:cNvSpPr txBox="1"/>
-          <p:nvPr/>
-        </p:nvSpPr>
-        <p:spPr>
-          <a:xfrm>
-            <a:off x="777240" y="4343400"/>
-            <a:ext cx="4846320" cy="1280160"/>
-          </a:xfrm>
-          <a:prstGeom prst="rect">
-            <a:avLst/>
-          </a:prstGeom>
-          <a:noFill/>
-        </p:spPr>
-        <p:txBody>
-          <a:bodyPr wrap="square">
-            <a:spAutoFit/>
-          </a:bodyPr>
-          <a:lstStyle/>
-          <a:p>
-            <a:pPr algn="l"/>
-            <a:r>
-              <a:rPr sz="2000" b="1">
-                <a:solidFill>
-                  <a:srgbClr val="1C1B1A"/>
-                </a:solidFill>
-                <a:latin typeface="Calibri"/>
-              </a:rPr>
-              <a:t>Rebuild order management
-High effort, low extra impact.</a:t>
-            </a:r>
-          </a:p>
-        </p:txBody>
-      </p:sp>
-      <p:sp>
-        <p:nvSpPr>
-          <p:cNvPr id="17" name="Rectangle 16"/>
-          <p:cNvSpPr/>
-          <p:nvPr/>
-        </p:nvSpPr>
-        <p:spPr>
-          <a:xfrm>
-            <a:off x="6172200" y="3794760"/>
-            <a:ext cx="5440680" cy="2011680"/>
-          </a:xfrm>
-          <a:prstGeom prst="rect">
-            <a:avLst/>
-          </a:prstGeom>
-          <a:solidFill>
-            <a:srgbClr val="F6F3EF"/>
-          </a:solidFill>
-          <a:ln>
-            <a:noFill/>
-          </a:ln>
-        </p:spPr>
-        <p:style>
-          <a:lnRef idx="1">
-            <a:schemeClr val="accent1"/>
-          </a:lnRef>
-          <a:fillRef idx="3">
-            <a:schemeClr val="accent1"/>
-          </a:fillRef>
-          <a:effectRef idx="2">
-            <a:schemeClr val="accent1"/>
-          </a:effectRef>
-          <a:fontRef idx="minor">
-            <a:schemeClr val="lt1"/>
-          </a:fontRef>
-        </p:style>
-        <p:txBody>
-          <a:bodyPr rtlCol="0" anchor="ctr"/>
-          <a:lstStyle/>
-          <a:p>
-            <a:pPr algn="ctr"/>
-          </a:p>
-        </p:txBody>
-      </p:sp>
-      <p:sp>
-        <p:nvSpPr>
-          <p:cNvPr id="18" name="TextBox 17"/>
-          <p:cNvSpPr txBox="1"/>
-          <p:nvPr/>
-        </p:nvSpPr>
-        <p:spPr>
-          <a:xfrm>
-            <a:off x="6446520" y="3977640"/>
-            <a:ext cx="4846320" cy="320040"/>
-          </a:xfrm>
-          <a:prstGeom prst="rect">
-            <a:avLst/>
-          </a:prstGeom>
-          <a:noFill/>
-        </p:spPr>
-        <p:txBody>
-          <a:bodyPr wrap="square">
-            <a:spAutoFit/>
-          </a:bodyPr>
-          <a:lstStyle/>
-          <a:p>
-            <a:pPr algn="l"/>
-            <a:r>
-              <a:rPr sz="1300" b="1">
-                <a:solidFill>
-                  <a:srgbClr val="E10600"/>
-                </a:solidFill>
-                <a:latin typeface="Calibri"/>
-              </a:rPr>
-              <a:t>NOT ENOUGH</a:t>
-            </a:r>
-          </a:p>
-        </p:txBody>
-      </p:sp>
-      <p:sp>
-        <p:nvSpPr>
-          <p:cNvPr id="19" name="TextBox 18"/>
-          <p:cNvSpPr txBox="1"/>
-          <p:nvPr/>
-        </p:nvSpPr>
-        <p:spPr>
-          <a:xfrm>
-            <a:off x="6446520" y="4343400"/>
-            <a:ext cx="4846320" cy="1280160"/>
-          </a:xfrm>
-          <a:prstGeom prst="rect">
-            <a:avLst/>
-          </a:prstGeom>
-          <a:noFill/>
-        </p:spPr>
-        <p:txBody>
-          <a:bodyPr wrap="square">
-            <a:spAutoFit/>
-          </a:bodyPr>
-          <a:lstStyle/>
-          <a:p>
-            <a:pPr algn="l"/>
-            <a:r>
-              <a:rPr sz="2000" b="1">
-                <a:solidFill>
-                  <a:srgbClr val="1C1B1A"/>
-                </a:solidFill>
-                <a:latin typeface="Calibri"/>
-              </a:rPr>
-              <a:t>A status page with no recovery
-Low effort, low impact.</a:t>
-            </a:r>
-          </a:p>
-        </p:txBody>
-      </p:sp>
-    </p:spTree>
-  </p:cSld>
-  <p:clrMapOvr>
-    <a:masterClrMapping/>
-  </p:clrMapOvr>
-</p:sld>
-</file>
-
-<file path=ppt/slides/slide6.xml><?xml version="1.0" encoding="utf-8"?>
-<p:sld xmlns:a="http://schemas.openxmlformats.org/drawingml/2006/main" xmlns:p="http://schemas.openxmlformats.org/presentationml/2006/main" xmlns:r="http://schemas.openxmlformats.org/officeDocument/2006/relationships">
-  <p:cSld>
-    <p:spTree>
-      <p:nvGrpSpPr>
-        <p:cNvPr id="1" name=""/>
-        <p:cNvGrpSpPr/>
-        <p:nvPr/>
-      </p:nvGrpSpPr>
-      <p:grpSpPr/>
-      <p:sp>
-        <p:nvSpPr>
-          <p:cNvPr id="2" name="Rectangle 1"/>
-          <p:cNvSpPr/>
-          <p:nvPr/>
-        </p:nvSpPr>
-        <p:spPr>
-          <a:xfrm>
-            <a:off x="0" y="0"/>
-            <a:ext cx="12191695" cy="6858000"/>
-          </a:xfrm>
-          <a:prstGeom prst="rect">
-            <a:avLst/>
-          </a:prstGeom>
-          <a:solidFill>
-            <a:srgbClr val="FFFFFF"/>
-          </a:solidFill>
-          <a:ln>
-            <a:noFill/>
-          </a:ln>
-        </p:spPr>
-        <p:style>
-          <a:lnRef idx="1">
-            <a:schemeClr val="accent1"/>
-          </a:lnRef>
-          <a:fillRef idx="3">
-            <a:schemeClr val="accent1"/>
-          </a:fillRef>
-          <a:effectRef idx="2">
-            <a:schemeClr val="accent1"/>
-          </a:effectRef>
-          <a:fontRef idx="minor">
-            <a:schemeClr val="lt1"/>
-          </a:fontRef>
-        </p:style>
-        <p:txBody>
-          <a:bodyPr rtlCol="0" anchor="ctr"/>
-          <a:lstStyle/>
-          <a:p>
-            <a:pPr algn="ctr"/>
-          </a:p>
-        </p:txBody>
-      </p:sp>
-      <p:sp>
-        <p:nvSpPr>
-          <p:cNvPr id="3" name="Rectangle 2"/>
-          <p:cNvSpPr/>
-          <p:nvPr/>
-        </p:nvSpPr>
-        <p:spPr>
-          <a:xfrm>
-            <a:off x="0" y="0"/>
-            <a:ext cx="12191695" cy="73152"/>
-          </a:xfrm>
-          <a:prstGeom prst="rect">
-            <a:avLst/>
-          </a:prstGeom>
-          <a:solidFill>
-            <a:srgbClr val="E10600"/>
-          </a:solidFill>
-          <a:ln>
-            <a:noFill/>
-          </a:ln>
-        </p:spPr>
-        <p:style>
-          <a:lnRef idx="1">
-            <a:schemeClr val="accent1"/>
-          </a:lnRef>
-          <a:fillRef idx="3">
-            <a:schemeClr val="accent1"/>
-          </a:fillRef>
-          <a:effectRef idx="2">
-            <a:schemeClr val="accent1"/>
-          </a:effectRef>
-          <a:fontRef idx="minor">
-            <a:schemeClr val="lt1"/>
-          </a:fontRef>
-        </p:style>
-        <p:txBody>
-          <a:bodyPr rtlCol="0" anchor="ctr"/>
-          <a:lstStyle/>
-          <a:p>
-            <a:pPr algn="ctr"/>
-          </a:p>
-        </p:txBody>
-      </p:sp>
-      <p:sp>
-        <p:nvSpPr>
-          <p:cNvPr id="4" name="TextBox 3"/>
-          <p:cNvSpPr txBox="1"/>
-          <p:nvPr/>
-        </p:nvSpPr>
-        <p:spPr>
-          <a:xfrm>
-            <a:off x="502920" y="6510528"/>
-            <a:ext cx="7315200" cy="256032"/>
-          </a:xfrm>
-          <a:prstGeom prst="rect">
-            <a:avLst/>
-          </a:prstGeom>
-          <a:noFill/>
-        </p:spPr>
-        <p:txBody>
-          <a:bodyPr wrap="square">
-            <a:spAutoFit/>
-          </a:bodyPr>
-          <a:lstStyle/>
-          <a:p>
-            <a:pPr algn="l"/>
-            <a:r>
-              <a:rPr sz="1200" b="0">
-                <a:solidFill>
-                  <a:srgbClr val="5E5A55"/>
-                </a:solidFill>
-                <a:latin typeface="Calibri"/>
-              </a:rPr>
-              <a:t>Kmart Delivery Assist  ·  Managing Director</a:t>
-            </a:r>
-          </a:p>
-        </p:txBody>
-      </p:sp>
-      <p:sp>
-        <p:nvSpPr>
-          <p:cNvPr id="5" name="TextBox 4"/>
-          <p:cNvSpPr txBox="1"/>
-          <p:nvPr/>
-        </p:nvSpPr>
-        <p:spPr>
-          <a:xfrm>
-            <a:off x="9509760" y="6510528"/>
-            <a:ext cx="2194560" cy="256032"/>
-          </a:xfrm>
-          <a:prstGeom prst="rect">
-            <a:avLst/>
-          </a:prstGeom>
-          <a:noFill/>
-        </p:spPr>
-        <p:txBody>
-          <a:bodyPr wrap="square">
-            <a:spAutoFit/>
-          </a:bodyPr>
-          <a:lstStyle/>
-          <a:p>
-            <a:pPr algn="r"/>
-            <a:r>
-              <a:rPr sz="1200" b="0">
-                <a:solidFill>
-                  <a:srgbClr val="5E5A55"/>
-                </a:solidFill>
-                <a:latin typeface="Calibri"/>
-              </a:rPr>
-              <a:t>6  /  9</a:t>
-            </a:r>
-          </a:p>
-        </p:txBody>
-      </p:sp>
-      <p:sp>
-        <p:nvSpPr>
-          <p:cNvPr id="6" name="TextBox 5"/>
-          <p:cNvSpPr txBox="1"/>
-          <p:nvPr/>
-        </p:nvSpPr>
-        <p:spPr>
-          <a:xfrm>
-            <a:off x="502920" y="320040"/>
-            <a:ext cx="7315200" cy="274320"/>
-          </a:xfrm>
-          <a:prstGeom prst="rect">
-            <a:avLst/>
-          </a:prstGeom>
-          <a:noFill/>
-        </p:spPr>
-        <p:txBody>
-          <a:bodyPr wrap="square">
-            <a:spAutoFit/>
-          </a:bodyPr>
-          <a:lstStyle/>
-          <a:p>
-            <a:pPr algn="l"/>
-            <a:r>
-              <a:rPr sz="1400" b="1">
-                <a:solidFill>
-                  <a:srgbClr val="E10600"/>
-                </a:solidFill>
-                <a:latin typeface="Calibri"/>
-              </a:rPr>
-              <a:t>DESIGN  ·  WHAT CHANGED</a:t>
-            </a:r>
-          </a:p>
-        </p:txBody>
-      </p:sp>
-      <p:sp>
-        <p:nvSpPr>
-          <p:cNvPr id="7" name="TextBox 6"/>
-          <p:cNvSpPr txBox="1"/>
-          <p:nvPr/>
-        </p:nvSpPr>
-        <p:spPr>
-          <a:xfrm>
-            <a:off x="502920" y="640080"/>
-            <a:ext cx="10972800" cy="548640"/>
-          </a:xfrm>
-          <a:prstGeom prst="rect">
-            <a:avLst/>
-          </a:prstGeom>
-          <a:noFill/>
-        </p:spPr>
-        <p:txBody>
-          <a:bodyPr wrap="square">
-            <a:spAutoFit/>
-          </a:bodyPr>
-          <a:lstStyle/>
-          <a:p>
-            <a:pPr algn="l"/>
-            <a:r>
-              <a:rPr sz="2600" b="1">
-                <a:solidFill>
-                  <a:srgbClr val="1C1B1A"/>
-                </a:solidFill>
-                <a:latin typeface="Calibri"/>
-              </a:rPr>
-              <a:t>Same goal. A customer surface the APIs can carry.</a:t>
-            </a:r>
-          </a:p>
-        </p:txBody>
-      </p:sp>
-      <p:sp>
-        <p:nvSpPr>
-          <p:cNvPr id="8" name="TextBox 7"/>
-          <p:cNvSpPr txBox="1"/>
-          <p:nvPr/>
-        </p:nvSpPr>
-        <p:spPr>
-          <a:xfrm>
-            <a:off x="502920" y="1417320"/>
-            <a:ext cx="2103120" cy="457200"/>
-          </a:xfrm>
-          <a:prstGeom prst="rect">
-            <a:avLst/>
-          </a:prstGeom>
-          <a:noFill/>
-        </p:spPr>
-        <p:txBody>
-          <a:bodyPr wrap="square">
-            <a:spAutoFit/>
-          </a:bodyPr>
-          <a:lstStyle/>
-          <a:p>
-            <a:pPr algn="l"/>
-            <a:r>
-              <a:rPr sz="1800" b="1">
-                <a:solidFill>
-                  <a:srgbClr val="E10600"/>
-                </a:solidFill>
-                <a:latin typeface="Calibri"/>
-              </a:rPr>
-              <a:t>Empathise</a:t>
-            </a:r>
-          </a:p>
-        </p:txBody>
-      </p:sp>
-      <p:sp>
-        <p:nvSpPr>
-          <p:cNvPr id="9" name="TextBox 8"/>
-          <p:cNvSpPr txBox="1"/>
-          <p:nvPr/>
-        </p:nvSpPr>
-        <p:spPr>
-          <a:xfrm>
-            <a:off x="2651760" y="1417320"/>
-            <a:ext cx="3931920" cy="457200"/>
-          </a:xfrm>
-          <a:prstGeom prst="rect">
-            <a:avLst/>
-          </a:prstGeom>
-          <a:noFill/>
-        </p:spPr>
-        <p:txBody>
-          <a:bodyPr wrap="square">
-            <a:spAutoFit/>
-          </a:bodyPr>
-          <a:lstStyle/>
-          <a:p>
-            <a:pPr algn="l"/>
-            <a:r>
-              <a:rPr sz="1800" b="0">
-                <a:solidFill>
-                  <a:srgbClr val="1C1B1A"/>
-                </a:solidFill>
-                <a:latin typeface="Calibri"/>
-              </a:rPr>
-              <a:t>A failed delivery is a dead end.</a:t>
-            </a:r>
-          </a:p>
-        </p:txBody>
-      </p:sp>
-      <p:sp>
-        <p:nvSpPr>
-          <p:cNvPr id="10" name="TextBox 9"/>
-          <p:cNvSpPr txBox="1"/>
-          <p:nvPr/>
-        </p:nvSpPr>
-        <p:spPr>
-          <a:xfrm>
-            <a:off x="502920" y="2075688"/>
-            <a:ext cx="2103120" cy="457200"/>
-          </a:xfrm>
-          <a:prstGeom prst="rect">
-            <a:avLst/>
-          </a:prstGeom>
-          <a:noFill/>
-        </p:spPr>
-        <p:txBody>
-          <a:bodyPr wrap="square">
-            <a:spAutoFit/>
-          </a:bodyPr>
-          <a:lstStyle/>
-          <a:p>
-            <a:pPr algn="l"/>
-            <a:r>
-              <a:rPr sz="1800" b="1">
-                <a:solidFill>
-                  <a:srgbClr val="E10600"/>
-                </a:solidFill>
-                <a:latin typeface="Calibri"/>
-              </a:rPr>
-              <a:t>Define</a:t>
-            </a:r>
-          </a:p>
-        </p:txBody>
-      </p:sp>
-      <p:sp>
-        <p:nvSpPr>
-          <p:cNvPr id="11" name="TextBox 10"/>
-          <p:cNvSpPr txBox="1"/>
-          <p:nvPr/>
-        </p:nvSpPr>
-        <p:spPr>
-          <a:xfrm>
-            <a:off x="2651760" y="2075688"/>
-            <a:ext cx="3931920" cy="457200"/>
-          </a:xfrm>
-          <a:prstGeom prst="rect">
-            <a:avLst/>
-          </a:prstGeom>
-          <a:noFill/>
-        </p:spPr>
-        <p:txBody>
-          <a:bodyPr wrap="square">
-            <a:spAutoFit/>
-          </a:bodyPr>
-          <a:lstStyle/>
-          <a:p>
-            <a:pPr algn="l"/>
-            <a:r>
-              <a:rPr sz="1800" b="0">
-                <a:solidFill>
-                  <a:srgbClr val="1C1B1A"/>
-                </a:solidFill>
-                <a:latin typeface="Calibri"/>
-              </a:rPr>
-              <a:t>One job: see it, choose, finish.</a:t>
-            </a:r>
-          </a:p>
-        </p:txBody>
-      </p:sp>
-      <p:sp>
-        <p:nvSpPr>
-          <p:cNvPr id="12" name="TextBox 11"/>
-          <p:cNvSpPr txBox="1"/>
-          <p:nvPr/>
-        </p:nvSpPr>
-        <p:spPr>
-          <a:xfrm>
-            <a:off x="502920" y="2734056"/>
-            <a:ext cx="2103120" cy="457200"/>
-          </a:xfrm>
-          <a:prstGeom prst="rect">
-            <a:avLst/>
-          </a:prstGeom>
-          <a:noFill/>
-        </p:spPr>
-        <p:txBody>
-          <a:bodyPr wrap="square">
-            <a:spAutoFit/>
-          </a:bodyPr>
-          <a:lstStyle/>
-          <a:p>
-            <a:pPr algn="l"/>
-            <a:r>
-              <a:rPr sz="1800" b="1">
-                <a:solidFill>
-                  <a:srgbClr val="E10600"/>
-                </a:solidFill>
-                <a:latin typeface="Calibri"/>
-              </a:rPr>
-              <a:t>Ideate</a:t>
-            </a:r>
-          </a:p>
-        </p:txBody>
-      </p:sp>
-      <p:sp>
-        <p:nvSpPr>
-          <p:cNvPr id="13" name="TextBox 12"/>
-          <p:cNvSpPr txBox="1"/>
-          <p:nvPr/>
-        </p:nvSpPr>
-        <p:spPr>
-          <a:xfrm>
-            <a:off x="2651760" y="2734056"/>
-            <a:ext cx="3931920" cy="457200"/>
-          </a:xfrm>
-          <a:prstGeom prst="rect">
-            <a:avLst/>
-          </a:prstGeom>
-          <a:noFill/>
-        </p:spPr>
-        <p:txBody>
-          <a:bodyPr wrap="square">
-            <a:spAutoFit/>
-          </a:bodyPr>
-          <a:lstStyle/>
-          <a:p>
-            <a:pPr algn="l"/>
-            <a:r>
-              <a:rPr sz="1800" b="0">
-                <a:solidFill>
-                  <a:srgbClr val="1C1B1A"/>
-                </a:solidFill>
-                <a:latin typeface="Calibri"/>
-              </a:rPr>
-              <a:t>Picked the recovery journey.</a:t>
-            </a:r>
-          </a:p>
-        </p:txBody>
-      </p:sp>
-      <p:sp>
-        <p:nvSpPr>
-          <p:cNvPr id="14" name="TextBox 13"/>
-          <p:cNvSpPr txBox="1"/>
-          <p:nvPr/>
-        </p:nvSpPr>
-        <p:spPr>
-          <a:xfrm>
-            <a:off x="502920" y="3392424"/>
-            <a:ext cx="2103120" cy="457200"/>
-          </a:xfrm>
-          <a:prstGeom prst="rect">
-            <a:avLst/>
-          </a:prstGeom>
-          <a:noFill/>
-        </p:spPr>
-        <p:txBody>
-          <a:bodyPr wrap="square">
-            <a:spAutoFit/>
-          </a:bodyPr>
-          <a:lstStyle/>
-          <a:p>
-            <a:pPr algn="l"/>
-            <a:r>
-              <a:rPr sz="1800" b="1">
-                <a:solidFill>
-                  <a:srgbClr val="E10600"/>
-                </a:solidFill>
-                <a:latin typeface="Calibri"/>
-              </a:rPr>
-              <a:t>Prototype</a:t>
-            </a:r>
-          </a:p>
-        </p:txBody>
-      </p:sp>
-      <p:sp>
-        <p:nvSpPr>
-          <p:cNvPr id="15" name="TextBox 14"/>
-          <p:cNvSpPr txBox="1"/>
-          <p:nvPr/>
-        </p:nvSpPr>
-        <p:spPr>
-          <a:xfrm>
-            <a:off x="2651760" y="3392424"/>
-            <a:ext cx="3931920" cy="457200"/>
-          </a:xfrm>
-          <a:prstGeom prst="rect">
-            <a:avLst/>
-          </a:prstGeom>
-          <a:noFill/>
-        </p:spPr>
-        <p:txBody>
-          <a:bodyPr wrap="square">
-            <a:spAutoFit/>
-          </a:bodyPr>
-          <a:lstStyle/>
-          <a:p>
-            <a:pPr algn="l"/>
-            <a:r>
-              <a:rPr sz="1800" b="0">
-                <a:solidFill>
-                  <a:srgbClr val="1C1B1A"/>
-                </a:solidFill>
-                <a:latin typeface="Calibri"/>
-              </a:rPr>
-              <a:t>Six steps, one case.</a:t>
-            </a:r>
-          </a:p>
-        </p:txBody>
-      </p:sp>
-      <p:sp>
-        <p:nvSpPr>
-          <p:cNvPr id="16" name="TextBox 15"/>
-          <p:cNvSpPr txBox="1"/>
-          <p:nvPr/>
-        </p:nvSpPr>
-        <p:spPr>
-          <a:xfrm>
-            <a:off x="502920" y="4050791"/>
-            <a:ext cx="2103120" cy="457200"/>
-          </a:xfrm>
-          <a:prstGeom prst="rect">
-            <a:avLst/>
-          </a:prstGeom>
-          <a:noFill/>
-        </p:spPr>
-        <p:txBody>
-          <a:bodyPr wrap="square">
-            <a:spAutoFit/>
-          </a:bodyPr>
-          <a:lstStyle/>
-          <a:p>
-            <a:pPr algn="l"/>
-            <a:r>
-              <a:rPr sz="1800" b="1">
-                <a:solidFill>
-                  <a:srgbClr val="E10600"/>
-                </a:solidFill>
-                <a:latin typeface="Calibri"/>
-              </a:rPr>
-              <a:t>Test</a:t>
-            </a:r>
-          </a:p>
-        </p:txBody>
-      </p:sp>
-      <p:sp>
-        <p:nvSpPr>
-          <p:cNvPr id="17" name="TextBox 16"/>
-          <p:cNvSpPr txBox="1"/>
-          <p:nvPr/>
-        </p:nvSpPr>
-        <p:spPr>
-          <a:xfrm>
-            <a:off x="2651760" y="4050791"/>
-            <a:ext cx="3931920" cy="457200"/>
-          </a:xfrm>
-          <a:prstGeom prst="rect">
-            <a:avLst/>
-          </a:prstGeom>
-          <a:noFill/>
-        </p:spPr>
-        <p:txBody>
-          <a:bodyPr wrap="square">
-            <a:spAutoFit/>
-          </a:bodyPr>
-          <a:lstStyle/>
-          <a:p>
-            <a:pPr algn="l"/>
-            <a:r>
-              <a:rPr sz="1800" b="0">
-                <a:solidFill>
-                  <a:srgbClr val="1C1B1A"/>
-                </a:solidFill>
-                <a:latin typeface="Calibri"/>
-              </a:rPr>
-              <a:t>Refund asks twice. A healthy order stays healthy.</a:t>
-            </a:r>
-          </a:p>
-        </p:txBody>
-      </p:sp>
-      <p:sp>
-        <p:nvSpPr>
-          <p:cNvPr id="18" name="Rectangle 17"/>
-          <p:cNvSpPr/>
-          <p:nvPr/>
-        </p:nvSpPr>
-        <p:spPr>
-          <a:xfrm>
-            <a:off x="6858000" y="1463040"/>
-            <a:ext cx="4846320" cy="4297680"/>
-          </a:xfrm>
-          <a:prstGeom prst="rect">
-            <a:avLst/>
-          </a:prstGeom>
-          <a:solidFill>
-            <a:srgbClr val="F6F3EF"/>
-          </a:solidFill>
-          <a:ln>
-            <a:noFill/>
-          </a:ln>
-        </p:spPr>
-        <p:style>
-          <a:lnRef idx="1">
-            <a:schemeClr val="accent1"/>
-          </a:lnRef>
-          <a:fillRef idx="3">
-            <a:schemeClr val="accent1"/>
-          </a:fillRef>
-          <a:effectRef idx="2">
-            <a:schemeClr val="accent1"/>
-          </a:effectRef>
-          <a:fontRef idx="minor">
-            <a:schemeClr val="lt1"/>
-          </a:fontRef>
-        </p:style>
-        <p:txBody>
-          <a:bodyPr rtlCol="0" anchor="ctr"/>
-          <a:lstStyle/>
-          <a:p>
-            <a:pPr algn="ctr"/>
-          </a:p>
-        </p:txBody>
-      </p:sp>
-      <p:sp>
-        <p:nvSpPr>
-          <p:cNvPr id="19" name="TextBox 18"/>
-          <p:cNvSpPr txBox="1"/>
-          <p:nvPr/>
-        </p:nvSpPr>
-        <p:spPr>
-          <a:xfrm>
-            <a:off x="7086600" y="1645920"/>
-            <a:ext cx="4480560" cy="365760"/>
-          </a:xfrm>
-          <a:prstGeom prst="rect">
-            <a:avLst/>
-          </a:prstGeom>
-          <a:noFill/>
-        </p:spPr>
-        <p:txBody>
-          <a:bodyPr wrap="square">
-            <a:spAutoFit/>
-          </a:bodyPr>
-          <a:lstStyle/>
-          <a:p>
-            <a:pPr algn="l"/>
-            <a:r>
-              <a:rPr sz="1300" b="1">
-                <a:solidFill>
-                  <a:srgbClr val="E10600"/>
-                </a:solidFill>
-                <a:latin typeface="Calibri"/>
-              </a:rPr>
-              <a:t>SAP OPTION 2</a:t>
-            </a:r>
-          </a:p>
-        </p:txBody>
-      </p:sp>
-      <p:sp>
-        <p:nvSpPr>
-          <p:cNvPr id="20" name="TextBox 19"/>
-          <p:cNvSpPr txBox="1"/>
-          <p:nvPr/>
-        </p:nvSpPr>
-        <p:spPr>
-          <a:xfrm>
-            <a:off x="7086600" y="2103120"/>
-            <a:ext cx="4480560" cy="3383280"/>
-          </a:xfrm>
-          <a:prstGeom prst="rect">
-            <a:avLst/>
-          </a:prstGeom>
-          <a:noFill/>
-        </p:spPr>
-        <p:txBody>
-          <a:bodyPr wrap="square">
-            <a:spAutoFit/>
-          </a:bodyPr>
-          <a:lstStyle/>
-          <a:p>
-            <a:pPr algn="l"/>
-            <a:r>
-              <a:rPr sz="1600" b="0">
-                <a:solidFill>
-                  <a:srgbClr val="1C1B1A"/>
-                </a:solidFill>
-                <a:latin typeface="Calibri"/>
-              </a:rPr>
-              <a:t>Fits
-Sales order, outbound delivery, freight order, service request.
-Changed
-The internal routing screen waits. This is the customer path.
-Does not fit
-The billing API cannot create a refund. We confirm it here and link the sales order.</a:t>
-            </a:r>
-          </a:p>
-        </p:txBody>
-      </p:sp>
-    </p:spTree>
-  </p:cSld>
-  <p:clrMapOvr>
-    <a:masterClrMapping/>
-  </p:clrMapOvr>
-</p:sld>
-</file>
-
-<file path=ppt/slides/slide7.xml><?xml version="1.0" encoding="utf-8"?>
-<p:sld xmlns:a="http://schemas.openxmlformats.org/drawingml/2006/main" xmlns:p="http://schemas.openxmlformats.org/presentationml/2006/main" xmlns:r="http://schemas.openxmlformats.org/officeDocument/2006/relationships">
-  <p:cSld>
-    <p:spTree>
-      <p:nvGrpSpPr>
-        <p:cNvPr id="1" name=""/>
-        <p:cNvGrpSpPr/>
-        <p:nvPr/>
-      </p:nvGrpSpPr>
-      <p:grpSpPr/>
-      <p:sp>
-        <p:nvSpPr>
-          <p:cNvPr id="2" name="Rectangle 1"/>
-          <p:cNvSpPr/>
-          <p:nvPr/>
-        </p:nvSpPr>
-        <p:spPr>
-          <a:xfrm>
-            <a:off x="0" y="0"/>
-            <a:ext cx="12191695" cy="6858000"/>
-          </a:xfrm>
-          <a:prstGeom prst="rect">
-            <a:avLst/>
-          </a:prstGeom>
-          <a:solidFill>
-            <a:srgbClr val="1C1B1A"/>
-          </a:solidFill>
-          <a:ln>
-            <a:noFill/>
-          </a:ln>
-        </p:spPr>
-        <p:style>
-          <a:lnRef idx="1">
-            <a:schemeClr val="accent1"/>
-          </a:lnRef>
-          <a:fillRef idx="3">
-            <a:schemeClr val="accent1"/>
-          </a:fillRef>
-          <a:effectRef idx="2">
-            <a:schemeClr val="accent1"/>
-          </a:effectRef>
-          <a:fontRef idx="minor">
-            <a:schemeClr val="lt1"/>
-          </a:fontRef>
-        </p:style>
-        <p:txBody>
-          <a:bodyPr rtlCol="0" anchor="ctr"/>
-          <a:lstStyle/>
-          <a:p>
-            <a:pPr algn="ctr"/>
-          </a:p>
-        </p:txBody>
-      </p:sp>
-      <p:sp>
-        <p:nvSpPr>
-          <p:cNvPr id="3" name="Rectangle 2"/>
-          <p:cNvSpPr/>
-          <p:nvPr/>
-        </p:nvSpPr>
-        <p:spPr>
-          <a:xfrm>
-            <a:off x="0" y="0"/>
-            <a:ext cx="164592" cy="6858000"/>
-          </a:xfrm>
-          <a:prstGeom prst="rect">
-            <a:avLst/>
-          </a:prstGeom>
-          <a:solidFill>
-            <a:srgbClr val="E10600"/>
-          </a:solidFill>
-          <a:ln>
-            <a:noFill/>
-          </a:ln>
-        </p:spPr>
-        <p:style>
-          <a:lnRef idx="1">
-            <a:schemeClr val="accent1"/>
-          </a:lnRef>
-          <a:fillRef idx="3">
-            <a:schemeClr val="accent1"/>
-          </a:fillRef>
-          <a:effectRef idx="2">
-            <a:schemeClr val="accent1"/>
-          </a:effectRef>
-          <a:fontRef idx="minor">
-            <a:schemeClr val="lt1"/>
-          </a:fontRef>
-        </p:style>
-        <p:txBody>
-          <a:bodyPr rtlCol="0" anchor="ctr"/>
-          <a:lstStyle/>
-          <a:p>
-            <a:pPr algn="ctr"/>
-          </a:p>
-        </p:txBody>
-      </p:sp>
-      <p:sp>
-        <p:nvSpPr>
-          <p:cNvPr id="4" name="TextBox 3"/>
-          <p:cNvSpPr txBox="1"/>
-          <p:nvPr/>
-        </p:nvSpPr>
-        <p:spPr>
-          <a:xfrm>
-            <a:off x="777240" y="411480"/>
-            <a:ext cx="5486400" cy="274320"/>
-          </a:xfrm>
-          <a:prstGeom prst="rect">
-            <a:avLst/>
-          </a:prstGeom>
-          <a:noFill/>
-        </p:spPr>
-        <p:txBody>
-          <a:bodyPr wrap="square">
-            <a:spAutoFit/>
-          </a:bodyPr>
-          <a:lstStyle/>
-          <a:p>
-            <a:pPr algn="l"/>
-            <a:r>
-              <a:rPr sz="1400" b="1">
-                <a:solidFill>
-                  <a:srgbClr val="E10600"/>
-                </a:solidFill>
-                <a:latin typeface="Calibri"/>
-              </a:rPr>
-              <a:t>SHOW IT</a:t>
-            </a:r>
-          </a:p>
-        </p:txBody>
-      </p:sp>
-      <p:sp>
-        <p:nvSpPr>
-          <p:cNvPr id="5" name="TextBox 4"/>
-          <p:cNvSpPr txBox="1"/>
-          <p:nvPr/>
-        </p:nvSpPr>
-        <p:spPr>
-          <a:xfrm>
-            <a:off x="777240" y="914400"/>
-            <a:ext cx="10058400" cy="731520"/>
-          </a:xfrm>
-          <a:prstGeom prst="rect">
-            <a:avLst/>
-          </a:prstGeom>
-          <a:noFill/>
-        </p:spPr>
-        <p:txBody>
-          <a:bodyPr wrap="square">
-            <a:spAutoFit/>
-          </a:bodyPr>
-          <a:lstStyle/>
-          <a:p>
-            <a:pPr algn="l"/>
-            <a:r>
-              <a:rPr sz="4800" b="1">
-                <a:solidFill>
-                  <a:srgbClr val="FFFFFF"/>
-                </a:solidFill>
-                <a:latin typeface="Calibri"/>
-              </a:rPr>
-              <a:t>Order KM185002</a:t>
-            </a:r>
-          </a:p>
-        </p:txBody>
-      </p:sp>
-      <p:sp>
-        <p:nvSpPr>
-          <p:cNvPr id="6" name="TextBox 5"/>
-          <p:cNvSpPr txBox="1"/>
-          <p:nvPr/>
-        </p:nvSpPr>
-        <p:spPr>
-          <a:xfrm>
-            <a:off x="777240" y="1828800"/>
-            <a:ext cx="9144000" cy="457200"/>
-          </a:xfrm>
-          <a:prstGeom prst="rect">
-            <a:avLst/>
-          </a:prstGeom>
-          <a:noFill/>
-        </p:spPr>
-        <p:txBody>
-          <a:bodyPr wrap="square">
-            <a:spAutoFit/>
-          </a:bodyPr>
-          <a:lstStyle/>
-          <a:p>
-            <a:pPr algn="l"/>
-            <a:r>
-              <a:rPr sz="2000" b="0">
-                <a:solidFill>
-                  <a:srgbClr val="E6E0D8"/>
-                </a:solidFill>
-                <a:latin typeface="Calibri"/>
-              </a:rPr>
-              <a:t>ANKO Storage Box 30L  ·  damaged on delivery  ·  cushion is fine</a:t>
-            </a:r>
-          </a:p>
-        </p:txBody>
-      </p:sp>
-      <p:sp>
-        <p:nvSpPr>
-          <p:cNvPr id="7" name="TextBox 6"/>
-          <p:cNvSpPr txBox="1"/>
-          <p:nvPr/>
-        </p:nvSpPr>
-        <p:spPr>
-          <a:xfrm>
-            <a:off x="777240" y="2834640"/>
-            <a:ext cx="10058400" cy="502920"/>
-          </a:xfrm>
-          <a:prstGeom prst="rect">
-            <a:avLst/>
-          </a:prstGeom>
-          <a:noFill/>
-        </p:spPr>
-        <p:txBody>
-          <a:bodyPr wrap="square">
-            <a:spAutoFit/>
-          </a:bodyPr>
-          <a:lstStyle/>
-          <a:p>
-            <a:pPr algn="l"/>
-            <a:r>
-              <a:rPr sz="2200" b="0">
-                <a:solidFill>
-                  <a:srgbClr val="FFFFFF"/>
-                </a:solidFill>
-                <a:latin typeface="Calibri"/>
-              </a:rPr>
-              <a:t>1    Open the order. Read the one-sentence status.</a:t>
-            </a:r>
-          </a:p>
-        </p:txBody>
-      </p:sp>
-      <p:sp>
-        <p:nvSpPr>
-          <p:cNvPr id="8" name="TextBox 7"/>
-          <p:cNvSpPr txBox="1"/>
-          <p:nvPr/>
-        </p:nvSpPr>
-        <p:spPr>
-          <a:xfrm>
-            <a:off x="777240" y="3474720"/>
-            <a:ext cx="10058400" cy="502920"/>
-          </a:xfrm>
-          <a:prstGeom prst="rect">
-            <a:avLst/>
-          </a:prstGeom>
-          <a:noFill/>
-        </p:spPr>
-        <p:txBody>
-          <a:bodyPr wrap="square">
-            <a:spAutoFit/>
-          </a:bodyPr>
-          <a:lstStyle/>
-          <a:p>
-            <a:pPr algn="l"/>
-            <a:r>
-              <a:rPr sz="2200" b="0">
-                <a:solidFill>
-                  <a:srgbClr val="FFFFFF"/>
-                </a:solidFill>
-                <a:latin typeface="Calibri"/>
-              </a:rPr>
-              <a:t>2    Confirm the problem. Keep the recommended replacement.</a:t>
-            </a:r>
-          </a:p>
-        </p:txBody>
-      </p:sp>
-      <p:sp>
-        <p:nvSpPr>
-          <p:cNvPr id="9" name="TextBox 8"/>
-          <p:cNvSpPr txBox="1"/>
-          <p:nvPr/>
-        </p:nvSpPr>
-        <p:spPr>
-          <a:xfrm>
-            <a:off x="777240" y="4114800"/>
-            <a:ext cx="10058400" cy="502920"/>
-          </a:xfrm>
-          <a:prstGeom prst="rect">
-            <a:avLst/>
-          </a:prstGeom>
-          <a:noFill/>
-        </p:spPr>
-        <p:txBody>
-          <a:bodyPr wrap="square">
-            <a:spAutoFit/>
-          </a:bodyPr>
-          <a:lstStyle/>
-          <a:p>
-            <a:pPr algn="l"/>
-            <a:r>
-              <a:rPr sz="2200" b="0">
-                <a:solidFill>
-                  <a:srgbClr val="FFFFFF"/>
-                </a:solidFill>
-                <a:latin typeface="Calibri"/>
-              </a:rPr>
-              <a:t>3    Check for an update until the case is ready.</a:t>
-            </a:r>
-          </a:p>
-        </p:txBody>
-      </p:sp>
-      <p:sp>
-        <p:nvSpPr>
-          <p:cNvPr id="10" name="TextBox 9"/>
-          <p:cNvSpPr txBox="1"/>
-          <p:nvPr/>
-        </p:nvSpPr>
-        <p:spPr>
-          <a:xfrm>
-            <a:off x="777240" y="4754879"/>
-            <a:ext cx="10058400" cy="502920"/>
-          </a:xfrm>
-          <a:prstGeom prst="rect">
-            <a:avLst/>
-          </a:prstGeom>
-          <a:noFill/>
-        </p:spPr>
-        <p:txBody>
-          <a:bodyPr wrap="square">
-            <a:spAutoFit/>
-          </a:bodyPr>
-          <a:lstStyle/>
-          <a:p>
-            <a:pPr algn="l"/>
-            <a:r>
-              <a:rPr sz="2200" b="0">
-                <a:solidFill>
-                  <a:srgbClr val="FFFFFF"/>
-                </a:solidFill>
-                <a:latin typeface="Calibri"/>
-              </a:rPr>
-              <a:t>4    Confirm. Show the SAP service request.</a:t>
-            </a:r>
-          </a:p>
-        </p:txBody>
-      </p:sp>
-    </p:spTree>
-  </p:cSld>
-  <p:clrMapOvr>
-    <a:masterClrMapping/>
-  </p:clrMapOvr>
-</p:sld>
-</file>
-
-<file path=ppt/slides/slide8.xml><?xml version="1.0" encoding="utf-8"?>
-<p:sld xmlns:a="http://schemas.openxmlformats.org/drawingml/2006/main" xmlns:p="http://schemas.openxmlformats.org/presentationml/2006/main" xmlns:r="http://schemas.openxmlformats.org/officeDocument/2006/relationships">
-  <p:cSld>
-    <p:spTree>
-      <p:nvGrpSpPr>
-        <p:cNvPr id="1" name=""/>
-        <p:cNvGrpSpPr/>
-        <p:nvPr/>
-      </p:nvGrpSpPr>
-      <p:grpSpPr/>
-      <p:sp>
-        <p:nvSpPr>
-          <p:cNvPr id="2" name="Rectangle 1"/>
-          <p:cNvSpPr/>
-          <p:nvPr/>
-        </p:nvSpPr>
-        <p:spPr>
-          <a:xfrm>
-            <a:off x="0" y="0"/>
-            <a:ext cx="12191695" cy="6858000"/>
-          </a:xfrm>
-          <a:prstGeom prst="rect">
-            <a:avLst/>
-          </a:prstGeom>
-          <a:solidFill>
-            <a:srgbClr val="FFFFFF"/>
-          </a:solidFill>
-          <a:ln>
-            <a:noFill/>
-          </a:ln>
-        </p:spPr>
-        <p:style>
-          <a:lnRef idx="1">
-            <a:schemeClr val="accent1"/>
-          </a:lnRef>
-          <a:fillRef idx="3">
-            <a:schemeClr val="accent1"/>
-          </a:fillRef>
-          <a:effectRef idx="2">
-            <a:schemeClr val="accent1"/>
-          </a:effectRef>
-          <a:fontRef idx="minor">
-            <a:schemeClr val="lt1"/>
-          </a:fontRef>
-        </p:style>
-        <p:txBody>
-          <a:bodyPr rtlCol="0" anchor="ctr"/>
-          <a:lstStyle/>
-          <a:p>
-            <a:pPr algn="ctr"/>
-          </a:p>
-        </p:txBody>
-      </p:sp>
-      <p:sp>
-        <p:nvSpPr>
-          <p:cNvPr id="3" name="Rectangle 2"/>
-          <p:cNvSpPr/>
-          <p:nvPr/>
-        </p:nvSpPr>
-        <p:spPr>
-          <a:xfrm>
-            <a:off x="0" y="0"/>
-            <a:ext cx="12191695" cy="73152"/>
-          </a:xfrm>
-          <a:prstGeom prst="rect">
-            <a:avLst/>
-          </a:prstGeom>
-          <a:solidFill>
-            <a:srgbClr val="E10600"/>
-          </a:solidFill>
-          <a:ln>
-            <a:noFill/>
-          </a:ln>
-        </p:spPr>
-        <p:style>
-          <a:lnRef idx="1">
-            <a:schemeClr val="accent1"/>
-          </a:lnRef>
-          <a:fillRef idx="3">
-            <a:schemeClr val="accent1"/>
-          </a:fillRef>
-          <a:effectRef idx="2">
-            <a:schemeClr val="accent1"/>
-          </a:effectRef>
-          <a:fontRef idx="minor">
-            <a:schemeClr val="lt1"/>
-          </a:fontRef>
-        </p:style>
-        <p:txBody>
-          <a:bodyPr rtlCol="0" anchor="ctr"/>
-          <a:lstStyle/>
-          <a:p>
-            <a:pPr algn="ctr"/>
-          </a:p>
-        </p:txBody>
-      </p:sp>
-      <p:sp>
-        <p:nvSpPr>
-          <p:cNvPr id="4" name="TextBox 3"/>
-          <p:cNvSpPr txBox="1"/>
-          <p:nvPr/>
-        </p:nvSpPr>
-        <p:spPr>
-          <a:xfrm>
-            <a:off x="502920" y="6510528"/>
-            <a:ext cx="7315200" cy="256032"/>
-          </a:xfrm>
-          <a:prstGeom prst="rect">
-            <a:avLst/>
-          </a:prstGeom>
-          <a:noFill/>
-        </p:spPr>
-        <p:txBody>
-          <a:bodyPr wrap="square">
-            <a:spAutoFit/>
-          </a:bodyPr>
-          <a:lstStyle/>
-          <a:p>
-            <a:pPr algn="l"/>
-            <a:r>
-              <a:rPr sz="1200" b="0">
-                <a:solidFill>
-                  <a:srgbClr val="5E5A55"/>
-                </a:solidFill>
-                <a:latin typeface="Calibri"/>
-              </a:rPr>
-              <a:t>Kmart Delivery Assist  ·  Managing Director</a:t>
-            </a:r>
-          </a:p>
-        </p:txBody>
-      </p:sp>
-      <p:sp>
-        <p:nvSpPr>
-          <p:cNvPr id="5" name="TextBox 4"/>
-          <p:cNvSpPr txBox="1"/>
-          <p:nvPr/>
-        </p:nvSpPr>
-        <p:spPr>
-          <a:xfrm>
-            <a:off x="9509760" y="6510528"/>
-            <a:ext cx="2194560" cy="256032"/>
-          </a:xfrm>
-          <a:prstGeom prst="rect">
-            <a:avLst/>
-          </a:prstGeom>
-          <a:noFill/>
-        </p:spPr>
-        <p:txBody>
-          <a:bodyPr wrap="square">
-            <a:spAutoFit/>
-          </a:bodyPr>
-          <a:lstStyle/>
-          <a:p>
-            <a:pPr algn="r"/>
-            <a:r>
-              <a:rPr sz="1200" b="0">
-                <a:solidFill>
-                  <a:srgbClr val="5E5A55"/>
-                </a:solidFill>
-                <a:latin typeface="Calibri"/>
-              </a:rPr>
-              <a:t>8  /  9</a:t>
-            </a:r>
-          </a:p>
-        </p:txBody>
-      </p:sp>
-      <p:sp>
-        <p:nvSpPr>
-          <p:cNvPr id="6" name="TextBox 5"/>
-          <p:cNvSpPr txBox="1"/>
-          <p:nvPr/>
-        </p:nvSpPr>
-        <p:spPr>
-          <a:xfrm>
-            <a:off x="502920" y="320040"/>
-            <a:ext cx="3657600" cy="274320"/>
-          </a:xfrm>
-          <a:prstGeom prst="rect">
-            <a:avLst/>
-          </a:prstGeom>
-          <a:noFill/>
-        </p:spPr>
-        <p:txBody>
-          <a:bodyPr wrap="square">
-            <a:spAutoFit/>
-          </a:bodyPr>
-          <a:lstStyle/>
-          <a:p>
-            <a:pPr algn="l"/>
-            <a:r>
-              <a:rPr sz="1400" b="1">
-                <a:solidFill>
-                  <a:srgbClr val="E10600"/>
-                </a:solidFill>
-                <a:latin typeface="Calibri"/>
-              </a:rPr>
-              <a:t>THE ASK</a:t>
-            </a:r>
-          </a:p>
-        </p:txBody>
-      </p:sp>
-      <p:sp>
-        <p:nvSpPr>
-          <p:cNvPr id="7" name="TextBox 6"/>
-          <p:cNvSpPr txBox="1"/>
-          <p:nvPr/>
-        </p:nvSpPr>
-        <p:spPr>
-          <a:xfrm>
-            <a:off x="502920" y="731520"/>
-            <a:ext cx="10972800" cy="1097280"/>
-          </a:xfrm>
-          <a:prstGeom prst="rect">
-            <a:avLst/>
-          </a:prstGeom>
-          <a:noFill/>
-        </p:spPr>
-        <p:txBody>
-          <a:bodyPr wrap="square">
-            <a:spAutoFit/>
-          </a:bodyPr>
-          <a:lstStyle/>
-          <a:p>
-            <a:pPr algn="l"/>
-            <a:r>
-              <a:rPr sz="3400" b="1">
-                <a:solidFill>
-                  <a:srgbClr val="1C1B1A"/>
-                </a:solidFill>
-                <a:latin typeface="Calibri"/>
-              </a:rPr>
-              <a:t>Use this as the customer face
-of exception recovery.</a:t>
-            </a:r>
-          </a:p>
-        </p:txBody>
-      </p:sp>
-      <p:sp>
-        <p:nvSpPr>
-          <p:cNvPr id="8" name="TextBox 7"/>
-          <p:cNvSpPr txBox="1"/>
-          <p:nvPr/>
-        </p:nvSpPr>
-        <p:spPr>
-          <a:xfrm>
-            <a:off x="502920" y="2468880"/>
-            <a:ext cx="2194560" cy="640080"/>
-          </a:xfrm>
-          <a:prstGeom prst="rect">
-            <a:avLst/>
-          </a:prstGeom>
-          <a:noFill/>
-        </p:spPr>
-        <p:txBody>
-          <a:bodyPr wrap="square">
-            <a:spAutoFit/>
-          </a:bodyPr>
-          <a:lstStyle/>
-          <a:p>
-            <a:pPr algn="l"/>
-            <a:r>
-              <a:rPr sz="2200" b="1">
-                <a:solidFill>
-                  <a:srgbClr val="E10600"/>
-                </a:solidFill>
-                <a:latin typeface="Calibri"/>
-              </a:rPr>
-              <a:t>Today</a:t>
-            </a:r>
-          </a:p>
-        </p:txBody>
-      </p:sp>
-      <p:sp>
-        <p:nvSpPr>
-          <p:cNvPr id="9" name="TextBox 8"/>
-          <p:cNvSpPr txBox="1"/>
-          <p:nvPr/>
-        </p:nvSpPr>
-        <p:spPr>
-          <a:xfrm>
-            <a:off x="2834640" y="2468880"/>
-            <a:ext cx="8503920" cy="822960"/>
-          </a:xfrm>
-          <a:prstGeom prst="rect">
-            <a:avLst/>
-          </a:prstGeom>
-          <a:noFill/>
-        </p:spPr>
-        <p:txBody>
-          <a:bodyPr wrap="square">
-            <a:spAutoFit/>
-          </a:bodyPr>
-          <a:lstStyle/>
-          <a:p>
-            <a:pPr algn="l"/>
-            <a:r>
-              <a:rPr sz="2200" b="0">
-                <a:solidFill>
-                  <a:srgbClr val="1C1B1A"/>
-                </a:solidFill>
-                <a:latin typeface="Calibri"/>
-              </a:rPr>
-              <a:t>A customer can finish a damaged, missed or missing delivery without a call.</a:t>
-            </a:r>
-          </a:p>
-        </p:txBody>
-      </p:sp>
-      <p:sp>
-        <p:nvSpPr>
-          <p:cNvPr id="10" name="TextBox 9"/>
-          <p:cNvSpPr txBox="1"/>
-          <p:nvPr/>
-        </p:nvSpPr>
-        <p:spPr>
-          <a:xfrm>
-            <a:off x="502920" y="3611880"/>
-            <a:ext cx="2194560" cy="640080"/>
-          </a:xfrm>
-          <a:prstGeom prst="rect">
-            <a:avLst/>
-          </a:prstGeom>
-          <a:noFill/>
-        </p:spPr>
-        <p:txBody>
-          <a:bodyPr wrap="square">
-            <a:spAutoFit/>
-          </a:bodyPr>
-          <a:lstStyle/>
-          <a:p>
-            <a:pPr algn="l"/>
-            <a:r>
-              <a:rPr sz="2200" b="1">
-                <a:solidFill>
-                  <a:srgbClr val="E10600"/>
-                </a:solidFill>
-                <a:latin typeface="Calibri"/>
-              </a:rPr>
-              <a:t>Next</a:t>
-            </a:r>
-          </a:p>
-        </p:txBody>
-      </p:sp>
-      <p:sp>
-        <p:nvSpPr>
-          <p:cNvPr id="11" name="TextBox 10"/>
-          <p:cNvSpPr txBox="1"/>
-          <p:nvPr/>
-        </p:nvSpPr>
-        <p:spPr>
-          <a:xfrm>
-            <a:off x="2834640" y="3611880"/>
-            <a:ext cx="8503920" cy="822960"/>
-          </a:xfrm>
-          <a:prstGeom prst="rect">
-            <a:avLst/>
-          </a:prstGeom>
-          <a:noFill/>
-        </p:spPr>
-        <p:txBody>
-          <a:bodyPr wrap="square">
-            <a:spAutoFit/>
-          </a:bodyPr>
-          <a:lstStyle/>
-          <a:p>
-            <a:pPr algn="l"/>
-            <a:r>
-              <a:rPr sz="2200" b="0">
-                <a:solidFill>
-                  <a:srgbClr val="1C1B1A"/>
-                </a:solidFill>
-                <a:latin typeface="Calibri"/>
-              </a:rPr>
-              <a:t>The decision-data foundation and routing automation stay on the programme, behind shadow evidence.</a:t>
-            </a:r>
-          </a:p>
-        </p:txBody>
-      </p:sp>
-      <p:sp>
-        <p:nvSpPr>
-          <p:cNvPr id="12" name="TextBox 11"/>
-          <p:cNvSpPr txBox="1"/>
-          <p:nvPr/>
-        </p:nvSpPr>
-        <p:spPr>
-          <a:xfrm>
-            <a:off x="502920" y="4754880"/>
-            <a:ext cx="2194560" cy="640080"/>
-          </a:xfrm>
-          <a:prstGeom prst="rect">
-            <a:avLst/>
-          </a:prstGeom>
-          <a:noFill/>
-        </p:spPr>
-        <p:txBody>
-          <a:bodyPr wrap="square">
-            <a:spAutoFit/>
-          </a:bodyPr>
-          <a:lstStyle/>
-          <a:p>
-            <a:pPr algn="l"/>
-            <a:r>
-              <a:rPr sz="2200" b="1">
-                <a:solidFill>
-                  <a:srgbClr val="E10600"/>
-                </a:solidFill>
-                <a:latin typeface="Calibri"/>
-              </a:rPr>
-              <a:t>Guardrail</a:t>
-            </a:r>
-          </a:p>
-        </p:txBody>
-      </p:sp>
-      <p:sp>
-        <p:nvSpPr>
-          <p:cNvPr id="13" name="TextBox 12"/>
-          <p:cNvSpPr txBox="1"/>
-          <p:nvPr/>
-        </p:nvSpPr>
-        <p:spPr>
-          <a:xfrm>
-            <a:off x="2834640" y="4754880"/>
-            <a:ext cx="8503920" cy="822960"/>
-          </a:xfrm>
-          <a:prstGeom prst="rect">
-            <a:avLst/>
-          </a:prstGeom>
-          <a:noFill/>
-        </p:spPr>
-        <p:txBody>
-          <a:bodyPr wrap="square">
-            <a:spAutoFit/>
-          </a:bodyPr>
-          <a:lstStyle/>
-          <a:p>
-            <a:pPr algn="l"/>
-            <a:r>
-              <a:rPr sz="2200" b="0">
-                <a:solidFill>
-                  <a:srgbClr val="1C1B1A"/>
-                </a:solidFill>
-                <a:latin typeface="Calibri"/>
-              </a:rPr>
-              <a:t>A refund is explicit. A healthy order is not turned into a case.</a:t>
-            </a:r>
-          </a:p>
-        </p:txBody>
-      </p:sp>
-    </p:spTree>
-  </p:cSld>
-  <p:clrMapOvr>
-    <a:masterClrMapping/>
-  </p:clrMapOvr>
-</p:sld>
-</file>
-
-<file path=ppt/slides/slide9.xml><?xml version="1.0" encoding="utf-8"?>
+<file path=ppt/slides/slide10.xml><?xml version="1.0" encoding="utf-8"?>
 <p:sld xmlns:a="http://schemas.openxmlformats.org/drawingml/2006/main" xmlns:p="http://schemas.openxmlformats.org/presentationml/2006/main" xmlns:r="http://schemas.openxmlformats.org/officeDocument/2006/relationships">
   <p:cSld>
     <p:spTree>
@@ -9265,6 +5115,5173 @@
               </a:rPr>
               <a:t>The 34 / 33 / 33 split is an equal contribution with one percent for rounding. Confirm it with the group before submission. Replace the comment text if the group agrees a different split.
 Helix delivery names on the business-case slides are unchanged: Dingchen Yuan, Taariq Mohamed, Huy Nguyen.</a:t>
+            </a:r>
+          </a:p>
+        </p:txBody>
+      </p:sp>
+    </p:spTree>
+  </p:cSld>
+  <p:clrMapOvr>
+    <a:masterClrMapping/>
+  </p:clrMapOvr>
+</p:sld>
+</file>
+
+<file path=ppt/slides/slide2.xml><?xml version="1.0" encoding="utf-8"?>
+<p:sld xmlns:a="http://schemas.openxmlformats.org/drawingml/2006/main" xmlns:p="http://schemas.openxmlformats.org/presentationml/2006/main" xmlns:r="http://schemas.openxmlformats.org/officeDocument/2006/relationships">
+  <p:cSld>
+    <p:spTree>
+      <p:nvGrpSpPr>
+        <p:cNvPr id="1" name=""/>
+        <p:cNvGrpSpPr/>
+        <p:nvPr/>
+      </p:nvGrpSpPr>
+      <p:grpSpPr/>
+      <p:sp>
+        <p:nvSpPr>
+          <p:cNvPr id="2" name="Rectangle 1"/>
+          <p:cNvSpPr/>
+          <p:nvPr/>
+        </p:nvSpPr>
+        <p:spPr>
+          <a:xfrm>
+            <a:off x="0" y="0"/>
+            <a:ext cx="12191695" cy="6858000"/>
+          </a:xfrm>
+          <a:prstGeom prst="rect">
+            <a:avLst/>
+          </a:prstGeom>
+          <a:solidFill>
+            <a:srgbClr val="FFFFFF"/>
+          </a:solidFill>
+          <a:ln>
+            <a:noFill/>
+          </a:ln>
+        </p:spPr>
+        <p:style>
+          <a:lnRef idx="1">
+            <a:schemeClr val="accent1"/>
+          </a:lnRef>
+          <a:fillRef idx="3">
+            <a:schemeClr val="accent1"/>
+          </a:fillRef>
+          <a:effectRef idx="2">
+            <a:schemeClr val="accent1"/>
+          </a:effectRef>
+          <a:fontRef idx="minor">
+            <a:schemeClr val="lt1"/>
+          </a:fontRef>
+        </p:style>
+        <p:txBody>
+          <a:bodyPr rtlCol="0" anchor="ctr"/>
+          <a:lstStyle/>
+          <a:p>
+            <a:pPr algn="ctr"/>
+          </a:p>
+        </p:txBody>
+      </p:sp>
+      <p:sp>
+        <p:nvSpPr>
+          <p:cNvPr id="3" name="Rectangle 2"/>
+          <p:cNvSpPr/>
+          <p:nvPr/>
+        </p:nvSpPr>
+        <p:spPr>
+          <a:xfrm>
+            <a:off x="0" y="0"/>
+            <a:ext cx="12191695" cy="73152"/>
+          </a:xfrm>
+          <a:prstGeom prst="rect">
+            <a:avLst/>
+          </a:prstGeom>
+          <a:solidFill>
+            <a:srgbClr val="E10600"/>
+          </a:solidFill>
+          <a:ln>
+            <a:noFill/>
+          </a:ln>
+        </p:spPr>
+        <p:style>
+          <a:lnRef idx="1">
+            <a:schemeClr val="accent1"/>
+          </a:lnRef>
+          <a:fillRef idx="3">
+            <a:schemeClr val="accent1"/>
+          </a:fillRef>
+          <a:effectRef idx="2">
+            <a:schemeClr val="accent1"/>
+          </a:effectRef>
+          <a:fontRef idx="minor">
+            <a:schemeClr val="lt1"/>
+          </a:fontRef>
+        </p:style>
+        <p:txBody>
+          <a:bodyPr rtlCol="0" anchor="ctr"/>
+          <a:lstStyle/>
+          <a:p>
+            <a:pPr algn="ctr"/>
+          </a:p>
+        </p:txBody>
+      </p:sp>
+      <p:sp>
+        <p:nvSpPr>
+          <p:cNvPr id="4" name="TextBox 3"/>
+          <p:cNvSpPr txBox="1"/>
+          <p:nvPr/>
+        </p:nvSpPr>
+        <p:spPr>
+          <a:xfrm>
+            <a:off x="502920" y="6510528"/>
+            <a:ext cx="7315200" cy="256032"/>
+          </a:xfrm>
+          <a:prstGeom prst="rect">
+            <a:avLst/>
+          </a:prstGeom>
+          <a:noFill/>
+        </p:spPr>
+        <p:txBody>
+          <a:bodyPr wrap="square">
+            <a:spAutoFit/>
+          </a:bodyPr>
+          <a:lstStyle/>
+          <a:p>
+            <a:pPr algn="l"/>
+            <a:r>
+              <a:rPr sz="1200" b="0">
+                <a:solidFill>
+                  <a:srgbClr val="5E5A55"/>
+                </a:solidFill>
+                <a:latin typeface="Calibri"/>
+              </a:rPr>
+              <a:t>Kmart Delivery Assist  ·  Managing Director</a:t>
+            </a:r>
+          </a:p>
+        </p:txBody>
+      </p:sp>
+      <p:sp>
+        <p:nvSpPr>
+          <p:cNvPr id="5" name="TextBox 4"/>
+          <p:cNvSpPr txBox="1"/>
+          <p:nvPr/>
+        </p:nvSpPr>
+        <p:spPr>
+          <a:xfrm>
+            <a:off x="9509760" y="6510528"/>
+            <a:ext cx="2194560" cy="256032"/>
+          </a:xfrm>
+          <a:prstGeom prst="rect">
+            <a:avLst/>
+          </a:prstGeom>
+          <a:noFill/>
+        </p:spPr>
+        <p:txBody>
+          <a:bodyPr wrap="square">
+            <a:spAutoFit/>
+          </a:bodyPr>
+          <a:lstStyle/>
+          <a:p>
+            <a:pPr algn="r"/>
+            <a:r>
+              <a:rPr sz="1200" b="0">
+                <a:solidFill>
+                  <a:srgbClr val="5E5A55"/>
+                </a:solidFill>
+                <a:latin typeface="Calibri"/>
+              </a:rPr>
+              <a:t>2  /  10</a:t>
+            </a:r>
+          </a:p>
+        </p:txBody>
+      </p:sp>
+      <p:sp>
+        <p:nvSpPr>
+          <p:cNvPr id="6" name="TextBox 5"/>
+          <p:cNvSpPr txBox="1"/>
+          <p:nvPr/>
+        </p:nvSpPr>
+        <p:spPr>
+          <a:xfrm>
+            <a:off x="502920" y="320040"/>
+            <a:ext cx="3657600" cy="274320"/>
+          </a:xfrm>
+          <a:prstGeom prst="rect">
+            <a:avLst/>
+          </a:prstGeom>
+          <a:noFill/>
+        </p:spPr>
+        <p:txBody>
+          <a:bodyPr wrap="square">
+            <a:spAutoFit/>
+          </a:bodyPr>
+          <a:lstStyle/>
+          <a:p>
+            <a:pPr algn="l"/>
+            <a:r>
+              <a:rPr sz="1400" b="1">
+                <a:solidFill>
+                  <a:srgbClr val="E10600"/>
+                </a:solidFill>
+                <a:latin typeface="Calibri"/>
+              </a:rPr>
+              <a:t>SITUATION</a:t>
+            </a:r>
+          </a:p>
+        </p:txBody>
+      </p:sp>
+      <p:sp>
+        <p:nvSpPr>
+          <p:cNvPr id="7" name="TextBox 6"/>
+          <p:cNvSpPr txBox="1"/>
+          <p:nvPr/>
+        </p:nvSpPr>
+        <p:spPr>
+          <a:xfrm>
+            <a:off x="502920" y="685800"/>
+            <a:ext cx="10972800" cy="1188720"/>
+          </a:xfrm>
+          <a:prstGeom prst="rect">
+            <a:avLst/>
+          </a:prstGeom>
+          <a:noFill/>
+        </p:spPr>
+        <p:txBody>
+          <a:bodyPr wrap="square">
+            <a:spAutoFit/>
+          </a:bodyPr>
+          <a:lstStyle/>
+          <a:p>
+            <a:pPr algn="l"/>
+            <a:r>
+              <a:rPr sz="3200" b="1">
+                <a:solidFill>
+                  <a:srgbClr val="1C1B1A"/>
+                </a:solidFill>
+                <a:latin typeface="Calibri"/>
+              </a:rPr>
+              <a:t>The order is already in the business.
+The customer still cannot see one story.</a:t>
+            </a:r>
+          </a:p>
+        </p:txBody>
+      </p:sp>
+      <p:sp>
+        <p:nvSpPr>
+          <p:cNvPr id="8" name="Rectangle 7"/>
+          <p:cNvSpPr/>
+          <p:nvPr/>
+        </p:nvSpPr>
+        <p:spPr>
+          <a:xfrm>
+            <a:off x="502920" y="2880360"/>
+            <a:ext cx="3566160" cy="3017520"/>
+          </a:xfrm>
+          <a:prstGeom prst="rect">
+            <a:avLst/>
+          </a:prstGeom>
+          <a:solidFill>
+            <a:srgbClr val="F6F3EF"/>
+          </a:solidFill>
+          <a:ln>
+            <a:noFill/>
+          </a:ln>
+        </p:spPr>
+        <p:style>
+          <a:lnRef idx="1">
+            <a:schemeClr val="accent1"/>
+          </a:lnRef>
+          <a:fillRef idx="3">
+            <a:schemeClr val="accent1"/>
+          </a:fillRef>
+          <a:effectRef idx="2">
+            <a:schemeClr val="accent1"/>
+          </a:effectRef>
+          <a:fontRef idx="minor">
+            <a:schemeClr val="lt1"/>
+          </a:fontRef>
+        </p:style>
+        <p:txBody>
+          <a:bodyPr rtlCol="0" anchor="ctr"/>
+          <a:lstStyle/>
+          <a:p>
+            <a:pPr algn="ctr"/>
+          </a:p>
+        </p:txBody>
+      </p:sp>
+      <p:sp>
+        <p:nvSpPr>
+          <p:cNvPr id="9" name="TextBox 8"/>
+          <p:cNvSpPr txBox="1"/>
+          <p:nvPr/>
+        </p:nvSpPr>
+        <p:spPr>
+          <a:xfrm>
+            <a:off x="731520" y="3108960"/>
+            <a:ext cx="3108960" cy="1188720"/>
+          </a:xfrm>
+          <a:prstGeom prst="rect">
+            <a:avLst/>
+          </a:prstGeom>
+          <a:noFill/>
+        </p:spPr>
+        <p:txBody>
+          <a:bodyPr wrap="square">
+            <a:spAutoFit/>
+          </a:bodyPr>
+          <a:lstStyle/>
+          <a:p>
+            <a:pPr algn="l"/>
+            <a:r>
+              <a:rPr sz="2200" b="1">
+                <a:solidFill>
+                  <a:srgbClr val="1C1B1A"/>
+                </a:solidFill>
+                <a:latin typeface="Calibri"/>
+              </a:rPr>
+              <a:t>Capital is in delivery</a:t>
+            </a:r>
+          </a:p>
+        </p:txBody>
+      </p:sp>
+      <p:sp>
+        <p:nvSpPr>
+          <p:cNvPr id="10" name="TextBox 9"/>
+          <p:cNvSpPr txBox="1"/>
+          <p:nvPr/>
+        </p:nvSpPr>
+        <p:spPr>
+          <a:xfrm>
+            <a:off x="731520" y="4389120"/>
+            <a:ext cx="3108960" cy="1188720"/>
+          </a:xfrm>
+          <a:prstGeom prst="rect">
+            <a:avLst/>
+          </a:prstGeom>
+          <a:noFill/>
+        </p:spPr>
+        <p:txBody>
+          <a:bodyPr wrap="square">
+            <a:spAutoFit/>
+          </a:bodyPr>
+          <a:lstStyle/>
+          <a:p>
+            <a:pPr algn="l"/>
+            <a:r>
+              <a:rPr sz="1600" b="0">
+                <a:solidFill>
+                  <a:srgbClr val="5E5A55"/>
+                </a:solidFill>
+                <a:latin typeface="Calibri"/>
+              </a:rPr>
+              <a:t>CFCs and the online order system are there to make delivery faster and cheaper.</a:t>
+            </a:r>
+          </a:p>
+        </p:txBody>
+      </p:sp>
+      <p:sp>
+        <p:nvSpPr>
+          <p:cNvPr id="11" name="Rectangle 10"/>
+          <p:cNvSpPr/>
+          <p:nvPr/>
+        </p:nvSpPr>
+        <p:spPr>
+          <a:xfrm>
+            <a:off x="4297680" y="2880360"/>
+            <a:ext cx="3566160" cy="3017520"/>
+          </a:xfrm>
+          <a:prstGeom prst="rect">
+            <a:avLst/>
+          </a:prstGeom>
+          <a:solidFill>
+            <a:srgbClr val="F6F3EF"/>
+          </a:solidFill>
+          <a:ln>
+            <a:noFill/>
+          </a:ln>
+        </p:spPr>
+        <p:style>
+          <a:lnRef idx="1">
+            <a:schemeClr val="accent1"/>
+          </a:lnRef>
+          <a:fillRef idx="3">
+            <a:schemeClr val="accent1"/>
+          </a:fillRef>
+          <a:effectRef idx="2">
+            <a:schemeClr val="accent1"/>
+          </a:effectRef>
+          <a:fontRef idx="minor">
+            <a:schemeClr val="lt1"/>
+          </a:fontRef>
+        </p:style>
+        <p:txBody>
+          <a:bodyPr rtlCol="0" anchor="ctr"/>
+          <a:lstStyle/>
+          <a:p>
+            <a:pPr algn="ctr"/>
+          </a:p>
+        </p:txBody>
+      </p:sp>
+      <p:sp>
+        <p:nvSpPr>
+          <p:cNvPr id="12" name="TextBox 11"/>
+          <p:cNvSpPr txBox="1"/>
+          <p:nvPr/>
+        </p:nvSpPr>
+        <p:spPr>
+          <a:xfrm>
+            <a:off x="4526280" y="3108960"/>
+            <a:ext cx="3108960" cy="1188720"/>
+          </a:xfrm>
+          <a:prstGeom prst="rect">
+            <a:avLst/>
+          </a:prstGeom>
+          <a:noFill/>
+        </p:spPr>
+        <p:txBody>
+          <a:bodyPr wrap="square">
+            <a:spAutoFit/>
+          </a:bodyPr>
+          <a:lstStyle/>
+          <a:p>
+            <a:pPr algn="l"/>
+            <a:r>
+              <a:rPr sz="2200" b="1">
+                <a:solidFill>
+                  <a:srgbClr val="1C1B1A"/>
+                </a:solidFill>
+                <a:latin typeface="Calibri"/>
+              </a:rPr>
+              <a:t>The order has a record</a:t>
+            </a:r>
+          </a:p>
+        </p:txBody>
+      </p:sp>
+      <p:sp>
+        <p:nvSpPr>
+          <p:cNvPr id="13" name="TextBox 12"/>
+          <p:cNvSpPr txBox="1"/>
+          <p:nvPr/>
+        </p:nvSpPr>
+        <p:spPr>
+          <a:xfrm>
+            <a:off x="4526280" y="4389120"/>
+            <a:ext cx="3108960" cy="1188720"/>
+          </a:xfrm>
+          <a:prstGeom prst="rect">
+            <a:avLst/>
+          </a:prstGeom>
+          <a:noFill/>
+        </p:spPr>
+        <p:txBody>
+          <a:bodyPr wrap="square">
+            <a:spAutoFit/>
+          </a:bodyPr>
+          <a:lstStyle/>
+          <a:p>
+            <a:pPr algn="l"/>
+            <a:r>
+              <a:rPr sz="1600" b="0">
+                <a:solidFill>
+                  <a:srgbClr val="5E5A55"/>
+                </a:solidFill>
+                <a:latin typeface="Calibri"/>
+              </a:rPr>
+              <a:t>A sales order, an outbound delivery and a freight order already describe the journey.</a:t>
+            </a:r>
+          </a:p>
+        </p:txBody>
+      </p:sp>
+      <p:sp>
+        <p:nvSpPr>
+          <p:cNvPr id="14" name="Rectangle 13"/>
+          <p:cNvSpPr/>
+          <p:nvPr/>
+        </p:nvSpPr>
+        <p:spPr>
+          <a:xfrm>
+            <a:off x="8092440" y="2880360"/>
+            <a:ext cx="3566160" cy="3017520"/>
+          </a:xfrm>
+          <a:prstGeom prst="rect">
+            <a:avLst/>
+          </a:prstGeom>
+          <a:solidFill>
+            <a:srgbClr val="F6F3EF"/>
+          </a:solidFill>
+          <a:ln>
+            <a:noFill/>
+          </a:ln>
+        </p:spPr>
+        <p:style>
+          <a:lnRef idx="1">
+            <a:schemeClr val="accent1"/>
+          </a:lnRef>
+          <a:fillRef idx="3">
+            <a:schemeClr val="accent1"/>
+          </a:fillRef>
+          <a:effectRef idx="2">
+            <a:schemeClr val="accent1"/>
+          </a:effectRef>
+          <a:fontRef idx="minor">
+            <a:schemeClr val="lt1"/>
+          </a:fontRef>
+        </p:style>
+        <p:txBody>
+          <a:bodyPr rtlCol="0" anchor="ctr"/>
+          <a:lstStyle/>
+          <a:p>
+            <a:pPr algn="ctr"/>
+          </a:p>
+        </p:txBody>
+      </p:sp>
+      <p:sp>
+        <p:nvSpPr>
+          <p:cNvPr id="15" name="TextBox 14"/>
+          <p:cNvSpPr txBox="1"/>
+          <p:nvPr/>
+        </p:nvSpPr>
+        <p:spPr>
+          <a:xfrm>
+            <a:off x="8321040" y="3108960"/>
+            <a:ext cx="3108960" cy="1188720"/>
+          </a:xfrm>
+          <a:prstGeom prst="rect">
+            <a:avLst/>
+          </a:prstGeom>
+          <a:noFill/>
+        </p:spPr>
+        <p:txBody>
+          <a:bodyPr wrap="square">
+            <a:spAutoFit/>
+          </a:bodyPr>
+          <a:lstStyle/>
+          <a:p>
+            <a:pPr algn="l"/>
+            <a:r>
+              <a:rPr sz="2200" b="1">
+                <a:solidFill>
+                  <a:srgbClr val="1C1B1A"/>
+                </a:solidFill>
+                <a:latin typeface="Calibri"/>
+              </a:rPr>
+              <a:t>The customer gets fragments</a:t>
+            </a:r>
+          </a:p>
+        </p:txBody>
+      </p:sp>
+      <p:sp>
+        <p:nvSpPr>
+          <p:cNvPr id="16" name="TextBox 15"/>
+          <p:cNvSpPr txBox="1"/>
+          <p:nvPr/>
+        </p:nvSpPr>
+        <p:spPr>
+          <a:xfrm>
+            <a:off x="8321040" y="4389120"/>
+            <a:ext cx="3108960" cy="1188720"/>
+          </a:xfrm>
+          <a:prstGeom prst="rect">
+            <a:avLst/>
+          </a:prstGeom>
+          <a:noFill/>
+        </p:spPr>
+        <p:txBody>
+          <a:bodyPr wrap="square">
+            <a:spAutoFit/>
+          </a:bodyPr>
+          <a:lstStyle/>
+          <a:p>
+            <a:pPr algn="l"/>
+            <a:r>
+              <a:rPr sz="1600" b="0">
+                <a:solidFill>
+                  <a:srgbClr val="5E5A55"/>
+                </a:solidFill>
+                <a:latin typeface="Calibri"/>
+              </a:rPr>
+              <a:t>A carrier page, then a phone call, then a refund somewhere else.</a:t>
+            </a:r>
+          </a:p>
+        </p:txBody>
+      </p:sp>
+    </p:spTree>
+  </p:cSld>
+  <p:clrMapOvr>
+    <a:masterClrMapping/>
+  </p:clrMapOvr>
+</p:sld>
+</file>
+
+<file path=ppt/slides/slide3.xml><?xml version="1.0" encoding="utf-8"?>
+<p:sld xmlns:a="http://schemas.openxmlformats.org/drawingml/2006/main" xmlns:p="http://schemas.openxmlformats.org/presentationml/2006/main" xmlns:r="http://schemas.openxmlformats.org/officeDocument/2006/relationships">
+  <p:cSld>
+    <p:spTree>
+      <p:nvGrpSpPr>
+        <p:cNvPr id="1" name=""/>
+        <p:cNvGrpSpPr/>
+        <p:nvPr/>
+      </p:nvGrpSpPr>
+      <p:grpSpPr/>
+      <p:sp>
+        <p:nvSpPr>
+          <p:cNvPr id="2" name="Rectangle 1"/>
+          <p:cNvSpPr/>
+          <p:nvPr/>
+        </p:nvSpPr>
+        <p:spPr>
+          <a:xfrm>
+            <a:off x="0" y="0"/>
+            <a:ext cx="12191695" cy="6858000"/>
+          </a:xfrm>
+          <a:prstGeom prst="rect">
+            <a:avLst/>
+          </a:prstGeom>
+          <a:solidFill>
+            <a:srgbClr val="FFFFFF"/>
+          </a:solidFill>
+          <a:ln>
+            <a:noFill/>
+          </a:ln>
+        </p:spPr>
+        <p:style>
+          <a:lnRef idx="1">
+            <a:schemeClr val="accent1"/>
+          </a:lnRef>
+          <a:fillRef idx="3">
+            <a:schemeClr val="accent1"/>
+          </a:fillRef>
+          <a:effectRef idx="2">
+            <a:schemeClr val="accent1"/>
+          </a:effectRef>
+          <a:fontRef idx="minor">
+            <a:schemeClr val="lt1"/>
+          </a:fontRef>
+        </p:style>
+        <p:txBody>
+          <a:bodyPr rtlCol="0" anchor="ctr"/>
+          <a:lstStyle/>
+          <a:p>
+            <a:pPr algn="ctr"/>
+          </a:p>
+        </p:txBody>
+      </p:sp>
+      <p:sp>
+        <p:nvSpPr>
+          <p:cNvPr id="3" name="Rectangle 2"/>
+          <p:cNvSpPr/>
+          <p:nvPr/>
+        </p:nvSpPr>
+        <p:spPr>
+          <a:xfrm>
+            <a:off x="0" y="0"/>
+            <a:ext cx="12191695" cy="73152"/>
+          </a:xfrm>
+          <a:prstGeom prst="rect">
+            <a:avLst/>
+          </a:prstGeom>
+          <a:solidFill>
+            <a:srgbClr val="E10600"/>
+          </a:solidFill>
+          <a:ln>
+            <a:noFill/>
+          </a:ln>
+        </p:spPr>
+        <p:style>
+          <a:lnRef idx="1">
+            <a:schemeClr val="accent1"/>
+          </a:lnRef>
+          <a:fillRef idx="3">
+            <a:schemeClr val="accent1"/>
+          </a:fillRef>
+          <a:effectRef idx="2">
+            <a:schemeClr val="accent1"/>
+          </a:effectRef>
+          <a:fontRef idx="minor">
+            <a:schemeClr val="lt1"/>
+          </a:fontRef>
+        </p:style>
+        <p:txBody>
+          <a:bodyPr rtlCol="0" anchor="ctr"/>
+          <a:lstStyle/>
+          <a:p>
+            <a:pPr algn="ctr"/>
+          </a:p>
+        </p:txBody>
+      </p:sp>
+      <p:sp>
+        <p:nvSpPr>
+          <p:cNvPr id="4" name="TextBox 3"/>
+          <p:cNvSpPr txBox="1"/>
+          <p:nvPr/>
+        </p:nvSpPr>
+        <p:spPr>
+          <a:xfrm>
+            <a:off x="502920" y="6510528"/>
+            <a:ext cx="7315200" cy="256032"/>
+          </a:xfrm>
+          <a:prstGeom prst="rect">
+            <a:avLst/>
+          </a:prstGeom>
+          <a:noFill/>
+        </p:spPr>
+        <p:txBody>
+          <a:bodyPr wrap="square">
+            <a:spAutoFit/>
+          </a:bodyPr>
+          <a:lstStyle/>
+          <a:p>
+            <a:pPr algn="l"/>
+            <a:r>
+              <a:rPr sz="1200" b="0">
+                <a:solidFill>
+                  <a:srgbClr val="5E5A55"/>
+                </a:solidFill>
+                <a:latin typeface="Calibri"/>
+              </a:rPr>
+              <a:t>Kmart Delivery Assist  ·  Managing Director</a:t>
+            </a:r>
+          </a:p>
+        </p:txBody>
+      </p:sp>
+      <p:sp>
+        <p:nvSpPr>
+          <p:cNvPr id="5" name="TextBox 4"/>
+          <p:cNvSpPr txBox="1"/>
+          <p:nvPr/>
+        </p:nvSpPr>
+        <p:spPr>
+          <a:xfrm>
+            <a:off x="9509760" y="6510528"/>
+            <a:ext cx="2194560" cy="256032"/>
+          </a:xfrm>
+          <a:prstGeom prst="rect">
+            <a:avLst/>
+          </a:prstGeom>
+          <a:noFill/>
+        </p:spPr>
+        <p:txBody>
+          <a:bodyPr wrap="square">
+            <a:spAutoFit/>
+          </a:bodyPr>
+          <a:lstStyle/>
+          <a:p>
+            <a:pPr algn="r"/>
+            <a:r>
+              <a:rPr sz="1200" b="0">
+                <a:solidFill>
+                  <a:srgbClr val="5E5A55"/>
+                </a:solidFill>
+                <a:latin typeface="Calibri"/>
+              </a:rPr>
+              <a:t>3  /  10</a:t>
+            </a:r>
+          </a:p>
+        </p:txBody>
+      </p:sp>
+      <p:sp>
+        <p:nvSpPr>
+          <p:cNvPr id="6" name="TextBox 5"/>
+          <p:cNvSpPr txBox="1"/>
+          <p:nvPr/>
+        </p:nvSpPr>
+        <p:spPr>
+          <a:xfrm>
+            <a:off x="502920" y="320040"/>
+            <a:ext cx="3657600" cy="274320"/>
+          </a:xfrm>
+          <a:prstGeom prst="rect">
+            <a:avLst/>
+          </a:prstGeom>
+          <a:noFill/>
+        </p:spPr>
+        <p:txBody>
+          <a:bodyPr wrap="square">
+            <a:spAutoFit/>
+          </a:bodyPr>
+          <a:lstStyle/>
+          <a:p>
+            <a:pPr algn="l"/>
+            <a:r>
+              <a:rPr sz="1400" b="1">
+                <a:solidFill>
+                  <a:srgbClr val="E10600"/>
+                </a:solidFill>
+                <a:latin typeface="Calibri"/>
+              </a:rPr>
+              <a:t>COMPLICATION</a:t>
+            </a:r>
+          </a:p>
+        </p:txBody>
+      </p:sp>
+      <p:sp>
+        <p:nvSpPr>
+          <p:cNvPr id="7" name="TextBox 6"/>
+          <p:cNvSpPr txBox="1"/>
+          <p:nvPr/>
+        </p:nvSpPr>
+        <p:spPr>
+          <a:xfrm>
+            <a:off x="502920" y="685800"/>
+            <a:ext cx="10972800" cy="1371600"/>
+          </a:xfrm>
+          <a:prstGeom prst="rect">
+            <a:avLst/>
+          </a:prstGeom>
+          <a:noFill/>
+        </p:spPr>
+        <p:txBody>
+          <a:bodyPr wrap="square">
+            <a:spAutoFit/>
+          </a:bodyPr>
+          <a:lstStyle/>
+          <a:p>
+            <a:pPr algn="l"/>
+            <a:r>
+              <a:rPr sz="3200" b="1">
+                <a:solidFill>
+                  <a:srgbClr val="1C1B1A"/>
+                </a:solidFill>
+                <a:latin typeface="Calibri"/>
+              </a:rPr>
+              <a:t>A failed delivery becomes an exception
+nobody closes with the customer.</a:t>
+            </a:r>
+          </a:p>
+        </p:txBody>
+      </p:sp>
+      <p:sp>
+        <p:nvSpPr>
+          <p:cNvPr id="8" name="TextBox 7"/>
+          <p:cNvSpPr txBox="1"/>
+          <p:nvPr/>
+        </p:nvSpPr>
+        <p:spPr>
+          <a:xfrm>
+            <a:off x="502920" y="2468880"/>
+            <a:ext cx="2926080" cy="731520"/>
+          </a:xfrm>
+          <a:prstGeom prst="rect">
+            <a:avLst/>
+          </a:prstGeom>
+          <a:noFill/>
+        </p:spPr>
+        <p:txBody>
+          <a:bodyPr wrap="square">
+            <a:spAutoFit/>
+          </a:bodyPr>
+          <a:lstStyle/>
+          <a:p>
+            <a:pPr algn="l"/>
+            <a:r>
+              <a:rPr sz="2200" b="1">
+                <a:solidFill>
+                  <a:srgbClr val="E10600"/>
+                </a:solidFill>
+                <a:latin typeface="Calibri"/>
+              </a:rPr>
+              <a:t>The customer</a:t>
+            </a:r>
+          </a:p>
+        </p:txBody>
+      </p:sp>
+      <p:sp>
+        <p:nvSpPr>
+          <p:cNvPr id="9" name="TextBox 8"/>
+          <p:cNvSpPr txBox="1"/>
+          <p:nvPr/>
+        </p:nvSpPr>
+        <p:spPr>
+          <a:xfrm>
+            <a:off x="3474720" y="2468880"/>
+            <a:ext cx="7863840" cy="822960"/>
+          </a:xfrm>
+          <a:prstGeom prst="rect">
+            <a:avLst/>
+          </a:prstGeom>
+          <a:noFill/>
+        </p:spPr>
+        <p:txBody>
+          <a:bodyPr wrap="square">
+            <a:spAutoFit/>
+          </a:bodyPr>
+          <a:lstStyle/>
+          <a:p>
+            <a:pPr algn="l"/>
+            <a:r>
+              <a:rPr sz="2200" b="0">
+                <a:solidFill>
+                  <a:srgbClr val="1C1B1A"/>
+                </a:solidFill>
+                <a:latin typeface="Calibri"/>
+              </a:rPr>
+              <a:t>Cannot tell a delay from a failed attempt, or choose the next step.</a:t>
+            </a:r>
+          </a:p>
+        </p:txBody>
+      </p:sp>
+      <p:sp>
+        <p:nvSpPr>
+          <p:cNvPr id="10" name="TextBox 9"/>
+          <p:cNvSpPr txBox="1"/>
+          <p:nvPr/>
+        </p:nvSpPr>
+        <p:spPr>
+          <a:xfrm>
+            <a:off x="502920" y="3611880"/>
+            <a:ext cx="2926080" cy="731520"/>
+          </a:xfrm>
+          <a:prstGeom prst="rect">
+            <a:avLst/>
+          </a:prstGeom>
+          <a:noFill/>
+        </p:spPr>
+        <p:txBody>
+          <a:bodyPr wrap="square">
+            <a:spAutoFit/>
+          </a:bodyPr>
+          <a:lstStyle/>
+          <a:p>
+            <a:pPr algn="l"/>
+            <a:r>
+              <a:rPr sz="2200" b="1">
+                <a:solidFill>
+                  <a:srgbClr val="E10600"/>
+                </a:solidFill>
+                <a:latin typeface="Calibri"/>
+              </a:rPr>
+              <a:t>The order</a:t>
+            </a:r>
+          </a:p>
+        </p:txBody>
+      </p:sp>
+      <p:sp>
+        <p:nvSpPr>
+          <p:cNvPr id="11" name="TextBox 10"/>
+          <p:cNvSpPr txBox="1"/>
+          <p:nvPr/>
+        </p:nvSpPr>
+        <p:spPr>
+          <a:xfrm>
+            <a:off x="3474720" y="3611880"/>
+            <a:ext cx="7863840" cy="822960"/>
+          </a:xfrm>
+          <a:prstGeom prst="rect">
+            <a:avLst/>
+          </a:prstGeom>
+          <a:noFill/>
+        </p:spPr>
+        <p:txBody>
+          <a:bodyPr wrap="square">
+            <a:spAutoFit/>
+          </a:bodyPr>
+          <a:lstStyle/>
+          <a:p>
+            <a:pPr algn="l"/>
+            <a:r>
+              <a:rPr sz="2200" b="0">
+                <a:solidFill>
+                  <a:srgbClr val="1C1B1A"/>
+                </a:solidFill>
+                <a:latin typeface="Calibri"/>
+              </a:rPr>
+              <a:t>Waits. A redelivery, a collection, a replacement or a refund are separate queues.</a:t>
+            </a:r>
+          </a:p>
+        </p:txBody>
+      </p:sp>
+      <p:sp>
+        <p:nvSpPr>
+          <p:cNvPr id="12" name="TextBox 11"/>
+          <p:cNvSpPr txBox="1"/>
+          <p:nvPr/>
+        </p:nvSpPr>
+        <p:spPr>
+          <a:xfrm>
+            <a:off x="502920" y="4754880"/>
+            <a:ext cx="2926080" cy="731520"/>
+          </a:xfrm>
+          <a:prstGeom prst="rect">
+            <a:avLst/>
+          </a:prstGeom>
+          <a:noFill/>
+        </p:spPr>
+        <p:txBody>
+          <a:bodyPr wrap="square">
+            <a:spAutoFit/>
+          </a:bodyPr>
+          <a:lstStyle/>
+          <a:p>
+            <a:pPr algn="l"/>
+            <a:r>
+              <a:rPr sz="2200" b="1">
+                <a:solidFill>
+                  <a:srgbClr val="E10600"/>
+                </a:solidFill>
+                <a:latin typeface="Calibri"/>
+              </a:rPr>
+              <a:t>The result</a:t>
+            </a:r>
+          </a:p>
+        </p:txBody>
+      </p:sp>
+      <p:sp>
+        <p:nvSpPr>
+          <p:cNvPr id="13" name="TextBox 12"/>
+          <p:cNvSpPr txBox="1"/>
+          <p:nvPr/>
+        </p:nvSpPr>
+        <p:spPr>
+          <a:xfrm>
+            <a:off x="3474720" y="4754880"/>
+            <a:ext cx="7863840" cy="822960"/>
+          </a:xfrm>
+          <a:prstGeom prst="rect">
+            <a:avLst/>
+          </a:prstGeom>
+          <a:noFill/>
+        </p:spPr>
+        <p:txBody>
+          <a:bodyPr wrap="square">
+            <a:spAutoFit/>
+          </a:bodyPr>
+          <a:lstStyle/>
+          <a:p>
+            <a:pPr algn="l"/>
+            <a:r>
+              <a:rPr sz="2200" b="0">
+                <a:solidFill>
+                  <a:srgbClr val="1C1B1A"/>
+                </a:solidFill>
+                <a:latin typeface="Calibri"/>
+              </a:rPr>
+              <a:t>Service slips, and a completed order — the outcome the programme protects — is lost.</a:t>
+            </a:r>
+          </a:p>
+        </p:txBody>
+      </p:sp>
+    </p:spTree>
+  </p:cSld>
+  <p:clrMapOvr>
+    <a:masterClrMapping/>
+  </p:clrMapOvr>
+</p:sld>
+</file>
+
+<file path=ppt/slides/slide4.xml><?xml version="1.0" encoding="utf-8"?>
+<p:sld xmlns:a="http://schemas.openxmlformats.org/drawingml/2006/main" xmlns:p="http://schemas.openxmlformats.org/presentationml/2006/main" xmlns:r="http://schemas.openxmlformats.org/officeDocument/2006/relationships">
+  <p:cSld>
+    <p:spTree>
+      <p:nvGrpSpPr>
+        <p:cNvPr id="1" name=""/>
+        <p:cNvGrpSpPr/>
+        <p:nvPr/>
+      </p:nvGrpSpPr>
+      <p:grpSpPr/>
+      <p:sp>
+        <p:nvSpPr>
+          <p:cNvPr id="2" name="Rectangle 1"/>
+          <p:cNvSpPr/>
+          <p:nvPr/>
+        </p:nvSpPr>
+        <p:spPr>
+          <a:xfrm>
+            <a:off x="0" y="0"/>
+            <a:ext cx="12191695" cy="6858000"/>
+          </a:xfrm>
+          <a:prstGeom prst="rect">
+            <a:avLst/>
+          </a:prstGeom>
+          <a:solidFill>
+            <a:srgbClr val="FFFFFF"/>
+          </a:solidFill>
+          <a:ln>
+            <a:noFill/>
+          </a:ln>
+        </p:spPr>
+        <p:style>
+          <a:lnRef idx="1">
+            <a:schemeClr val="accent1"/>
+          </a:lnRef>
+          <a:fillRef idx="3">
+            <a:schemeClr val="accent1"/>
+          </a:fillRef>
+          <a:effectRef idx="2">
+            <a:schemeClr val="accent1"/>
+          </a:effectRef>
+          <a:fontRef idx="minor">
+            <a:schemeClr val="lt1"/>
+          </a:fontRef>
+        </p:style>
+        <p:txBody>
+          <a:bodyPr rtlCol="0" anchor="ctr"/>
+          <a:lstStyle/>
+          <a:p>
+            <a:pPr algn="ctr"/>
+          </a:p>
+        </p:txBody>
+      </p:sp>
+      <p:sp>
+        <p:nvSpPr>
+          <p:cNvPr id="3" name="Rectangle 2"/>
+          <p:cNvSpPr/>
+          <p:nvPr/>
+        </p:nvSpPr>
+        <p:spPr>
+          <a:xfrm>
+            <a:off x="0" y="0"/>
+            <a:ext cx="12191695" cy="73152"/>
+          </a:xfrm>
+          <a:prstGeom prst="rect">
+            <a:avLst/>
+          </a:prstGeom>
+          <a:solidFill>
+            <a:srgbClr val="E10600"/>
+          </a:solidFill>
+          <a:ln>
+            <a:noFill/>
+          </a:ln>
+        </p:spPr>
+        <p:style>
+          <a:lnRef idx="1">
+            <a:schemeClr val="accent1"/>
+          </a:lnRef>
+          <a:fillRef idx="3">
+            <a:schemeClr val="accent1"/>
+          </a:fillRef>
+          <a:effectRef idx="2">
+            <a:schemeClr val="accent1"/>
+          </a:effectRef>
+          <a:fontRef idx="minor">
+            <a:schemeClr val="lt1"/>
+          </a:fontRef>
+        </p:style>
+        <p:txBody>
+          <a:bodyPr rtlCol="0" anchor="ctr"/>
+          <a:lstStyle/>
+          <a:p>
+            <a:pPr algn="ctr"/>
+          </a:p>
+        </p:txBody>
+      </p:sp>
+      <p:sp>
+        <p:nvSpPr>
+          <p:cNvPr id="4" name="TextBox 3"/>
+          <p:cNvSpPr txBox="1"/>
+          <p:nvPr/>
+        </p:nvSpPr>
+        <p:spPr>
+          <a:xfrm>
+            <a:off x="502920" y="6510528"/>
+            <a:ext cx="7315200" cy="256032"/>
+          </a:xfrm>
+          <a:prstGeom prst="rect">
+            <a:avLst/>
+          </a:prstGeom>
+          <a:noFill/>
+        </p:spPr>
+        <p:txBody>
+          <a:bodyPr wrap="square">
+            <a:spAutoFit/>
+          </a:bodyPr>
+          <a:lstStyle/>
+          <a:p>
+            <a:pPr algn="l"/>
+            <a:r>
+              <a:rPr sz="1200" b="0">
+                <a:solidFill>
+                  <a:srgbClr val="5E5A55"/>
+                </a:solidFill>
+                <a:latin typeface="Calibri"/>
+              </a:rPr>
+              <a:t>Kmart Delivery Assist  ·  Managing Director</a:t>
+            </a:r>
+          </a:p>
+        </p:txBody>
+      </p:sp>
+      <p:sp>
+        <p:nvSpPr>
+          <p:cNvPr id="5" name="TextBox 4"/>
+          <p:cNvSpPr txBox="1"/>
+          <p:nvPr/>
+        </p:nvSpPr>
+        <p:spPr>
+          <a:xfrm>
+            <a:off x="9509760" y="6510528"/>
+            <a:ext cx="2194560" cy="256032"/>
+          </a:xfrm>
+          <a:prstGeom prst="rect">
+            <a:avLst/>
+          </a:prstGeom>
+          <a:noFill/>
+        </p:spPr>
+        <p:txBody>
+          <a:bodyPr wrap="square">
+            <a:spAutoFit/>
+          </a:bodyPr>
+          <a:lstStyle/>
+          <a:p>
+            <a:pPr algn="r"/>
+            <a:r>
+              <a:rPr sz="1200" b="0">
+                <a:solidFill>
+                  <a:srgbClr val="5E5A55"/>
+                </a:solidFill>
+                <a:latin typeface="Calibri"/>
+              </a:rPr>
+              <a:t>4  /  10</a:t>
+            </a:r>
+          </a:p>
+        </p:txBody>
+      </p:sp>
+      <p:sp>
+        <p:nvSpPr>
+          <p:cNvPr id="6" name="TextBox 5"/>
+          <p:cNvSpPr txBox="1"/>
+          <p:nvPr/>
+        </p:nvSpPr>
+        <p:spPr>
+          <a:xfrm>
+            <a:off x="502920" y="320040"/>
+            <a:ext cx="3657600" cy="274320"/>
+          </a:xfrm>
+          <a:prstGeom prst="rect">
+            <a:avLst/>
+          </a:prstGeom>
+          <a:noFill/>
+        </p:spPr>
+        <p:txBody>
+          <a:bodyPr wrap="square">
+            <a:spAutoFit/>
+          </a:bodyPr>
+          <a:lstStyle/>
+          <a:p>
+            <a:pPr algn="l"/>
+            <a:r>
+              <a:rPr sz="1400" b="1">
+                <a:solidFill>
+                  <a:srgbClr val="E10600"/>
+                </a:solidFill>
+                <a:latin typeface="Calibri"/>
+              </a:rPr>
+              <a:t>RESOLUTION</a:t>
+            </a:r>
+          </a:p>
+        </p:txBody>
+      </p:sp>
+      <p:sp>
+        <p:nvSpPr>
+          <p:cNvPr id="7" name="TextBox 6"/>
+          <p:cNvSpPr txBox="1"/>
+          <p:nvPr/>
+        </p:nvSpPr>
+        <p:spPr>
+          <a:xfrm>
+            <a:off x="502920" y="640080"/>
+            <a:ext cx="10972800" cy="914400"/>
+          </a:xfrm>
+          <a:prstGeom prst="rect">
+            <a:avLst/>
+          </a:prstGeom>
+          <a:noFill/>
+        </p:spPr>
+        <p:txBody>
+          <a:bodyPr wrap="square">
+            <a:spAutoFit/>
+          </a:bodyPr>
+          <a:lstStyle/>
+          <a:p>
+            <a:pPr algn="l"/>
+            <a:r>
+              <a:rPr sz="3200" b="1">
+                <a:solidFill>
+                  <a:srgbClr val="1C1B1A"/>
+                </a:solidFill>
+                <a:latin typeface="Calibri"/>
+              </a:rPr>
+              <a:t>One Kmart journey. One service request.</a:t>
+            </a:r>
+          </a:p>
+        </p:txBody>
+      </p:sp>
+      <p:sp>
+        <p:nvSpPr>
+          <p:cNvPr id="8" name="Rectangle 7"/>
+          <p:cNvSpPr/>
+          <p:nvPr/>
+        </p:nvSpPr>
+        <p:spPr>
+          <a:xfrm>
+            <a:off x="457200" y="2286000"/>
+            <a:ext cx="1783080" cy="2286000"/>
+          </a:xfrm>
+          <a:prstGeom prst="rect">
+            <a:avLst/>
+          </a:prstGeom>
+          <a:solidFill>
+            <a:srgbClr val="E10600"/>
+          </a:solidFill>
+          <a:ln>
+            <a:noFill/>
+          </a:ln>
+        </p:spPr>
+        <p:style>
+          <a:lnRef idx="1">
+            <a:schemeClr val="accent1"/>
+          </a:lnRef>
+          <a:fillRef idx="3">
+            <a:schemeClr val="accent1"/>
+          </a:fillRef>
+          <a:effectRef idx="2">
+            <a:schemeClr val="accent1"/>
+          </a:effectRef>
+          <a:fontRef idx="minor">
+            <a:schemeClr val="lt1"/>
+          </a:fontRef>
+        </p:style>
+        <p:txBody>
+          <a:bodyPr rtlCol="0" anchor="ctr"/>
+          <a:lstStyle/>
+          <a:p>
+            <a:pPr algn="ctr"/>
+          </a:p>
+        </p:txBody>
+      </p:sp>
+      <p:sp>
+        <p:nvSpPr>
+          <p:cNvPr id="9" name="TextBox 8"/>
+          <p:cNvSpPr txBox="1"/>
+          <p:nvPr/>
+        </p:nvSpPr>
+        <p:spPr>
+          <a:xfrm>
+            <a:off x="566928" y="2423160"/>
+            <a:ext cx="1554480" cy="365760"/>
+          </a:xfrm>
+          <a:prstGeom prst="rect">
+            <a:avLst/>
+          </a:prstGeom>
+          <a:noFill/>
+        </p:spPr>
+        <p:txBody>
+          <a:bodyPr wrap="square">
+            <a:spAutoFit/>
+          </a:bodyPr>
+          <a:lstStyle/>
+          <a:p>
+            <a:pPr algn="l"/>
+            <a:r>
+              <a:rPr sz="1400" b="1">
+                <a:solidFill>
+                  <a:srgbClr val="FFFFFF"/>
+                </a:solidFill>
+                <a:latin typeface="Calibri"/>
+              </a:rPr>
+              <a:t>01</a:t>
+            </a:r>
+          </a:p>
+        </p:txBody>
+      </p:sp>
+      <p:sp>
+        <p:nvSpPr>
+          <p:cNvPr id="10" name="TextBox 9"/>
+          <p:cNvSpPr txBox="1"/>
+          <p:nvPr/>
+        </p:nvSpPr>
+        <p:spPr>
+          <a:xfrm>
+            <a:off x="566928" y="2880360"/>
+            <a:ext cx="1554480" cy="1371600"/>
+          </a:xfrm>
+          <a:prstGeom prst="rect">
+            <a:avLst/>
+          </a:prstGeom>
+          <a:noFill/>
+        </p:spPr>
+        <p:txBody>
+          <a:bodyPr wrap="square">
+            <a:spAutoFit/>
+          </a:bodyPr>
+          <a:lstStyle/>
+          <a:p>
+            <a:pPr algn="l"/>
+            <a:r>
+              <a:rPr sz="1600" b="1">
+                <a:solidFill>
+                  <a:srgbClr val="FFFFFF"/>
+                </a:solidFill>
+                <a:latin typeface="Calibri"/>
+              </a:rPr>
+              <a:t>Track my
+order</a:t>
+            </a:r>
+          </a:p>
+        </p:txBody>
+      </p:sp>
+      <p:sp>
+        <p:nvSpPr>
+          <p:cNvPr id="11" name="Rectangle 10"/>
+          <p:cNvSpPr/>
+          <p:nvPr/>
+        </p:nvSpPr>
+        <p:spPr>
+          <a:xfrm>
+            <a:off x="2395728" y="2286000"/>
+            <a:ext cx="1783080" cy="2286000"/>
+          </a:xfrm>
+          <a:prstGeom prst="rect">
+            <a:avLst/>
+          </a:prstGeom>
+          <a:solidFill>
+            <a:srgbClr val="F6F3EF"/>
+          </a:solidFill>
+          <a:ln>
+            <a:noFill/>
+          </a:ln>
+        </p:spPr>
+        <p:style>
+          <a:lnRef idx="1">
+            <a:schemeClr val="accent1"/>
+          </a:lnRef>
+          <a:fillRef idx="3">
+            <a:schemeClr val="accent1"/>
+          </a:fillRef>
+          <a:effectRef idx="2">
+            <a:schemeClr val="accent1"/>
+          </a:effectRef>
+          <a:fontRef idx="minor">
+            <a:schemeClr val="lt1"/>
+          </a:fontRef>
+        </p:style>
+        <p:txBody>
+          <a:bodyPr rtlCol="0" anchor="ctr"/>
+          <a:lstStyle/>
+          <a:p>
+            <a:pPr algn="ctr"/>
+          </a:p>
+        </p:txBody>
+      </p:sp>
+      <p:sp>
+        <p:nvSpPr>
+          <p:cNvPr id="12" name="TextBox 11"/>
+          <p:cNvSpPr txBox="1"/>
+          <p:nvPr/>
+        </p:nvSpPr>
+        <p:spPr>
+          <a:xfrm>
+            <a:off x="2505456" y="2423160"/>
+            <a:ext cx="1554480" cy="365760"/>
+          </a:xfrm>
+          <a:prstGeom prst="rect">
+            <a:avLst/>
+          </a:prstGeom>
+          <a:noFill/>
+        </p:spPr>
+        <p:txBody>
+          <a:bodyPr wrap="square">
+            <a:spAutoFit/>
+          </a:bodyPr>
+          <a:lstStyle/>
+          <a:p>
+            <a:pPr algn="l"/>
+            <a:r>
+              <a:rPr sz="1400" b="1">
+                <a:solidFill>
+                  <a:srgbClr val="E10600"/>
+                </a:solidFill>
+                <a:latin typeface="Calibri"/>
+              </a:rPr>
+              <a:t>02</a:t>
+            </a:r>
+          </a:p>
+        </p:txBody>
+      </p:sp>
+      <p:sp>
+        <p:nvSpPr>
+          <p:cNvPr id="13" name="TextBox 12"/>
+          <p:cNvSpPr txBox="1"/>
+          <p:nvPr/>
+        </p:nvSpPr>
+        <p:spPr>
+          <a:xfrm>
+            <a:off x="2505456" y="2880360"/>
+            <a:ext cx="1554480" cy="1371600"/>
+          </a:xfrm>
+          <a:prstGeom prst="rect">
+            <a:avLst/>
+          </a:prstGeom>
+          <a:noFill/>
+        </p:spPr>
+        <p:txBody>
+          <a:bodyPr wrap="square">
+            <a:spAutoFit/>
+          </a:bodyPr>
+          <a:lstStyle/>
+          <a:p>
+            <a:pPr algn="l"/>
+            <a:r>
+              <a:rPr sz="1600" b="1">
+                <a:solidFill>
+                  <a:srgbClr val="1C1B1A"/>
+                </a:solidFill>
+                <a:latin typeface="Calibri"/>
+              </a:rPr>
+              <a:t>Understand
+what is happening</a:t>
+            </a:r>
+          </a:p>
+        </p:txBody>
+      </p:sp>
+      <p:sp>
+        <p:nvSpPr>
+          <p:cNvPr id="14" name="Rectangle 13"/>
+          <p:cNvSpPr/>
+          <p:nvPr/>
+        </p:nvSpPr>
+        <p:spPr>
+          <a:xfrm>
+            <a:off x="4334256" y="2286000"/>
+            <a:ext cx="1783080" cy="2286000"/>
+          </a:xfrm>
+          <a:prstGeom prst="rect">
+            <a:avLst/>
+          </a:prstGeom>
+          <a:solidFill>
+            <a:srgbClr val="F6F3EF"/>
+          </a:solidFill>
+          <a:ln>
+            <a:noFill/>
+          </a:ln>
+        </p:spPr>
+        <p:style>
+          <a:lnRef idx="1">
+            <a:schemeClr val="accent1"/>
+          </a:lnRef>
+          <a:fillRef idx="3">
+            <a:schemeClr val="accent1"/>
+          </a:fillRef>
+          <a:effectRef idx="2">
+            <a:schemeClr val="accent1"/>
+          </a:effectRef>
+          <a:fontRef idx="minor">
+            <a:schemeClr val="lt1"/>
+          </a:fontRef>
+        </p:style>
+        <p:txBody>
+          <a:bodyPr rtlCol="0" anchor="ctr"/>
+          <a:lstStyle/>
+          <a:p>
+            <a:pPr algn="ctr"/>
+          </a:p>
+        </p:txBody>
+      </p:sp>
+      <p:sp>
+        <p:nvSpPr>
+          <p:cNvPr id="15" name="TextBox 14"/>
+          <p:cNvSpPr txBox="1"/>
+          <p:nvPr/>
+        </p:nvSpPr>
+        <p:spPr>
+          <a:xfrm>
+            <a:off x="4443984" y="2423160"/>
+            <a:ext cx="1554480" cy="365760"/>
+          </a:xfrm>
+          <a:prstGeom prst="rect">
+            <a:avLst/>
+          </a:prstGeom>
+          <a:noFill/>
+        </p:spPr>
+        <p:txBody>
+          <a:bodyPr wrap="square">
+            <a:spAutoFit/>
+          </a:bodyPr>
+          <a:lstStyle/>
+          <a:p>
+            <a:pPr algn="l"/>
+            <a:r>
+              <a:rPr sz="1400" b="1">
+                <a:solidFill>
+                  <a:srgbClr val="E10600"/>
+                </a:solidFill>
+                <a:latin typeface="Calibri"/>
+              </a:rPr>
+              <a:t>03</a:t>
+            </a:r>
+          </a:p>
+        </p:txBody>
+      </p:sp>
+      <p:sp>
+        <p:nvSpPr>
+          <p:cNvPr id="16" name="TextBox 15"/>
+          <p:cNvSpPr txBox="1"/>
+          <p:nvPr/>
+        </p:nvSpPr>
+        <p:spPr>
+          <a:xfrm>
+            <a:off x="4443984" y="2880360"/>
+            <a:ext cx="1554480" cy="1371600"/>
+          </a:xfrm>
+          <a:prstGeom prst="rect">
+            <a:avLst/>
+          </a:prstGeom>
+          <a:noFill/>
+        </p:spPr>
+        <p:txBody>
+          <a:bodyPr wrap="square">
+            <a:spAutoFit/>
+          </a:bodyPr>
+          <a:lstStyle/>
+          <a:p>
+            <a:pPr algn="l"/>
+            <a:r>
+              <a:rPr sz="1600" b="1">
+                <a:solidFill>
+                  <a:srgbClr val="1C1B1A"/>
+                </a:solidFill>
+                <a:latin typeface="Calibri"/>
+              </a:rPr>
+              <a:t>Identify the
+problem</a:t>
+            </a:r>
+          </a:p>
+        </p:txBody>
+      </p:sp>
+      <p:sp>
+        <p:nvSpPr>
+          <p:cNvPr id="17" name="Rectangle 16"/>
+          <p:cNvSpPr/>
+          <p:nvPr/>
+        </p:nvSpPr>
+        <p:spPr>
+          <a:xfrm>
+            <a:off x="6272784" y="2286000"/>
+            <a:ext cx="1783080" cy="2286000"/>
+          </a:xfrm>
+          <a:prstGeom prst="rect">
+            <a:avLst/>
+          </a:prstGeom>
+          <a:solidFill>
+            <a:srgbClr val="F6F3EF"/>
+          </a:solidFill>
+          <a:ln>
+            <a:noFill/>
+          </a:ln>
+        </p:spPr>
+        <p:style>
+          <a:lnRef idx="1">
+            <a:schemeClr val="accent1"/>
+          </a:lnRef>
+          <a:fillRef idx="3">
+            <a:schemeClr val="accent1"/>
+          </a:fillRef>
+          <a:effectRef idx="2">
+            <a:schemeClr val="accent1"/>
+          </a:effectRef>
+          <a:fontRef idx="minor">
+            <a:schemeClr val="lt1"/>
+          </a:fontRef>
+        </p:style>
+        <p:txBody>
+          <a:bodyPr rtlCol="0" anchor="ctr"/>
+          <a:lstStyle/>
+          <a:p>
+            <a:pPr algn="ctr"/>
+          </a:p>
+        </p:txBody>
+      </p:sp>
+      <p:sp>
+        <p:nvSpPr>
+          <p:cNvPr id="18" name="TextBox 17"/>
+          <p:cNvSpPr txBox="1"/>
+          <p:nvPr/>
+        </p:nvSpPr>
+        <p:spPr>
+          <a:xfrm>
+            <a:off x="6382512" y="2423160"/>
+            <a:ext cx="1554480" cy="365760"/>
+          </a:xfrm>
+          <a:prstGeom prst="rect">
+            <a:avLst/>
+          </a:prstGeom>
+          <a:noFill/>
+        </p:spPr>
+        <p:txBody>
+          <a:bodyPr wrap="square">
+            <a:spAutoFit/>
+          </a:bodyPr>
+          <a:lstStyle/>
+          <a:p>
+            <a:pPr algn="l"/>
+            <a:r>
+              <a:rPr sz="1400" b="1">
+                <a:solidFill>
+                  <a:srgbClr val="E10600"/>
+                </a:solidFill>
+                <a:latin typeface="Calibri"/>
+              </a:rPr>
+              <a:t>04</a:t>
+            </a:r>
+          </a:p>
+        </p:txBody>
+      </p:sp>
+      <p:sp>
+        <p:nvSpPr>
+          <p:cNvPr id="19" name="TextBox 18"/>
+          <p:cNvSpPr txBox="1"/>
+          <p:nvPr/>
+        </p:nvSpPr>
+        <p:spPr>
+          <a:xfrm>
+            <a:off x="6382512" y="2880360"/>
+            <a:ext cx="1554480" cy="1371600"/>
+          </a:xfrm>
+          <a:prstGeom prst="rect">
+            <a:avLst/>
+          </a:prstGeom>
+          <a:noFill/>
+        </p:spPr>
+        <p:txBody>
+          <a:bodyPr wrap="square">
+            <a:spAutoFit/>
+          </a:bodyPr>
+          <a:lstStyle/>
+          <a:p>
+            <a:pPr algn="l"/>
+            <a:r>
+              <a:rPr sz="1600" b="1">
+                <a:solidFill>
+                  <a:srgbClr val="1C1B1A"/>
+                </a:solidFill>
+                <a:latin typeface="Calibri"/>
+              </a:rPr>
+              <a:t>Choose
+what to do</a:t>
+            </a:r>
+          </a:p>
+        </p:txBody>
+      </p:sp>
+      <p:sp>
+        <p:nvSpPr>
+          <p:cNvPr id="20" name="Rectangle 19"/>
+          <p:cNvSpPr/>
+          <p:nvPr/>
+        </p:nvSpPr>
+        <p:spPr>
+          <a:xfrm>
+            <a:off x="8211312" y="2286000"/>
+            <a:ext cx="1783080" cy="2286000"/>
+          </a:xfrm>
+          <a:prstGeom prst="rect">
+            <a:avLst/>
+          </a:prstGeom>
+          <a:solidFill>
+            <a:srgbClr val="F6F3EF"/>
+          </a:solidFill>
+          <a:ln>
+            <a:noFill/>
+          </a:ln>
+        </p:spPr>
+        <p:style>
+          <a:lnRef idx="1">
+            <a:schemeClr val="accent1"/>
+          </a:lnRef>
+          <a:fillRef idx="3">
+            <a:schemeClr val="accent1"/>
+          </a:fillRef>
+          <a:effectRef idx="2">
+            <a:schemeClr val="accent1"/>
+          </a:effectRef>
+          <a:fontRef idx="minor">
+            <a:schemeClr val="lt1"/>
+          </a:fontRef>
+        </p:style>
+        <p:txBody>
+          <a:bodyPr rtlCol="0" anchor="ctr"/>
+          <a:lstStyle/>
+          <a:p>
+            <a:pPr algn="ctr"/>
+          </a:p>
+        </p:txBody>
+      </p:sp>
+      <p:sp>
+        <p:nvSpPr>
+          <p:cNvPr id="21" name="TextBox 20"/>
+          <p:cNvSpPr txBox="1"/>
+          <p:nvPr/>
+        </p:nvSpPr>
+        <p:spPr>
+          <a:xfrm>
+            <a:off x="8321040" y="2423160"/>
+            <a:ext cx="1554480" cy="365760"/>
+          </a:xfrm>
+          <a:prstGeom prst="rect">
+            <a:avLst/>
+          </a:prstGeom>
+          <a:noFill/>
+        </p:spPr>
+        <p:txBody>
+          <a:bodyPr wrap="square">
+            <a:spAutoFit/>
+          </a:bodyPr>
+          <a:lstStyle/>
+          <a:p>
+            <a:pPr algn="l"/>
+            <a:r>
+              <a:rPr sz="1400" b="1">
+                <a:solidFill>
+                  <a:srgbClr val="E10600"/>
+                </a:solidFill>
+                <a:latin typeface="Calibri"/>
+              </a:rPr>
+              <a:t>05</a:t>
+            </a:r>
+          </a:p>
+        </p:txBody>
+      </p:sp>
+      <p:sp>
+        <p:nvSpPr>
+          <p:cNvPr id="22" name="TextBox 21"/>
+          <p:cNvSpPr txBox="1"/>
+          <p:nvPr/>
+        </p:nvSpPr>
+        <p:spPr>
+          <a:xfrm>
+            <a:off x="8321040" y="2880360"/>
+            <a:ext cx="1554480" cy="1371600"/>
+          </a:xfrm>
+          <a:prstGeom prst="rect">
+            <a:avLst/>
+          </a:prstGeom>
+          <a:noFill/>
+        </p:spPr>
+        <p:txBody>
+          <a:bodyPr wrap="square">
+            <a:spAutoFit/>
+          </a:bodyPr>
+          <a:lstStyle/>
+          <a:p>
+            <a:pPr algn="l"/>
+            <a:r>
+              <a:rPr sz="1600" b="1">
+                <a:solidFill>
+                  <a:srgbClr val="1C1B1A"/>
+                </a:solidFill>
+                <a:latin typeface="Calibri"/>
+              </a:rPr>
+              <a:t>Track the
+recovery</a:t>
+            </a:r>
+          </a:p>
+        </p:txBody>
+      </p:sp>
+      <p:sp>
+        <p:nvSpPr>
+          <p:cNvPr id="23" name="Rectangle 22"/>
+          <p:cNvSpPr/>
+          <p:nvPr/>
+        </p:nvSpPr>
+        <p:spPr>
+          <a:xfrm>
+            <a:off x="10149840" y="2286000"/>
+            <a:ext cx="1783080" cy="2286000"/>
+          </a:xfrm>
+          <a:prstGeom prst="rect">
+            <a:avLst/>
+          </a:prstGeom>
+          <a:solidFill>
+            <a:srgbClr val="F6F3EF"/>
+          </a:solidFill>
+          <a:ln>
+            <a:noFill/>
+          </a:ln>
+        </p:spPr>
+        <p:style>
+          <a:lnRef idx="1">
+            <a:schemeClr val="accent1"/>
+          </a:lnRef>
+          <a:fillRef idx="3">
+            <a:schemeClr val="accent1"/>
+          </a:fillRef>
+          <a:effectRef idx="2">
+            <a:schemeClr val="accent1"/>
+          </a:effectRef>
+          <a:fontRef idx="minor">
+            <a:schemeClr val="lt1"/>
+          </a:fontRef>
+        </p:style>
+        <p:txBody>
+          <a:bodyPr rtlCol="0" anchor="ctr"/>
+          <a:lstStyle/>
+          <a:p>
+            <a:pPr algn="ctr"/>
+          </a:p>
+        </p:txBody>
+      </p:sp>
+      <p:sp>
+        <p:nvSpPr>
+          <p:cNvPr id="24" name="TextBox 23"/>
+          <p:cNvSpPr txBox="1"/>
+          <p:nvPr/>
+        </p:nvSpPr>
+        <p:spPr>
+          <a:xfrm>
+            <a:off x="10259568" y="2423160"/>
+            <a:ext cx="1554480" cy="365760"/>
+          </a:xfrm>
+          <a:prstGeom prst="rect">
+            <a:avLst/>
+          </a:prstGeom>
+          <a:noFill/>
+        </p:spPr>
+        <p:txBody>
+          <a:bodyPr wrap="square">
+            <a:spAutoFit/>
+          </a:bodyPr>
+          <a:lstStyle/>
+          <a:p>
+            <a:pPr algn="l"/>
+            <a:r>
+              <a:rPr sz="1400" b="1">
+                <a:solidFill>
+                  <a:srgbClr val="E10600"/>
+                </a:solidFill>
+                <a:latin typeface="Calibri"/>
+              </a:rPr>
+              <a:t>06</a:t>
+            </a:r>
+          </a:p>
+        </p:txBody>
+      </p:sp>
+      <p:sp>
+        <p:nvSpPr>
+          <p:cNvPr id="25" name="TextBox 24"/>
+          <p:cNvSpPr txBox="1"/>
+          <p:nvPr/>
+        </p:nvSpPr>
+        <p:spPr>
+          <a:xfrm>
+            <a:off x="10259568" y="2880360"/>
+            <a:ext cx="1554480" cy="1371600"/>
+          </a:xfrm>
+          <a:prstGeom prst="rect">
+            <a:avLst/>
+          </a:prstGeom>
+          <a:noFill/>
+        </p:spPr>
+        <p:txBody>
+          <a:bodyPr wrap="square">
+            <a:spAutoFit/>
+          </a:bodyPr>
+          <a:lstStyle/>
+          <a:p>
+            <a:pPr algn="l"/>
+            <a:r>
+              <a:rPr sz="1600" b="1">
+                <a:solidFill>
+                  <a:srgbClr val="1C1B1A"/>
+                </a:solidFill>
+                <a:latin typeface="Calibri"/>
+              </a:rPr>
+              <a:t>Complete refund
+or replacement</a:t>
+            </a:r>
+          </a:p>
+        </p:txBody>
+      </p:sp>
+      <p:sp>
+        <p:nvSpPr>
+          <p:cNvPr id="26" name="TextBox 25"/>
+          <p:cNvSpPr txBox="1"/>
+          <p:nvPr/>
+        </p:nvSpPr>
+        <p:spPr>
+          <a:xfrm>
+            <a:off x="502920" y="4937760"/>
+            <a:ext cx="10972800" cy="1097280"/>
+          </a:xfrm>
+          <a:prstGeom prst="rect">
+            <a:avLst/>
+          </a:prstGeom>
+          <a:noFill/>
+        </p:spPr>
+        <p:txBody>
+          <a:bodyPr wrap="square">
+            <a:spAutoFit/>
+          </a:bodyPr>
+          <a:lstStyle/>
+          <a:p>
+            <a:pPr algn="l"/>
+            <a:r>
+              <a:rPr sz="2000" b="0">
+                <a:solidFill>
+                  <a:srgbClr val="5E5A55"/>
+                </a:solidFill>
+                <a:latin typeface="Calibri"/>
+              </a:rPr>
+              <a:t>The customer stays in Kmart. The case is a SAP service request on the sales order.
+Demo order KM185002 — the damaged storage box.</a:t>
+            </a:r>
+          </a:p>
+        </p:txBody>
+      </p:sp>
+    </p:spTree>
+  </p:cSld>
+  <p:clrMapOvr>
+    <a:masterClrMapping/>
+  </p:clrMapOvr>
+</p:sld>
+</file>
+
+<file path=ppt/slides/slide5.xml><?xml version="1.0" encoding="utf-8"?>
+<p:sld xmlns:a="http://schemas.openxmlformats.org/drawingml/2006/main" xmlns:p="http://schemas.openxmlformats.org/presentationml/2006/main" xmlns:r="http://schemas.openxmlformats.org/officeDocument/2006/relationships">
+  <p:cSld>
+    <p:spTree>
+      <p:nvGrpSpPr>
+        <p:cNvPr id="1" name=""/>
+        <p:cNvGrpSpPr/>
+        <p:nvPr/>
+      </p:nvGrpSpPr>
+      <p:grpSpPr/>
+      <p:sp>
+        <p:nvSpPr>
+          <p:cNvPr id="2" name="Rectangle 1"/>
+          <p:cNvSpPr/>
+          <p:nvPr/>
+        </p:nvSpPr>
+        <p:spPr>
+          <a:xfrm>
+            <a:off x="0" y="0"/>
+            <a:ext cx="12191695" cy="6858000"/>
+          </a:xfrm>
+          <a:prstGeom prst="rect">
+            <a:avLst/>
+          </a:prstGeom>
+          <a:solidFill>
+            <a:srgbClr val="FFFFFF"/>
+          </a:solidFill>
+          <a:ln>
+            <a:noFill/>
+          </a:ln>
+        </p:spPr>
+        <p:style>
+          <a:lnRef idx="1">
+            <a:schemeClr val="accent1"/>
+          </a:lnRef>
+          <a:fillRef idx="3">
+            <a:schemeClr val="accent1"/>
+          </a:fillRef>
+          <a:effectRef idx="2">
+            <a:schemeClr val="accent1"/>
+          </a:effectRef>
+          <a:fontRef idx="minor">
+            <a:schemeClr val="lt1"/>
+          </a:fontRef>
+        </p:style>
+        <p:txBody>
+          <a:bodyPr rtlCol="0" anchor="ctr"/>
+          <a:lstStyle/>
+          <a:p>
+            <a:pPr algn="ctr"/>
+          </a:p>
+        </p:txBody>
+      </p:sp>
+      <p:sp>
+        <p:nvSpPr>
+          <p:cNvPr id="3" name="Rectangle 2"/>
+          <p:cNvSpPr/>
+          <p:nvPr/>
+        </p:nvSpPr>
+        <p:spPr>
+          <a:xfrm>
+            <a:off x="0" y="0"/>
+            <a:ext cx="12191695" cy="73152"/>
+          </a:xfrm>
+          <a:prstGeom prst="rect">
+            <a:avLst/>
+          </a:prstGeom>
+          <a:solidFill>
+            <a:srgbClr val="E10600"/>
+          </a:solidFill>
+          <a:ln>
+            <a:noFill/>
+          </a:ln>
+        </p:spPr>
+        <p:style>
+          <a:lnRef idx="1">
+            <a:schemeClr val="accent1"/>
+          </a:lnRef>
+          <a:fillRef idx="3">
+            <a:schemeClr val="accent1"/>
+          </a:fillRef>
+          <a:effectRef idx="2">
+            <a:schemeClr val="accent1"/>
+          </a:effectRef>
+          <a:fontRef idx="minor">
+            <a:schemeClr val="lt1"/>
+          </a:fontRef>
+        </p:style>
+        <p:txBody>
+          <a:bodyPr rtlCol="0" anchor="ctr"/>
+          <a:lstStyle/>
+          <a:p>
+            <a:pPr algn="ctr"/>
+          </a:p>
+        </p:txBody>
+      </p:sp>
+      <p:sp>
+        <p:nvSpPr>
+          <p:cNvPr id="4" name="TextBox 3"/>
+          <p:cNvSpPr txBox="1"/>
+          <p:nvPr/>
+        </p:nvSpPr>
+        <p:spPr>
+          <a:xfrm>
+            <a:off x="502920" y="6510528"/>
+            <a:ext cx="7315200" cy="256032"/>
+          </a:xfrm>
+          <a:prstGeom prst="rect">
+            <a:avLst/>
+          </a:prstGeom>
+          <a:noFill/>
+        </p:spPr>
+        <p:txBody>
+          <a:bodyPr wrap="square">
+            <a:spAutoFit/>
+          </a:bodyPr>
+          <a:lstStyle/>
+          <a:p>
+            <a:pPr algn="l"/>
+            <a:r>
+              <a:rPr sz="1200" b="0">
+                <a:solidFill>
+                  <a:srgbClr val="5E5A55"/>
+                </a:solidFill>
+                <a:latin typeface="Calibri"/>
+              </a:rPr>
+              <a:t>Kmart Delivery Assist  ·  Managing Director</a:t>
+            </a:r>
+          </a:p>
+        </p:txBody>
+      </p:sp>
+      <p:sp>
+        <p:nvSpPr>
+          <p:cNvPr id="5" name="TextBox 4"/>
+          <p:cNvSpPr txBox="1"/>
+          <p:nvPr/>
+        </p:nvSpPr>
+        <p:spPr>
+          <a:xfrm>
+            <a:off x="9509760" y="6510528"/>
+            <a:ext cx="2194560" cy="256032"/>
+          </a:xfrm>
+          <a:prstGeom prst="rect">
+            <a:avLst/>
+          </a:prstGeom>
+          <a:noFill/>
+        </p:spPr>
+        <p:txBody>
+          <a:bodyPr wrap="square">
+            <a:spAutoFit/>
+          </a:bodyPr>
+          <a:lstStyle/>
+          <a:p>
+            <a:pPr algn="r"/>
+            <a:r>
+              <a:rPr sz="1200" b="0">
+                <a:solidFill>
+                  <a:srgbClr val="5E5A55"/>
+                </a:solidFill>
+                <a:latin typeface="Calibri"/>
+              </a:rPr>
+              <a:t>5  /  10</a:t>
+            </a:r>
+          </a:p>
+        </p:txBody>
+      </p:sp>
+      <p:sp>
+        <p:nvSpPr>
+          <p:cNvPr id="6" name="TextBox 5"/>
+          <p:cNvSpPr txBox="1"/>
+          <p:nvPr/>
+        </p:nvSpPr>
+        <p:spPr>
+          <a:xfrm>
+            <a:off x="502920" y="320040"/>
+            <a:ext cx="7315200" cy="274320"/>
+          </a:xfrm>
+          <a:prstGeom prst="rect">
+            <a:avLst/>
+          </a:prstGeom>
+          <a:noFill/>
+        </p:spPr>
+        <p:txBody>
+          <a:bodyPr wrap="square">
+            <a:spAutoFit/>
+          </a:bodyPr>
+          <a:lstStyle/>
+          <a:p>
+            <a:pPr algn="l"/>
+            <a:r>
+              <a:rPr sz="1400" b="1">
+                <a:solidFill>
+                  <a:srgbClr val="E10600"/>
+                </a:solidFill>
+                <a:latin typeface="Calibri"/>
+              </a:rPr>
+              <a:t>WHY THIS SOLUTION</a:t>
+            </a:r>
+          </a:p>
+        </p:txBody>
+      </p:sp>
+      <p:sp>
+        <p:nvSpPr>
+          <p:cNvPr id="7" name="TextBox 6"/>
+          <p:cNvSpPr txBox="1"/>
+          <p:nvPr/>
+        </p:nvSpPr>
+        <p:spPr>
+          <a:xfrm>
+            <a:off x="502920" y="640080"/>
+            <a:ext cx="10972800" cy="822960"/>
+          </a:xfrm>
+          <a:prstGeom prst="rect">
+            <a:avLst/>
+          </a:prstGeom>
+          <a:noFill/>
+        </p:spPr>
+        <p:txBody>
+          <a:bodyPr wrap="square">
+            <a:spAutoFit/>
+          </a:bodyPr>
+          <a:lstStyle/>
+          <a:p>
+            <a:pPr algn="l"/>
+            <a:r>
+              <a:rPr sz="2800" b="1">
+                <a:solidFill>
+                  <a:srgbClr val="1C1B1A"/>
+                </a:solidFill>
+                <a:latin typeface="Calibri"/>
+              </a:rPr>
+              <a:t>A2 chose the data foundation first.
+This pool can run the customer recovery.</a:t>
+            </a:r>
+          </a:p>
+        </p:txBody>
+      </p:sp>
+      <p:sp>
+        <p:nvSpPr>
+          <p:cNvPr id="8" name="Rectangle 7"/>
+          <p:cNvSpPr/>
+          <p:nvPr/>
+        </p:nvSpPr>
+        <p:spPr>
+          <a:xfrm>
+            <a:off x="502920" y="1645920"/>
+            <a:ext cx="5440680" cy="2011680"/>
+          </a:xfrm>
+          <a:prstGeom prst="rect">
+            <a:avLst/>
+          </a:prstGeom>
+          <a:solidFill>
+            <a:srgbClr val="F6F3EF"/>
+          </a:solidFill>
+          <a:ln>
+            <a:noFill/>
+          </a:ln>
+        </p:spPr>
+        <p:style>
+          <a:lnRef idx="1">
+            <a:schemeClr val="accent1"/>
+          </a:lnRef>
+          <a:fillRef idx="3">
+            <a:schemeClr val="accent1"/>
+          </a:fillRef>
+          <a:effectRef idx="2">
+            <a:schemeClr val="accent1"/>
+          </a:effectRef>
+          <a:fontRef idx="minor">
+            <a:schemeClr val="lt1"/>
+          </a:fontRef>
+        </p:style>
+        <p:txBody>
+          <a:bodyPr rtlCol="0" anchor="ctr"/>
+          <a:lstStyle/>
+          <a:p>
+            <a:pPr algn="ctr"/>
+          </a:p>
+        </p:txBody>
+      </p:sp>
+      <p:sp>
+        <p:nvSpPr>
+          <p:cNvPr id="9" name="TextBox 8"/>
+          <p:cNvSpPr txBox="1"/>
+          <p:nvPr/>
+        </p:nvSpPr>
+        <p:spPr>
+          <a:xfrm>
+            <a:off x="777240" y="1828800"/>
+            <a:ext cx="4846320" cy="320040"/>
+          </a:xfrm>
+          <a:prstGeom prst="rect">
+            <a:avLst/>
+          </a:prstGeom>
+          <a:noFill/>
+        </p:spPr>
+        <p:txBody>
+          <a:bodyPr wrap="square">
+            <a:spAutoFit/>
+          </a:bodyPr>
+          <a:lstStyle/>
+          <a:p>
+            <a:pPr algn="l"/>
+            <a:r>
+              <a:rPr sz="1300" b="1">
+                <a:solidFill>
+                  <a:srgbClr val="E10600"/>
+                </a:solidFill>
+                <a:latin typeface="Calibri"/>
+              </a:rPr>
+              <a:t>A2, DO FIRST</a:t>
+            </a:r>
+          </a:p>
+        </p:txBody>
+      </p:sp>
+      <p:sp>
+        <p:nvSpPr>
+          <p:cNvPr id="10" name="TextBox 9"/>
+          <p:cNvSpPr txBox="1"/>
+          <p:nvPr/>
+        </p:nvSpPr>
+        <p:spPr>
+          <a:xfrm>
+            <a:off x="777240" y="2194560"/>
+            <a:ext cx="4846320" cy="1280160"/>
+          </a:xfrm>
+          <a:prstGeom prst="rect">
+            <a:avLst/>
+          </a:prstGeom>
+          <a:noFill/>
+        </p:spPr>
+        <p:txBody>
+          <a:bodyPr wrap="square">
+            <a:spAutoFit/>
+          </a:bodyPr>
+          <a:lstStyle/>
+          <a:p>
+            <a:pPr algn="l"/>
+            <a:r>
+              <a:rPr sz="2000" b="1">
+                <a:solidFill>
+                  <a:srgbClr val="1C1B1A"/>
+                </a:solidFill>
+                <a:latin typeface="Calibri"/>
+              </a:rPr>
+              <a:t>P2 decision data
+Weighted 4.50.
+Needs OMS, WMS, TMS and Finance.</a:t>
+            </a:r>
+          </a:p>
+        </p:txBody>
+      </p:sp>
+      <p:sp>
+        <p:nvSpPr>
+          <p:cNvPr id="11" name="Rectangle 10"/>
+          <p:cNvSpPr/>
+          <p:nvPr/>
+        </p:nvSpPr>
+        <p:spPr>
+          <a:xfrm>
+            <a:off x="6172200" y="1645920"/>
+            <a:ext cx="5440680" cy="2011680"/>
+          </a:xfrm>
+          <a:prstGeom prst="rect">
+            <a:avLst/>
+          </a:prstGeom>
+          <a:solidFill>
+            <a:srgbClr val="E10600"/>
+          </a:solidFill>
+          <a:ln>
+            <a:noFill/>
+          </a:ln>
+        </p:spPr>
+        <p:style>
+          <a:lnRef idx="1">
+            <a:schemeClr val="accent1"/>
+          </a:lnRef>
+          <a:fillRef idx="3">
+            <a:schemeClr val="accent1"/>
+          </a:fillRef>
+          <a:effectRef idx="2">
+            <a:schemeClr val="accent1"/>
+          </a:effectRef>
+          <a:fontRef idx="minor">
+            <a:schemeClr val="lt1"/>
+          </a:fontRef>
+        </p:style>
+        <p:txBody>
+          <a:bodyPr rtlCol="0" anchor="ctr"/>
+          <a:lstStyle/>
+          <a:p>
+            <a:pPr algn="ctr"/>
+          </a:p>
+        </p:txBody>
+      </p:sp>
+      <p:sp>
+        <p:nvSpPr>
+          <p:cNvPr id="12" name="TextBox 11"/>
+          <p:cNvSpPr txBox="1"/>
+          <p:nvPr/>
+        </p:nvSpPr>
+        <p:spPr>
+          <a:xfrm>
+            <a:off x="6446520" y="1828800"/>
+            <a:ext cx="4846320" cy="320040"/>
+          </a:xfrm>
+          <a:prstGeom prst="rect">
+            <a:avLst/>
+          </a:prstGeom>
+          <a:noFill/>
+        </p:spPr>
+        <p:txBody>
+          <a:bodyPr wrap="square">
+            <a:spAutoFit/>
+          </a:bodyPr>
+          <a:lstStyle/>
+          <a:p>
+            <a:pPr algn="l"/>
+            <a:r>
+              <a:rPr sz="1300" b="1">
+                <a:solidFill>
+                  <a:srgbClr val="FFFFFF"/>
+                </a:solidFill>
+                <a:latin typeface="Calibri"/>
+              </a:rPr>
+              <a:t>PROTOTYPE NOW</a:t>
+            </a:r>
+          </a:p>
+        </p:txBody>
+      </p:sp>
+      <p:sp>
+        <p:nvSpPr>
+          <p:cNvPr id="13" name="TextBox 12"/>
+          <p:cNvSpPr txBox="1"/>
+          <p:nvPr/>
+        </p:nvSpPr>
+        <p:spPr>
+          <a:xfrm>
+            <a:off x="6446520" y="2194560"/>
+            <a:ext cx="4846320" cy="1280160"/>
+          </a:xfrm>
+          <a:prstGeom prst="rect">
+            <a:avLst/>
+          </a:prstGeom>
+          <a:noFill/>
+        </p:spPr>
+        <p:txBody>
+          <a:bodyPr wrap="square">
+            <a:spAutoFit/>
+          </a:bodyPr>
+          <a:lstStyle/>
+          <a:p>
+            <a:pPr algn="l"/>
+            <a:r>
+              <a:rPr sz="2000" b="1">
+                <a:solidFill>
+                  <a:srgbClr val="FFFFFF"/>
+                </a:solidFill>
+                <a:latin typeface="Calibri"/>
+              </a:rPr>
+              <a:t>Delivery Assist
+Same exception goal.
+Sales order, delivery, freight, service request.</a:t>
+            </a:r>
+          </a:p>
+        </p:txBody>
+      </p:sp>
+      <p:sp>
+        <p:nvSpPr>
+          <p:cNvPr id="14" name="Rectangle 13"/>
+          <p:cNvSpPr/>
+          <p:nvPr/>
+        </p:nvSpPr>
+        <p:spPr>
+          <a:xfrm>
+            <a:off x="502920" y="3794760"/>
+            <a:ext cx="5440680" cy="2011680"/>
+          </a:xfrm>
+          <a:prstGeom prst="rect">
+            <a:avLst/>
+          </a:prstGeom>
+          <a:solidFill>
+            <a:srgbClr val="FFFFFF"/>
+          </a:solidFill>
+          <a:ln>
+            <a:noFill/>
+          </a:ln>
+        </p:spPr>
+        <p:style>
+          <a:lnRef idx="1">
+            <a:schemeClr val="accent1"/>
+          </a:lnRef>
+          <a:fillRef idx="3">
+            <a:schemeClr val="accent1"/>
+          </a:fillRef>
+          <a:effectRef idx="2">
+            <a:schemeClr val="accent1"/>
+          </a:effectRef>
+          <a:fontRef idx="minor">
+            <a:schemeClr val="lt1"/>
+          </a:fontRef>
+        </p:style>
+        <p:txBody>
+          <a:bodyPr rtlCol="0" anchor="ctr"/>
+          <a:lstStyle/>
+          <a:p>
+            <a:pPr algn="ctr"/>
+          </a:p>
+        </p:txBody>
+      </p:sp>
+      <p:sp>
+        <p:nvSpPr>
+          <p:cNvPr id="15" name="TextBox 14"/>
+          <p:cNvSpPr txBox="1"/>
+          <p:nvPr/>
+        </p:nvSpPr>
+        <p:spPr>
+          <a:xfrm>
+            <a:off x="777240" y="3977640"/>
+            <a:ext cx="4846320" cy="320040"/>
+          </a:xfrm>
+          <a:prstGeom prst="rect">
+            <a:avLst/>
+          </a:prstGeom>
+          <a:noFill/>
+        </p:spPr>
+        <p:txBody>
+          <a:bodyPr wrap="square">
+            <a:spAutoFit/>
+          </a:bodyPr>
+          <a:lstStyle/>
+          <a:p>
+            <a:pPr algn="l"/>
+            <a:r>
+              <a:rPr sz="1300" b="1">
+                <a:solidFill>
+                  <a:srgbClr val="E10600"/>
+                </a:solidFill>
+                <a:latin typeface="Calibri"/>
+              </a:rPr>
+              <a:t>A2, LATER</a:t>
+            </a:r>
+          </a:p>
+        </p:txBody>
+      </p:sp>
+      <p:sp>
+        <p:nvSpPr>
+          <p:cNvPr id="16" name="TextBox 15"/>
+          <p:cNvSpPr txBox="1"/>
+          <p:nvPr/>
+        </p:nvSpPr>
+        <p:spPr>
+          <a:xfrm>
+            <a:off x="777240" y="4343400"/>
+            <a:ext cx="4846320" cy="1280160"/>
+          </a:xfrm>
+          <a:prstGeom prst="rect">
+            <a:avLst/>
+          </a:prstGeom>
+          <a:noFill/>
+        </p:spPr>
+        <p:txBody>
+          <a:bodyPr wrap="square">
+            <a:spAutoFit/>
+          </a:bodyPr>
+          <a:lstStyle/>
+          <a:p>
+            <a:pPr algn="l"/>
+            <a:r>
+              <a:rPr sz="2000" b="1">
+                <a:solidFill>
+                  <a:srgbClr val="1C1B1A"/>
+                </a:solidFill>
+                <a:latin typeface="Calibri"/>
+              </a:rPr>
+              <a:t>P1 routing automation
+Weighted 4.10.
+Only after shadow evidence.</a:t>
+            </a:r>
+          </a:p>
+        </p:txBody>
+      </p:sp>
+      <p:sp>
+        <p:nvSpPr>
+          <p:cNvPr id="17" name="Rectangle 16"/>
+          <p:cNvSpPr/>
+          <p:nvPr/>
+        </p:nvSpPr>
+        <p:spPr>
+          <a:xfrm>
+            <a:off x="6172200" y="3794760"/>
+            <a:ext cx="5440680" cy="2011680"/>
+          </a:xfrm>
+          <a:prstGeom prst="rect">
+            <a:avLst/>
+          </a:prstGeom>
+          <a:solidFill>
+            <a:srgbClr val="F6F3EF"/>
+          </a:solidFill>
+          <a:ln>
+            <a:noFill/>
+          </a:ln>
+        </p:spPr>
+        <p:style>
+          <a:lnRef idx="1">
+            <a:schemeClr val="accent1"/>
+          </a:lnRef>
+          <a:fillRef idx="3">
+            <a:schemeClr val="accent1"/>
+          </a:fillRef>
+          <a:effectRef idx="2">
+            <a:schemeClr val="accent1"/>
+          </a:effectRef>
+          <a:fontRef idx="minor">
+            <a:schemeClr val="lt1"/>
+          </a:fontRef>
+        </p:style>
+        <p:txBody>
+          <a:bodyPr rtlCol="0" anchor="ctr"/>
+          <a:lstStyle/>
+          <a:p>
+            <a:pPr algn="ctr"/>
+          </a:p>
+        </p:txBody>
+      </p:sp>
+      <p:sp>
+        <p:nvSpPr>
+          <p:cNvPr id="18" name="TextBox 17"/>
+          <p:cNvSpPr txBox="1"/>
+          <p:nvPr/>
+        </p:nvSpPr>
+        <p:spPr>
+          <a:xfrm>
+            <a:off x="6446520" y="3977640"/>
+            <a:ext cx="4846320" cy="320040"/>
+          </a:xfrm>
+          <a:prstGeom prst="rect">
+            <a:avLst/>
+          </a:prstGeom>
+          <a:noFill/>
+        </p:spPr>
+        <p:txBody>
+          <a:bodyPr wrap="square">
+            <a:spAutoFit/>
+          </a:bodyPr>
+          <a:lstStyle/>
+          <a:p>
+            <a:pPr algn="l"/>
+            <a:r>
+              <a:rPr sz="1300" b="1">
+                <a:solidFill>
+                  <a:srgbClr val="E10600"/>
+                </a:solidFill>
+                <a:latin typeface="Calibri"/>
+              </a:rPr>
+              <a:t>NOT ENOUGH</a:t>
+            </a:r>
+          </a:p>
+        </p:txBody>
+      </p:sp>
+      <p:sp>
+        <p:nvSpPr>
+          <p:cNvPr id="19" name="TextBox 18"/>
+          <p:cNvSpPr txBox="1"/>
+          <p:nvPr/>
+        </p:nvSpPr>
+        <p:spPr>
+          <a:xfrm>
+            <a:off x="6446520" y="4343400"/>
+            <a:ext cx="4846320" cy="1280160"/>
+          </a:xfrm>
+          <a:prstGeom prst="rect">
+            <a:avLst/>
+          </a:prstGeom>
+          <a:noFill/>
+        </p:spPr>
+        <p:txBody>
+          <a:bodyPr wrap="square">
+            <a:spAutoFit/>
+          </a:bodyPr>
+          <a:lstStyle/>
+          <a:p>
+            <a:pPr algn="l"/>
+            <a:r>
+              <a:rPr sz="2000" b="1">
+                <a:solidFill>
+                  <a:srgbClr val="1C1B1A"/>
+                </a:solidFill>
+                <a:latin typeface="Calibri"/>
+              </a:rPr>
+              <a:t>A status page with no recovery
+Low effort, low impact.</a:t>
+            </a:r>
+          </a:p>
+        </p:txBody>
+      </p:sp>
+    </p:spTree>
+  </p:cSld>
+  <p:clrMapOvr>
+    <a:masterClrMapping/>
+  </p:clrMapOvr>
+</p:sld>
+</file>
+
+<file path=ppt/slides/slide6.xml><?xml version="1.0" encoding="utf-8"?>
+<p:sld xmlns:a="http://schemas.openxmlformats.org/drawingml/2006/main" xmlns:p="http://schemas.openxmlformats.org/presentationml/2006/main" xmlns:r="http://schemas.openxmlformats.org/officeDocument/2006/relationships">
+  <p:cSld>
+    <p:spTree>
+      <p:nvGrpSpPr>
+        <p:cNvPr id="1" name=""/>
+        <p:cNvGrpSpPr/>
+        <p:nvPr/>
+      </p:nvGrpSpPr>
+      <p:grpSpPr/>
+      <p:sp>
+        <p:nvSpPr>
+          <p:cNvPr id="2" name="Rectangle 1"/>
+          <p:cNvSpPr/>
+          <p:nvPr/>
+        </p:nvSpPr>
+        <p:spPr>
+          <a:xfrm>
+            <a:off x="0" y="0"/>
+            <a:ext cx="12191695" cy="6858000"/>
+          </a:xfrm>
+          <a:prstGeom prst="rect">
+            <a:avLst/>
+          </a:prstGeom>
+          <a:solidFill>
+            <a:srgbClr val="FFFFFF"/>
+          </a:solidFill>
+          <a:ln>
+            <a:noFill/>
+          </a:ln>
+        </p:spPr>
+        <p:style>
+          <a:lnRef idx="1">
+            <a:schemeClr val="accent1"/>
+          </a:lnRef>
+          <a:fillRef idx="3">
+            <a:schemeClr val="accent1"/>
+          </a:fillRef>
+          <a:effectRef idx="2">
+            <a:schemeClr val="accent1"/>
+          </a:effectRef>
+          <a:fontRef idx="minor">
+            <a:schemeClr val="lt1"/>
+          </a:fontRef>
+        </p:style>
+        <p:txBody>
+          <a:bodyPr rtlCol="0" anchor="ctr"/>
+          <a:lstStyle/>
+          <a:p>
+            <a:pPr algn="ctr"/>
+          </a:p>
+        </p:txBody>
+      </p:sp>
+      <p:sp>
+        <p:nvSpPr>
+          <p:cNvPr id="3" name="Rectangle 2"/>
+          <p:cNvSpPr/>
+          <p:nvPr/>
+        </p:nvSpPr>
+        <p:spPr>
+          <a:xfrm>
+            <a:off x="0" y="0"/>
+            <a:ext cx="12191695" cy="73152"/>
+          </a:xfrm>
+          <a:prstGeom prst="rect">
+            <a:avLst/>
+          </a:prstGeom>
+          <a:solidFill>
+            <a:srgbClr val="E10600"/>
+          </a:solidFill>
+          <a:ln>
+            <a:noFill/>
+          </a:ln>
+        </p:spPr>
+        <p:style>
+          <a:lnRef idx="1">
+            <a:schemeClr val="accent1"/>
+          </a:lnRef>
+          <a:fillRef idx="3">
+            <a:schemeClr val="accent1"/>
+          </a:fillRef>
+          <a:effectRef idx="2">
+            <a:schemeClr val="accent1"/>
+          </a:effectRef>
+          <a:fontRef idx="minor">
+            <a:schemeClr val="lt1"/>
+          </a:fontRef>
+        </p:style>
+        <p:txBody>
+          <a:bodyPr rtlCol="0" anchor="ctr"/>
+          <a:lstStyle/>
+          <a:p>
+            <a:pPr algn="ctr"/>
+          </a:p>
+        </p:txBody>
+      </p:sp>
+      <p:sp>
+        <p:nvSpPr>
+          <p:cNvPr id="4" name="TextBox 3"/>
+          <p:cNvSpPr txBox="1"/>
+          <p:nvPr/>
+        </p:nvSpPr>
+        <p:spPr>
+          <a:xfrm>
+            <a:off x="502920" y="6510528"/>
+            <a:ext cx="7315200" cy="256032"/>
+          </a:xfrm>
+          <a:prstGeom prst="rect">
+            <a:avLst/>
+          </a:prstGeom>
+          <a:noFill/>
+        </p:spPr>
+        <p:txBody>
+          <a:bodyPr wrap="square">
+            <a:spAutoFit/>
+          </a:bodyPr>
+          <a:lstStyle/>
+          <a:p>
+            <a:pPr algn="l"/>
+            <a:r>
+              <a:rPr sz="1200" b="0">
+                <a:solidFill>
+                  <a:srgbClr val="5E5A55"/>
+                </a:solidFill>
+                <a:latin typeface="Calibri"/>
+              </a:rPr>
+              <a:t>Kmart Delivery Assist  ·  Managing Director</a:t>
+            </a:r>
+          </a:p>
+        </p:txBody>
+      </p:sp>
+      <p:sp>
+        <p:nvSpPr>
+          <p:cNvPr id="5" name="TextBox 4"/>
+          <p:cNvSpPr txBox="1"/>
+          <p:nvPr/>
+        </p:nvSpPr>
+        <p:spPr>
+          <a:xfrm>
+            <a:off x="9509760" y="6510528"/>
+            <a:ext cx="2194560" cy="256032"/>
+          </a:xfrm>
+          <a:prstGeom prst="rect">
+            <a:avLst/>
+          </a:prstGeom>
+          <a:noFill/>
+        </p:spPr>
+        <p:txBody>
+          <a:bodyPr wrap="square">
+            <a:spAutoFit/>
+          </a:bodyPr>
+          <a:lstStyle/>
+          <a:p>
+            <a:pPr algn="r"/>
+            <a:r>
+              <a:rPr sz="1200" b="0">
+                <a:solidFill>
+                  <a:srgbClr val="5E5A55"/>
+                </a:solidFill>
+                <a:latin typeface="Calibri"/>
+              </a:rPr>
+              <a:t>6  /  10</a:t>
+            </a:r>
+          </a:p>
+        </p:txBody>
+      </p:sp>
+      <p:sp>
+        <p:nvSpPr>
+          <p:cNvPr id="6" name="TextBox 5"/>
+          <p:cNvSpPr txBox="1"/>
+          <p:nvPr/>
+        </p:nvSpPr>
+        <p:spPr>
+          <a:xfrm>
+            <a:off x="502920" y="320040"/>
+            <a:ext cx="7315200" cy="274320"/>
+          </a:xfrm>
+          <a:prstGeom prst="rect">
+            <a:avLst/>
+          </a:prstGeom>
+          <a:noFill/>
+        </p:spPr>
+        <p:txBody>
+          <a:bodyPr wrap="square">
+            <a:spAutoFit/>
+          </a:bodyPr>
+          <a:lstStyle/>
+          <a:p>
+            <a:pPr algn="l"/>
+            <a:r>
+              <a:rPr sz="1400" b="1">
+                <a:solidFill>
+                  <a:srgbClr val="E10600"/>
+                </a:solidFill>
+                <a:latin typeface="Calibri"/>
+              </a:rPr>
+              <a:t>DESIGN  ·  OPTION 3</a:t>
+            </a:r>
+          </a:p>
+        </p:txBody>
+      </p:sp>
+      <p:sp>
+        <p:nvSpPr>
+          <p:cNvPr id="7" name="TextBox 6"/>
+          <p:cNvSpPr txBox="1"/>
+          <p:nvPr/>
+        </p:nvSpPr>
+        <p:spPr>
+          <a:xfrm>
+            <a:off x="502920" y="640080"/>
+            <a:ext cx="10972800" cy="548640"/>
+          </a:xfrm>
+          <a:prstGeom prst="rect">
+            <a:avLst/>
+          </a:prstGeom>
+          <a:noFill/>
+        </p:spPr>
+        <p:txBody>
+          <a:bodyPr wrap="square">
+            <a:spAutoFit/>
+          </a:bodyPr>
+          <a:lstStyle/>
+          <a:p>
+            <a:pPr algn="l"/>
+            <a:r>
+              <a:rPr sz="2600" b="1">
+                <a:solidFill>
+                  <a:srgbClr val="1C1B1A"/>
+                </a:solidFill>
+                <a:latin typeface="Calibri"/>
+              </a:rPr>
+              <a:t>The solution changed. The new models are in the prototype.</a:t>
+            </a:r>
+          </a:p>
+        </p:txBody>
+      </p:sp>
+      <p:sp>
+        <p:nvSpPr>
+          <p:cNvPr id="8" name="TextBox 7"/>
+          <p:cNvSpPr txBox="1"/>
+          <p:nvPr/>
+        </p:nvSpPr>
+        <p:spPr>
+          <a:xfrm>
+            <a:off x="502920" y="1417320"/>
+            <a:ext cx="2103120" cy="457200"/>
+          </a:xfrm>
+          <a:prstGeom prst="rect">
+            <a:avLst/>
+          </a:prstGeom>
+          <a:noFill/>
+        </p:spPr>
+        <p:txBody>
+          <a:bodyPr wrap="square">
+            <a:spAutoFit/>
+          </a:bodyPr>
+          <a:lstStyle/>
+          <a:p>
+            <a:pPr algn="l"/>
+            <a:r>
+              <a:rPr sz="1800" b="1">
+                <a:solidFill>
+                  <a:srgbClr val="E10600"/>
+                </a:solidFill>
+                <a:latin typeface="Calibri"/>
+              </a:rPr>
+              <a:t>Empathise</a:t>
+            </a:r>
+          </a:p>
+        </p:txBody>
+      </p:sp>
+      <p:sp>
+        <p:nvSpPr>
+          <p:cNvPr id="9" name="TextBox 8"/>
+          <p:cNvSpPr txBox="1"/>
+          <p:nvPr/>
+        </p:nvSpPr>
+        <p:spPr>
+          <a:xfrm>
+            <a:off x="2651760" y="1417320"/>
+            <a:ext cx="3931920" cy="457200"/>
+          </a:xfrm>
+          <a:prstGeom prst="rect">
+            <a:avLst/>
+          </a:prstGeom>
+          <a:noFill/>
+        </p:spPr>
+        <p:txBody>
+          <a:bodyPr wrap="square">
+            <a:spAutoFit/>
+          </a:bodyPr>
+          <a:lstStyle/>
+          <a:p>
+            <a:pPr algn="l"/>
+            <a:r>
+              <a:rPr sz="1800" b="0">
+                <a:solidFill>
+                  <a:srgbClr val="1C1B1A"/>
+                </a:solidFill>
+                <a:latin typeface="Calibri"/>
+              </a:rPr>
+              <a:t>A failed delivery is a dead end.</a:t>
+            </a:r>
+          </a:p>
+        </p:txBody>
+      </p:sp>
+      <p:sp>
+        <p:nvSpPr>
+          <p:cNvPr id="10" name="TextBox 9"/>
+          <p:cNvSpPr txBox="1"/>
+          <p:nvPr/>
+        </p:nvSpPr>
+        <p:spPr>
+          <a:xfrm>
+            <a:off x="502920" y="2075688"/>
+            <a:ext cx="2103120" cy="457200"/>
+          </a:xfrm>
+          <a:prstGeom prst="rect">
+            <a:avLst/>
+          </a:prstGeom>
+          <a:noFill/>
+        </p:spPr>
+        <p:txBody>
+          <a:bodyPr wrap="square">
+            <a:spAutoFit/>
+          </a:bodyPr>
+          <a:lstStyle/>
+          <a:p>
+            <a:pPr algn="l"/>
+            <a:r>
+              <a:rPr sz="1800" b="1">
+                <a:solidFill>
+                  <a:srgbClr val="E10600"/>
+                </a:solidFill>
+                <a:latin typeface="Calibri"/>
+              </a:rPr>
+              <a:t>Define</a:t>
+            </a:r>
+          </a:p>
+        </p:txBody>
+      </p:sp>
+      <p:sp>
+        <p:nvSpPr>
+          <p:cNvPr id="11" name="TextBox 10"/>
+          <p:cNvSpPr txBox="1"/>
+          <p:nvPr/>
+        </p:nvSpPr>
+        <p:spPr>
+          <a:xfrm>
+            <a:off x="2651760" y="2075688"/>
+            <a:ext cx="3931920" cy="457200"/>
+          </a:xfrm>
+          <a:prstGeom prst="rect">
+            <a:avLst/>
+          </a:prstGeom>
+          <a:noFill/>
+        </p:spPr>
+        <p:txBody>
+          <a:bodyPr wrap="square">
+            <a:spAutoFit/>
+          </a:bodyPr>
+          <a:lstStyle/>
+          <a:p>
+            <a:pPr algn="l"/>
+            <a:r>
+              <a:rPr sz="1800" b="0">
+                <a:solidFill>
+                  <a:srgbClr val="1C1B1A"/>
+                </a:solidFill>
+                <a:latin typeface="Calibri"/>
+              </a:rPr>
+              <a:t>One job: see it, choose, finish.</a:t>
+            </a:r>
+          </a:p>
+        </p:txBody>
+      </p:sp>
+      <p:sp>
+        <p:nvSpPr>
+          <p:cNvPr id="12" name="TextBox 11"/>
+          <p:cNvSpPr txBox="1"/>
+          <p:nvPr/>
+        </p:nvSpPr>
+        <p:spPr>
+          <a:xfrm>
+            <a:off x="502920" y="2734056"/>
+            <a:ext cx="2103120" cy="457200"/>
+          </a:xfrm>
+          <a:prstGeom prst="rect">
+            <a:avLst/>
+          </a:prstGeom>
+          <a:noFill/>
+        </p:spPr>
+        <p:txBody>
+          <a:bodyPr wrap="square">
+            <a:spAutoFit/>
+          </a:bodyPr>
+          <a:lstStyle/>
+          <a:p>
+            <a:pPr algn="l"/>
+            <a:r>
+              <a:rPr sz="1800" b="1">
+                <a:solidFill>
+                  <a:srgbClr val="E10600"/>
+                </a:solidFill>
+                <a:latin typeface="Calibri"/>
+              </a:rPr>
+              <a:t>Ideate</a:t>
+            </a:r>
+          </a:p>
+        </p:txBody>
+      </p:sp>
+      <p:sp>
+        <p:nvSpPr>
+          <p:cNvPr id="13" name="TextBox 12"/>
+          <p:cNvSpPr txBox="1"/>
+          <p:nvPr/>
+        </p:nvSpPr>
+        <p:spPr>
+          <a:xfrm>
+            <a:off x="2651760" y="2734056"/>
+            <a:ext cx="3931920" cy="457200"/>
+          </a:xfrm>
+          <a:prstGeom prst="rect">
+            <a:avLst/>
+          </a:prstGeom>
+          <a:noFill/>
+        </p:spPr>
+        <p:txBody>
+          <a:bodyPr wrap="square">
+            <a:spAutoFit/>
+          </a:bodyPr>
+          <a:lstStyle/>
+          <a:p>
+            <a:pPr algn="l"/>
+            <a:r>
+              <a:rPr sz="1800" b="0">
+                <a:solidFill>
+                  <a:srgbClr val="1C1B1A"/>
+                </a:solidFill>
+                <a:latin typeface="Calibri"/>
+              </a:rPr>
+              <a:t>Picked the recovery journey.</a:t>
+            </a:r>
+          </a:p>
+        </p:txBody>
+      </p:sp>
+      <p:sp>
+        <p:nvSpPr>
+          <p:cNvPr id="14" name="TextBox 13"/>
+          <p:cNvSpPr txBox="1"/>
+          <p:nvPr/>
+        </p:nvSpPr>
+        <p:spPr>
+          <a:xfrm>
+            <a:off x="502920" y="3392424"/>
+            <a:ext cx="2103120" cy="457200"/>
+          </a:xfrm>
+          <a:prstGeom prst="rect">
+            <a:avLst/>
+          </a:prstGeom>
+          <a:noFill/>
+        </p:spPr>
+        <p:txBody>
+          <a:bodyPr wrap="square">
+            <a:spAutoFit/>
+          </a:bodyPr>
+          <a:lstStyle/>
+          <a:p>
+            <a:pPr algn="l"/>
+            <a:r>
+              <a:rPr sz="1800" b="1">
+                <a:solidFill>
+                  <a:srgbClr val="E10600"/>
+                </a:solidFill>
+                <a:latin typeface="Calibri"/>
+              </a:rPr>
+              <a:t>Prototype</a:t>
+            </a:r>
+          </a:p>
+        </p:txBody>
+      </p:sp>
+      <p:sp>
+        <p:nvSpPr>
+          <p:cNvPr id="15" name="TextBox 14"/>
+          <p:cNvSpPr txBox="1"/>
+          <p:nvPr/>
+        </p:nvSpPr>
+        <p:spPr>
+          <a:xfrm>
+            <a:off x="2651760" y="3392424"/>
+            <a:ext cx="3931920" cy="457200"/>
+          </a:xfrm>
+          <a:prstGeom prst="rect">
+            <a:avLst/>
+          </a:prstGeom>
+          <a:noFill/>
+        </p:spPr>
+        <p:txBody>
+          <a:bodyPr wrap="square">
+            <a:spAutoFit/>
+          </a:bodyPr>
+          <a:lstStyle/>
+          <a:p>
+            <a:pPr algn="l"/>
+            <a:r>
+              <a:rPr sz="1800" b="0">
+                <a:solidFill>
+                  <a:srgbClr val="1C1B1A"/>
+                </a:solidFill>
+                <a:latin typeface="Calibri"/>
+              </a:rPr>
+              <a:t>Six steps, one case.</a:t>
+            </a:r>
+          </a:p>
+        </p:txBody>
+      </p:sp>
+      <p:sp>
+        <p:nvSpPr>
+          <p:cNvPr id="16" name="TextBox 15"/>
+          <p:cNvSpPr txBox="1"/>
+          <p:nvPr/>
+        </p:nvSpPr>
+        <p:spPr>
+          <a:xfrm>
+            <a:off x="502920" y="4050791"/>
+            <a:ext cx="2103120" cy="457200"/>
+          </a:xfrm>
+          <a:prstGeom prst="rect">
+            <a:avLst/>
+          </a:prstGeom>
+          <a:noFill/>
+        </p:spPr>
+        <p:txBody>
+          <a:bodyPr wrap="square">
+            <a:spAutoFit/>
+          </a:bodyPr>
+          <a:lstStyle/>
+          <a:p>
+            <a:pPr algn="l"/>
+            <a:r>
+              <a:rPr sz="1800" b="1">
+                <a:solidFill>
+                  <a:srgbClr val="E10600"/>
+                </a:solidFill>
+                <a:latin typeface="Calibri"/>
+              </a:rPr>
+              <a:t>Test</a:t>
+            </a:r>
+          </a:p>
+        </p:txBody>
+      </p:sp>
+      <p:sp>
+        <p:nvSpPr>
+          <p:cNvPr id="17" name="TextBox 16"/>
+          <p:cNvSpPr txBox="1"/>
+          <p:nvPr/>
+        </p:nvSpPr>
+        <p:spPr>
+          <a:xfrm>
+            <a:off x="2651760" y="4050791"/>
+            <a:ext cx="3931920" cy="457200"/>
+          </a:xfrm>
+          <a:prstGeom prst="rect">
+            <a:avLst/>
+          </a:prstGeom>
+          <a:noFill/>
+        </p:spPr>
+        <p:txBody>
+          <a:bodyPr wrap="square">
+            <a:spAutoFit/>
+          </a:bodyPr>
+          <a:lstStyle/>
+          <a:p>
+            <a:pPr algn="l"/>
+            <a:r>
+              <a:rPr sz="1800" b="0">
+                <a:solidFill>
+                  <a:srgbClr val="1C1B1A"/>
+                </a:solidFill>
+                <a:latin typeface="Calibri"/>
+              </a:rPr>
+              <a:t>Refund asks twice. A healthy order stays healthy.</a:t>
+            </a:r>
+          </a:p>
+        </p:txBody>
+      </p:sp>
+      <p:sp>
+        <p:nvSpPr>
+          <p:cNvPr id="18" name="Rectangle 17"/>
+          <p:cNvSpPr/>
+          <p:nvPr/>
+        </p:nvSpPr>
+        <p:spPr>
+          <a:xfrm>
+            <a:off x="6858000" y="1463040"/>
+            <a:ext cx="4846320" cy="4297680"/>
+          </a:xfrm>
+          <a:prstGeom prst="rect">
+            <a:avLst/>
+          </a:prstGeom>
+          <a:solidFill>
+            <a:srgbClr val="F6F3EF"/>
+          </a:solidFill>
+          <a:ln>
+            <a:noFill/>
+          </a:ln>
+        </p:spPr>
+        <p:style>
+          <a:lnRef idx="1">
+            <a:schemeClr val="accent1"/>
+          </a:lnRef>
+          <a:fillRef idx="3">
+            <a:schemeClr val="accent1"/>
+          </a:fillRef>
+          <a:effectRef idx="2">
+            <a:schemeClr val="accent1"/>
+          </a:effectRef>
+          <a:fontRef idx="minor">
+            <a:schemeClr val="lt1"/>
+          </a:fontRef>
+        </p:style>
+        <p:txBody>
+          <a:bodyPr rtlCol="0" anchor="ctr"/>
+          <a:lstStyle/>
+          <a:p>
+            <a:pPr algn="ctr"/>
+          </a:p>
+        </p:txBody>
+      </p:sp>
+      <p:sp>
+        <p:nvSpPr>
+          <p:cNvPr id="19" name="TextBox 18"/>
+          <p:cNvSpPr txBox="1"/>
+          <p:nvPr/>
+        </p:nvSpPr>
+        <p:spPr>
+          <a:xfrm>
+            <a:off x="7086600" y="1645920"/>
+            <a:ext cx="4480560" cy="365760"/>
+          </a:xfrm>
+          <a:prstGeom prst="rect">
+            <a:avLst/>
+          </a:prstGeom>
+          <a:noFill/>
+        </p:spPr>
+        <p:txBody>
+          <a:bodyPr wrap="square">
+            <a:spAutoFit/>
+          </a:bodyPr>
+          <a:lstStyle/>
+          <a:p>
+            <a:pPr algn="l"/>
+            <a:r>
+              <a:rPr sz="1300" b="1">
+                <a:solidFill>
+                  <a:srgbClr val="E10600"/>
+                </a:solidFill>
+                <a:latin typeface="Calibri"/>
+              </a:rPr>
+              <a:t>NEW MODELS</a:t>
+            </a:r>
+          </a:p>
+        </p:txBody>
+      </p:sp>
+      <p:sp>
+        <p:nvSpPr>
+          <p:cNvPr id="20" name="TextBox 19"/>
+          <p:cNvSpPr txBox="1"/>
+          <p:nvPr/>
+        </p:nvSpPr>
+        <p:spPr>
+          <a:xfrm>
+            <a:off x="7086600" y="2057400"/>
+            <a:ext cx="4480560" cy="3474720"/>
+          </a:xfrm>
+          <a:prstGeom prst="rect">
+            <a:avLst/>
+          </a:prstGeom>
+          <a:noFill/>
+        </p:spPr>
+        <p:txBody>
+          <a:bodyPr wrap="square">
+            <a:spAutoFit/>
+          </a:bodyPr>
+          <a:lstStyle/>
+          <a:p>
+            <a:pPr algn="l"/>
+            <a:r>
+              <a:rPr sz="1600" b="0">
+                <a:solidFill>
+                  <a:srgbClr val="1C1B1A"/>
+                </a:solidFill>
+                <a:latin typeface="Calibri"/>
+              </a:rPr>
+              <a:t>AS-IS
+Carrier page, then a phone call, then a separate refund queue.
+TO-BE
+One Kmart journey. One service request.
+Not available
+The billing API cannot create a refund. The app confirms it and links the sales order.</a:t>
+            </a:r>
+          </a:p>
+        </p:txBody>
+      </p:sp>
+    </p:spTree>
+  </p:cSld>
+  <p:clrMapOvr>
+    <a:masterClrMapping/>
+  </p:clrMapOvr>
+</p:sld>
+</file>
+
+<file path=ppt/slides/slide7.xml><?xml version="1.0" encoding="utf-8"?>
+<p:sld xmlns:a="http://schemas.openxmlformats.org/drawingml/2006/main" xmlns:p="http://schemas.openxmlformats.org/presentationml/2006/main" xmlns:r="http://schemas.openxmlformats.org/officeDocument/2006/relationships">
+  <p:cSld>
+    <p:spTree>
+      <p:nvGrpSpPr>
+        <p:cNvPr id="1" name=""/>
+        <p:cNvGrpSpPr/>
+        <p:nvPr/>
+      </p:nvGrpSpPr>
+      <p:grpSpPr/>
+      <p:sp>
+        <p:nvSpPr>
+          <p:cNvPr id="2" name="Rectangle 1"/>
+          <p:cNvSpPr/>
+          <p:nvPr/>
+        </p:nvSpPr>
+        <p:spPr>
+          <a:xfrm>
+            <a:off x="0" y="0"/>
+            <a:ext cx="12191695" cy="6858000"/>
+          </a:xfrm>
+          <a:prstGeom prst="rect">
+            <a:avLst/>
+          </a:prstGeom>
+          <a:solidFill>
+            <a:srgbClr val="FFFFFF"/>
+          </a:solidFill>
+          <a:ln>
+            <a:noFill/>
+          </a:ln>
+        </p:spPr>
+        <p:style>
+          <a:lnRef idx="1">
+            <a:schemeClr val="accent1"/>
+          </a:lnRef>
+          <a:fillRef idx="3">
+            <a:schemeClr val="accent1"/>
+          </a:fillRef>
+          <a:effectRef idx="2">
+            <a:schemeClr val="accent1"/>
+          </a:effectRef>
+          <a:fontRef idx="minor">
+            <a:schemeClr val="lt1"/>
+          </a:fontRef>
+        </p:style>
+        <p:txBody>
+          <a:bodyPr rtlCol="0" anchor="ctr"/>
+          <a:lstStyle/>
+          <a:p>
+            <a:pPr algn="ctr"/>
+          </a:p>
+        </p:txBody>
+      </p:sp>
+      <p:sp>
+        <p:nvSpPr>
+          <p:cNvPr id="3" name="Rectangle 2"/>
+          <p:cNvSpPr/>
+          <p:nvPr/>
+        </p:nvSpPr>
+        <p:spPr>
+          <a:xfrm>
+            <a:off x="0" y="0"/>
+            <a:ext cx="12191695" cy="73152"/>
+          </a:xfrm>
+          <a:prstGeom prst="rect">
+            <a:avLst/>
+          </a:prstGeom>
+          <a:solidFill>
+            <a:srgbClr val="E10600"/>
+          </a:solidFill>
+          <a:ln>
+            <a:noFill/>
+          </a:ln>
+        </p:spPr>
+        <p:style>
+          <a:lnRef idx="1">
+            <a:schemeClr val="accent1"/>
+          </a:lnRef>
+          <a:fillRef idx="3">
+            <a:schemeClr val="accent1"/>
+          </a:fillRef>
+          <a:effectRef idx="2">
+            <a:schemeClr val="accent1"/>
+          </a:effectRef>
+          <a:fontRef idx="minor">
+            <a:schemeClr val="lt1"/>
+          </a:fontRef>
+        </p:style>
+        <p:txBody>
+          <a:bodyPr rtlCol="0" anchor="ctr"/>
+          <a:lstStyle/>
+          <a:p>
+            <a:pPr algn="ctr"/>
+          </a:p>
+        </p:txBody>
+      </p:sp>
+      <p:sp>
+        <p:nvSpPr>
+          <p:cNvPr id="4" name="TextBox 3"/>
+          <p:cNvSpPr txBox="1"/>
+          <p:nvPr/>
+        </p:nvSpPr>
+        <p:spPr>
+          <a:xfrm>
+            <a:off x="502920" y="6510528"/>
+            <a:ext cx="7315200" cy="256032"/>
+          </a:xfrm>
+          <a:prstGeom prst="rect">
+            <a:avLst/>
+          </a:prstGeom>
+          <a:noFill/>
+        </p:spPr>
+        <p:txBody>
+          <a:bodyPr wrap="square">
+            <a:spAutoFit/>
+          </a:bodyPr>
+          <a:lstStyle/>
+          <a:p>
+            <a:pPr algn="l"/>
+            <a:r>
+              <a:rPr sz="1200" b="0">
+                <a:solidFill>
+                  <a:srgbClr val="5E5A55"/>
+                </a:solidFill>
+                <a:latin typeface="Calibri"/>
+              </a:rPr>
+              <a:t>Kmart Delivery Assist  ·  Managing Director</a:t>
+            </a:r>
+          </a:p>
+        </p:txBody>
+      </p:sp>
+      <p:sp>
+        <p:nvSpPr>
+          <p:cNvPr id="5" name="TextBox 4"/>
+          <p:cNvSpPr txBox="1"/>
+          <p:nvPr/>
+        </p:nvSpPr>
+        <p:spPr>
+          <a:xfrm>
+            <a:off x="9509760" y="6510528"/>
+            <a:ext cx="2194560" cy="256032"/>
+          </a:xfrm>
+          <a:prstGeom prst="rect">
+            <a:avLst/>
+          </a:prstGeom>
+          <a:noFill/>
+        </p:spPr>
+        <p:txBody>
+          <a:bodyPr wrap="square">
+            <a:spAutoFit/>
+          </a:bodyPr>
+          <a:lstStyle/>
+          <a:p>
+            <a:pPr algn="r"/>
+            <a:r>
+              <a:rPr sz="1200" b="0">
+                <a:solidFill>
+                  <a:srgbClr val="5E5A55"/>
+                </a:solidFill>
+                <a:latin typeface="Calibri"/>
+              </a:rPr>
+              <a:t>7  /  10</a:t>
+            </a:r>
+          </a:p>
+        </p:txBody>
+      </p:sp>
+      <p:sp>
+        <p:nvSpPr>
+          <p:cNvPr id="6" name="TextBox 5"/>
+          <p:cNvSpPr txBox="1"/>
+          <p:nvPr/>
+        </p:nvSpPr>
+        <p:spPr>
+          <a:xfrm>
+            <a:off x="502920" y="320040"/>
+            <a:ext cx="7315200" cy="274320"/>
+          </a:xfrm>
+          <a:prstGeom prst="rect">
+            <a:avLst/>
+          </a:prstGeom>
+          <a:noFill/>
+        </p:spPr>
+        <p:txBody>
+          <a:bodyPr wrap="square">
+            <a:spAutoFit/>
+          </a:bodyPr>
+          <a:lstStyle/>
+          <a:p>
+            <a:pPr algn="l"/>
+            <a:r>
+              <a:rPr sz="1400" b="1">
+                <a:solidFill>
+                  <a:srgbClr val="E10600"/>
+                </a:solidFill>
+                <a:latin typeface="Calibri"/>
+              </a:rPr>
+              <a:t>EASE OF USE</a:t>
+            </a:r>
+          </a:p>
+        </p:txBody>
+      </p:sp>
+      <p:sp>
+        <p:nvSpPr>
+          <p:cNvPr id="7" name="TextBox 6"/>
+          <p:cNvSpPr txBox="1"/>
+          <p:nvPr/>
+        </p:nvSpPr>
+        <p:spPr>
+          <a:xfrm>
+            <a:off x="502920" y="640080"/>
+            <a:ext cx="10972800" cy="502920"/>
+          </a:xfrm>
+          <a:prstGeom prst="rect">
+            <a:avLst/>
+          </a:prstGeom>
+          <a:noFill/>
+        </p:spPr>
+        <p:txBody>
+          <a:bodyPr wrap="square">
+            <a:spAutoFit/>
+          </a:bodyPr>
+          <a:lstStyle/>
+          <a:p>
+            <a:pPr algn="l"/>
+            <a:r>
+              <a:rPr sz="2600" b="1">
+                <a:solidFill>
+                  <a:srgbClr val="1C1B1A"/>
+                </a:solidFill>
+                <a:latin typeface="Calibri"/>
+              </a:rPr>
+              <a:t>Nielsen’s ten heuristics, each tied to a screen.</a:t>
+            </a:r>
+          </a:p>
+        </p:txBody>
+      </p:sp>
+      <p:sp>
+        <p:nvSpPr>
+          <p:cNvPr id="8" name="TextBox 7"/>
+          <p:cNvSpPr txBox="1"/>
+          <p:nvPr/>
+        </p:nvSpPr>
+        <p:spPr>
+          <a:xfrm>
+            <a:off x="502920" y="1417320"/>
+            <a:ext cx="2194560" cy="640080"/>
+          </a:xfrm>
+          <a:prstGeom prst="rect">
+            <a:avLst/>
+          </a:prstGeom>
+          <a:noFill/>
+        </p:spPr>
+        <p:txBody>
+          <a:bodyPr wrap="square">
+            <a:spAutoFit/>
+          </a:bodyPr>
+          <a:lstStyle/>
+          <a:p>
+            <a:pPr algn="l"/>
+            <a:r>
+              <a:rPr sz="1600" b="1">
+                <a:solidFill>
+                  <a:srgbClr val="E10600"/>
+                </a:solidFill>
+                <a:latin typeface="Calibri"/>
+              </a:rPr>
+              <a:t>1  Status</a:t>
+            </a:r>
+          </a:p>
+        </p:txBody>
+      </p:sp>
+      <p:sp>
+        <p:nvSpPr>
+          <p:cNvPr id="9" name="TextBox 8"/>
+          <p:cNvSpPr txBox="1"/>
+          <p:nvPr/>
+        </p:nvSpPr>
+        <p:spPr>
+          <a:xfrm>
+            <a:off x="2697480" y="1417320"/>
+            <a:ext cx="3291840" cy="640080"/>
+          </a:xfrm>
+          <a:prstGeom prst="rect">
+            <a:avLst/>
+          </a:prstGeom>
+          <a:noFill/>
+        </p:spPr>
+        <p:txBody>
+          <a:bodyPr wrap="square">
+            <a:spAutoFit/>
+          </a:bodyPr>
+          <a:lstStyle/>
+          <a:p>
+            <a:pPr algn="l"/>
+            <a:r>
+              <a:rPr sz="1600" b="0">
+                <a:solidFill>
+                  <a:srgbClr val="1C1B1A"/>
+                </a:solidFill>
+                <a:latin typeface="Calibri"/>
+              </a:rPr>
+              <a:t>Step x of 6 stays on screen.</a:t>
+            </a:r>
+          </a:p>
+        </p:txBody>
+      </p:sp>
+      <p:sp>
+        <p:nvSpPr>
+          <p:cNvPr id="10" name="TextBox 9"/>
+          <p:cNvSpPr txBox="1"/>
+          <p:nvPr/>
+        </p:nvSpPr>
+        <p:spPr>
+          <a:xfrm>
+            <a:off x="6263640" y="1417320"/>
+            <a:ext cx="2194560" cy="640080"/>
+          </a:xfrm>
+          <a:prstGeom prst="rect">
+            <a:avLst/>
+          </a:prstGeom>
+          <a:noFill/>
+        </p:spPr>
+        <p:txBody>
+          <a:bodyPr wrap="square">
+            <a:spAutoFit/>
+          </a:bodyPr>
+          <a:lstStyle/>
+          <a:p>
+            <a:pPr algn="l"/>
+            <a:r>
+              <a:rPr sz="1600" b="1">
+                <a:solidFill>
+                  <a:srgbClr val="E10600"/>
+                </a:solidFill>
+                <a:latin typeface="Calibri"/>
+              </a:rPr>
+              <a:t>2  Real world</a:t>
+            </a:r>
+          </a:p>
+        </p:txBody>
+      </p:sp>
+      <p:sp>
+        <p:nvSpPr>
+          <p:cNvPr id="11" name="TextBox 10"/>
+          <p:cNvSpPr txBox="1"/>
+          <p:nvPr/>
+        </p:nvSpPr>
+        <p:spPr>
+          <a:xfrm>
+            <a:off x="8458200" y="1417320"/>
+            <a:ext cx="3291840" cy="640080"/>
+          </a:xfrm>
+          <a:prstGeom prst="rect">
+            <a:avLst/>
+          </a:prstGeom>
+          <a:noFill/>
+        </p:spPr>
+        <p:txBody>
+          <a:bodyPr wrap="square">
+            <a:spAutoFit/>
+          </a:bodyPr>
+          <a:lstStyle/>
+          <a:p>
+            <a:pPr algn="l"/>
+            <a:r>
+              <a:rPr sz="1600" b="0">
+                <a:solidFill>
+                  <a:srgbClr val="1C1B1A"/>
+                </a:solidFill>
+                <a:latin typeface="Calibri"/>
+              </a:rPr>
+              <a:t>“Track my order”, not SAP codes.</a:t>
+            </a:r>
+          </a:p>
+        </p:txBody>
+      </p:sp>
+      <p:sp>
+        <p:nvSpPr>
+          <p:cNvPr id="12" name="TextBox 11"/>
+          <p:cNvSpPr txBox="1"/>
+          <p:nvPr/>
+        </p:nvSpPr>
+        <p:spPr>
+          <a:xfrm>
+            <a:off x="502920" y="2331720"/>
+            <a:ext cx="2194560" cy="640080"/>
+          </a:xfrm>
+          <a:prstGeom prst="rect">
+            <a:avLst/>
+          </a:prstGeom>
+          <a:noFill/>
+        </p:spPr>
+        <p:txBody>
+          <a:bodyPr wrap="square">
+            <a:spAutoFit/>
+          </a:bodyPr>
+          <a:lstStyle/>
+          <a:p>
+            <a:pPr algn="l"/>
+            <a:r>
+              <a:rPr sz="1600" b="1">
+                <a:solidFill>
+                  <a:srgbClr val="E10600"/>
+                </a:solidFill>
+                <a:latin typeface="Calibri"/>
+              </a:rPr>
+              <a:t>3  Control</a:t>
+            </a:r>
+          </a:p>
+        </p:txBody>
+      </p:sp>
+      <p:sp>
+        <p:nvSpPr>
+          <p:cNvPr id="13" name="TextBox 12"/>
+          <p:cNvSpPr txBox="1"/>
+          <p:nvPr/>
+        </p:nvSpPr>
+        <p:spPr>
+          <a:xfrm>
+            <a:off x="2697480" y="2331720"/>
+            <a:ext cx="3291840" cy="640080"/>
+          </a:xfrm>
+          <a:prstGeom prst="rect">
+            <a:avLst/>
+          </a:prstGeom>
+          <a:noFill/>
+        </p:spPr>
+        <p:txBody>
+          <a:bodyPr wrap="square">
+            <a:spAutoFit/>
+          </a:bodyPr>
+          <a:lstStyle/>
+          <a:p>
+            <a:pPr algn="l"/>
+            <a:r>
+              <a:rPr sz="1600" b="0">
+                <a:solidFill>
+                  <a:srgbClr val="1C1B1A"/>
+                </a:solidFill>
+                <a:latin typeface="Calibri"/>
+              </a:rPr>
+              <a:t>Back, and start the order again.</a:t>
+            </a:r>
+          </a:p>
+        </p:txBody>
+      </p:sp>
+      <p:sp>
+        <p:nvSpPr>
+          <p:cNvPr id="14" name="TextBox 13"/>
+          <p:cNvSpPr txBox="1"/>
+          <p:nvPr/>
+        </p:nvSpPr>
+        <p:spPr>
+          <a:xfrm>
+            <a:off x="6263640" y="2331720"/>
+            <a:ext cx="2194560" cy="640080"/>
+          </a:xfrm>
+          <a:prstGeom prst="rect">
+            <a:avLst/>
+          </a:prstGeom>
+          <a:noFill/>
+        </p:spPr>
+        <p:txBody>
+          <a:bodyPr wrap="square">
+            <a:spAutoFit/>
+          </a:bodyPr>
+          <a:lstStyle/>
+          <a:p>
+            <a:pPr algn="l"/>
+            <a:r>
+              <a:rPr sz="1600" b="1">
+                <a:solidFill>
+                  <a:srgbClr val="E10600"/>
+                </a:solidFill>
+                <a:latin typeface="Calibri"/>
+              </a:rPr>
+              <a:t>4  Consistency</a:t>
+            </a:r>
+          </a:p>
+        </p:txBody>
+      </p:sp>
+      <p:sp>
+        <p:nvSpPr>
+          <p:cNvPr id="15" name="TextBox 14"/>
+          <p:cNvSpPr txBox="1"/>
+          <p:nvPr/>
+        </p:nvSpPr>
+        <p:spPr>
+          <a:xfrm>
+            <a:off x="8458200" y="2331720"/>
+            <a:ext cx="3291840" cy="640080"/>
+          </a:xfrm>
+          <a:prstGeom prst="rect">
+            <a:avLst/>
+          </a:prstGeom>
+          <a:noFill/>
+        </p:spPr>
+        <p:txBody>
+          <a:bodyPr wrap="square">
+            <a:spAutoFit/>
+          </a:bodyPr>
+          <a:lstStyle/>
+          <a:p>
+            <a:pPr algn="l"/>
+            <a:r>
+              <a:rPr sz="1600" b="0">
+                <a:solidFill>
+                  <a:srgbClr val="1C1B1A"/>
+                </a:solidFill>
+                <a:latin typeface="Calibri"/>
+              </a:rPr>
+              <a:t>One button, one step pattern.</a:t>
+            </a:r>
+          </a:p>
+        </p:txBody>
+      </p:sp>
+      <p:sp>
+        <p:nvSpPr>
+          <p:cNvPr id="16" name="TextBox 15"/>
+          <p:cNvSpPr txBox="1"/>
+          <p:nvPr/>
+        </p:nvSpPr>
+        <p:spPr>
+          <a:xfrm>
+            <a:off x="502920" y="3246120"/>
+            <a:ext cx="2194560" cy="640080"/>
+          </a:xfrm>
+          <a:prstGeom prst="rect">
+            <a:avLst/>
+          </a:prstGeom>
+          <a:noFill/>
+        </p:spPr>
+        <p:txBody>
+          <a:bodyPr wrap="square">
+            <a:spAutoFit/>
+          </a:bodyPr>
+          <a:lstStyle/>
+          <a:p>
+            <a:pPr algn="l"/>
+            <a:r>
+              <a:rPr sz="1600" b="1">
+                <a:solidFill>
+                  <a:srgbClr val="E10600"/>
+                </a:solidFill>
+                <a:latin typeface="Calibri"/>
+              </a:rPr>
+              <a:t>5  Prevention</a:t>
+            </a:r>
+          </a:p>
+        </p:txBody>
+      </p:sp>
+      <p:sp>
+        <p:nvSpPr>
+          <p:cNvPr id="17" name="TextBox 16"/>
+          <p:cNvSpPr txBox="1"/>
+          <p:nvPr/>
+        </p:nvSpPr>
+        <p:spPr>
+          <a:xfrm>
+            <a:off x="2697480" y="3246120"/>
+            <a:ext cx="3291840" cy="640080"/>
+          </a:xfrm>
+          <a:prstGeom prst="rect">
+            <a:avLst/>
+          </a:prstGeom>
+          <a:noFill/>
+        </p:spPr>
+        <p:txBody>
+          <a:bodyPr wrap="square">
+            <a:spAutoFit/>
+          </a:bodyPr>
+          <a:lstStyle/>
+          <a:p>
+            <a:pPr algn="l"/>
+            <a:r>
+              <a:rPr sz="1600" b="0">
+                <a:solidFill>
+                  <a:srgbClr val="1C1B1A"/>
+                </a:solidFill>
+                <a:latin typeface="Calibri"/>
+              </a:rPr>
+              <a:t>A refund is named, then confirmed.</a:t>
+            </a:r>
+          </a:p>
+        </p:txBody>
+      </p:sp>
+      <p:sp>
+        <p:nvSpPr>
+          <p:cNvPr id="18" name="TextBox 17"/>
+          <p:cNvSpPr txBox="1"/>
+          <p:nvPr/>
+        </p:nvSpPr>
+        <p:spPr>
+          <a:xfrm>
+            <a:off x="6263640" y="3246120"/>
+            <a:ext cx="2194560" cy="640080"/>
+          </a:xfrm>
+          <a:prstGeom prst="rect">
+            <a:avLst/>
+          </a:prstGeom>
+          <a:noFill/>
+        </p:spPr>
+        <p:txBody>
+          <a:bodyPr wrap="square">
+            <a:spAutoFit/>
+          </a:bodyPr>
+          <a:lstStyle/>
+          <a:p>
+            <a:pPr algn="l"/>
+            <a:r>
+              <a:rPr sz="1600" b="1">
+                <a:solidFill>
+                  <a:srgbClr val="E10600"/>
+                </a:solidFill>
+                <a:latin typeface="Calibri"/>
+              </a:rPr>
+              <a:t>6  Recognition</a:t>
+            </a:r>
+          </a:p>
+        </p:txBody>
+      </p:sp>
+      <p:sp>
+        <p:nvSpPr>
+          <p:cNvPr id="19" name="TextBox 18"/>
+          <p:cNvSpPr txBox="1"/>
+          <p:nvPr/>
+        </p:nvSpPr>
+        <p:spPr>
+          <a:xfrm>
+            <a:off x="8458200" y="3246120"/>
+            <a:ext cx="3291840" cy="640080"/>
+          </a:xfrm>
+          <a:prstGeom prst="rect">
+            <a:avLst/>
+          </a:prstGeom>
+          <a:noFill/>
+        </p:spPr>
+        <p:txBody>
+          <a:bodyPr wrap="square">
+            <a:spAutoFit/>
+          </a:bodyPr>
+          <a:lstStyle/>
+          <a:p>
+            <a:pPr algn="l"/>
+            <a:r>
+              <a:rPr sz="1600" b="0">
+                <a:solidFill>
+                  <a:srgbClr val="1C1B1A"/>
+                </a:solidFill>
+                <a:latin typeface="Calibri"/>
+              </a:rPr>
+              <a:t>Recent orders are visible.</a:t>
+            </a:r>
+          </a:p>
+        </p:txBody>
+      </p:sp>
+      <p:sp>
+        <p:nvSpPr>
+          <p:cNvPr id="20" name="TextBox 19"/>
+          <p:cNvSpPr txBox="1"/>
+          <p:nvPr/>
+        </p:nvSpPr>
+        <p:spPr>
+          <a:xfrm>
+            <a:off x="502920" y="4160520"/>
+            <a:ext cx="2194560" cy="640080"/>
+          </a:xfrm>
+          <a:prstGeom prst="rect">
+            <a:avLst/>
+          </a:prstGeom>
+          <a:noFill/>
+        </p:spPr>
+        <p:txBody>
+          <a:bodyPr wrap="square">
+            <a:spAutoFit/>
+          </a:bodyPr>
+          <a:lstStyle/>
+          <a:p>
+            <a:pPr algn="l"/>
+            <a:r>
+              <a:rPr sz="1600" b="1">
+                <a:solidFill>
+                  <a:srgbClr val="E10600"/>
+                </a:solidFill>
+                <a:latin typeface="Calibri"/>
+              </a:rPr>
+              <a:t>7  Flexibility</a:t>
+            </a:r>
+          </a:p>
+        </p:txBody>
+      </p:sp>
+      <p:sp>
+        <p:nvSpPr>
+          <p:cNvPr id="21" name="TextBox 20"/>
+          <p:cNvSpPr txBox="1"/>
+          <p:nvPr/>
+        </p:nvSpPr>
+        <p:spPr>
+          <a:xfrm>
+            <a:off x="2697480" y="4160520"/>
+            <a:ext cx="3291840" cy="640080"/>
+          </a:xfrm>
+          <a:prstGeom prst="rect">
+            <a:avLst/>
+          </a:prstGeom>
+          <a:noFill/>
+        </p:spPr>
+        <p:txBody>
+          <a:bodyPr wrap="square">
+            <a:spAutoFit/>
+          </a:bodyPr>
+          <a:lstStyle/>
+          <a:p>
+            <a:pPr algn="l"/>
+            <a:r>
+              <a:rPr sz="1600" b="0">
+                <a:solidFill>
+                  <a:srgbClr val="1C1B1A"/>
+                </a:solidFill>
+                <a:latin typeface="Calibri"/>
+              </a:rPr>
+              <a:t>Order number or sales order.</a:t>
+            </a:r>
+          </a:p>
+        </p:txBody>
+      </p:sp>
+      <p:sp>
+        <p:nvSpPr>
+          <p:cNvPr id="22" name="TextBox 21"/>
+          <p:cNvSpPr txBox="1"/>
+          <p:nvPr/>
+        </p:nvSpPr>
+        <p:spPr>
+          <a:xfrm>
+            <a:off x="6263640" y="4160520"/>
+            <a:ext cx="2194560" cy="640080"/>
+          </a:xfrm>
+          <a:prstGeom prst="rect">
+            <a:avLst/>
+          </a:prstGeom>
+          <a:noFill/>
+        </p:spPr>
+        <p:txBody>
+          <a:bodyPr wrap="square">
+            <a:spAutoFit/>
+          </a:bodyPr>
+          <a:lstStyle/>
+          <a:p>
+            <a:pPr algn="l"/>
+            <a:r>
+              <a:rPr sz="1600" b="1">
+                <a:solidFill>
+                  <a:srgbClr val="E10600"/>
+                </a:solidFill>
+                <a:latin typeface="Calibri"/>
+              </a:rPr>
+              <a:t>8  Aesthetic</a:t>
+            </a:r>
+          </a:p>
+        </p:txBody>
+      </p:sp>
+      <p:sp>
+        <p:nvSpPr>
+          <p:cNvPr id="23" name="TextBox 22"/>
+          <p:cNvSpPr txBox="1"/>
+          <p:nvPr/>
+        </p:nvSpPr>
+        <p:spPr>
+          <a:xfrm>
+            <a:off x="8458200" y="4160520"/>
+            <a:ext cx="3291840" cy="640080"/>
+          </a:xfrm>
+          <a:prstGeom prst="rect">
+            <a:avLst/>
+          </a:prstGeom>
+          <a:noFill/>
+        </p:spPr>
+        <p:txBody>
+          <a:bodyPr wrap="square">
+            <a:spAutoFit/>
+          </a:bodyPr>
+          <a:lstStyle/>
+          <a:p>
+            <a:pPr algn="l"/>
+            <a:r>
+              <a:rPr sz="1600" b="0">
+                <a:solidFill>
+                  <a:srgbClr val="1C1B1A"/>
+                </a:solidFill>
+                <a:latin typeface="Calibri"/>
+              </a:rPr>
+              <a:t>One decision on each screen.</a:t>
+            </a:r>
+          </a:p>
+        </p:txBody>
+      </p:sp>
+      <p:sp>
+        <p:nvSpPr>
+          <p:cNvPr id="24" name="TextBox 23"/>
+          <p:cNvSpPr txBox="1"/>
+          <p:nvPr/>
+        </p:nvSpPr>
+        <p:spPr>
+          <a:xfrm>
+            <a:off x="502920" y="5074920"/>
+            <a:ext cx="2194560" cy="640080"/>
+          </a:xfrm>
+          <a:prstGeom prst="rect">
+            <a:avLst/>
+          </a:prstGeom>
+          <a:noFill/>
+        </p:spPr>
+        <p:txBody>
+          <a:bodyPr wrap="square">
+            <a:spAutoFit/>
+          </a:bodyPr>
+          <a:lstStyle/>
+          <a:p>
+            <a:pPr algn="l"/>
+            <a:r>
+              <a:rPr sz="1600" b="1">
+                <a:solidFill>
+                  <a:srgbClr val="E10600"/>
+                </a:solidFill>
+                <a:latin typeface="Calibri"/>
+              </a:rPr>
+              <a:t>9  Recovery</a:t>
+            </a:r>
+          </a:p>
+        </p:txBody>
+      </p:sp>
+      <p:sp>
+        <p:nvSpPr>
+          <p:cNvPr id="25" name="TextBox 24"/>
+          <p:cNvSpPr txBox="1"/>
+          <p:nvPr/>
+        </p:nvSpPr>
+        <p:spPr>
+          <a:xfrm>
+            <a:off x="2697480" y="5074920"/>
+            <a:ext cx="3291840" cy="640080"/>
+          </a:xfrm>
+          <a:prstGeom prst="rect">
+            <a:avLst/>
+          </a:prstGeom>
+          <a:noFill/>
+        </p:spPr>
+        <p:txBody>
+          <a:bodyPr wrap="square">
+            <a:spAutoFit/>
+          </a:bodyPr>
+          <a:lstStyle/>
+          <a:p>
+            <a:pPr algn="l"/>
+            <a:r>
+              <a:rPr sz="1600" b="0">
+                <a:solidFill>
+                  <a:srgbClr val="1C1B1A"/>
+                </a:solidFill>
+                <a:latin typeface="Calibri"/>
+              </a:rPr>
+              <a:t>A missing order says what to check.</a:t>
+            </a:r>
+          </a:p>
+        </p:txBody>
+      </p:sp>
+      <p:sp>
+        <p:nvSpPr>
+          <p:cNvPr id="26" name="TextBox 25"/>
+          <p:cNvSpPr txBox="1"/>
+          <p:nvPr/>
+        </p:nvSpPr>
+        <p:spPr>
+          <a:xfrm>
+            <a:off x="6263640" y="5074920"/>
+            <a:ext cx="2194560" cy="640080"/>
+          </a:xfrm>
+          <a:prstGeom prst="rect">
+            <a:avLst/>
+          </a:prstGeom>
+          <a:noFill/>
+        </p:spPr>
+        <p:txBody>
+          <a:bodyPr wrap="square">
+            <a:spAutoFit/>
+          </a:bodyPr>
+          <a:lstStyle/>
+          <a:p>
+            <a:pPr algn="l"/>
+            <a:r>
+              <a:rPr sz="1600" b="1">
+                <a:solidFill>
+                  <a:srgbClr val="E10600"/>
+                </a:solidFill>
+                <a:latin typeface="Calibri"/>
+              </a:rPr>
+              <a:t>10  Help</a:t>
+            </a:r>
+          </a:p>
+        </p:txBody>
+      </p:sp>
+      <p:sp>
+        <p:nvSpPr>
+          <p:cNvPr id="27" name="TextBox 26"/>
+          <p:cNvSpPr txBox="1"/>
+          <p:nvPr/>
+        </p:nvSpPr>
+        <p:spPr>
+          <a:xfrm>
+            <a:off x="8458200" y="5074920"/>
+            <a:ext cx="3291840" cy="640080"/>
+          </a:xfrm>
+          <a:prstGeom prst="rect">
+            <a:avLst/>
+          </a:prstGeom>
+          <a:noFill/>
+        </p:spPr>
+        <p:txBody>
+          <a:bodyPr wrap="square">
+            <a:spAutoFit/>
+          </a:bodyPr>
+          <a:lstStyle/>
+          <a:p>
+            <a:pPr algn="l"/>
+            <a:r>
+              <a:rPr sz="1600" b="0">
+                <a:solidFill>
+                  <a:srgbClr val="1C1B1A"/>
+                </a:solidFill>
+                <a:latin typeface="Calibri"/>
+              </a:rPr>
+              <a:t>Each screen says what happens next.</a:t>
+            </a:r>
+          </a:p>
+        </p:txBody>
+      </p:sp>
+    </p:spTree>
+  </p:cSld>
+  <p:clrMapOvr>
+    <a:masterClrMapping/>
+  </p:clrMapOvr>
+</p:sld>
+</file>
+
+<file path=ppt/slides/slide8.xml><?xml version="1.0" encoding="utf-8"?>
+<p:sld xmlns:a="http://schemas.openxmlformats.org/drawingml/2006/main" xmlns:p="http://schemas.openxmlformats.org/presentationml/2006/main" xmlns:r="http://schemas.openxmlformats.org/officeDocument/2006/relationships">
+  <p:cSld>
+    <p:spTree>
+      <p:nvGrpSpPr>
+        <p:cNvPr id="1" name=""/>
+        <p:cNvGrpSpPr/>
+        <p:nvPr/>
+      </p:nvGrpSpPr>
+      <p:grpSpPr/>
+      <p:sp>
+        <p:nvSpPr>
+          <p:cNvPr id="2" name="Rectangle 1"/>
+          <p:cNvSpPr/>
+          <p:nvPr/>
+        </p:nvSpPr>
+        <p:spPr>
+          <a:xfrm>
+            <a:off x="0" y="0"/>
+            <a:ext cx="12191695" cy="6858000"/>
+          </a:xfrm>
+          <a:prstGeom prst="rect">
+            <a:avLst/>
+          </a:prstGeom>
+          <a:solidFill>
+            <a:srgbClr val="1C1B1A"/>
+          </a:solidFill>
+          <a:ln>
+            <a:noFill/>
+          </a:ln>
+        </p:spPr>
+        <p:style>
+          <a:lnRef idx="1">
+            <a:schemeClr val="accent1"/>
+          </a:lnRef>
+          <a:fillRef idx="3">
+            <a:schemeClr val="accent1"/>
+          </a:fillRef>
+          <a:effectRef idx="2">
+            <a:schemeClr val="accent1"/>
+          </a:effectRef>
+          <a:fontRef idx="minor">
+            <a:schemeClr val="lt1"/>
+          </a:fontRef>
+        </p:style>
+        <p:txBody>
+          <a:bodyPr rtlCol="0" anchor="ctr"/>
+          <a:lstStyle/>
+          <a:p>
+            <a:pPr algn="ctr"/>
+          </a:p>
+        </p:txBody>
+      </p:sp>
+      <p:sp>
+        <p:nvSpPr>
+          <p:cNvPr id="3" name="Rectangle 2"/>
+          <p:cNvSpPr/>
+          <p:nvPr/>
+        </p:nvSpPr>
+        <p:spPr>
+          <a:xfrm>
+            <a:off x="0" y="0"/>
+            <a:ext cx="164592" cy="6858000"/>
+          </a:xfrm>
+          <a:prstGeom prst="rect">
+            <a:avLst/>
+          </a:prstGeom>
+          <a:solidFill>
+            <a:srgbClr val="E10600"/>
+          </a:solidFill>
+          <a:ln>
+            <a:noFill/>
+          </a:ln>
+        </p:spPr>
+        <p:style>
+          <a:lnRef idx="1">
+            <a:schemeClr val="accent1"/>
+          </a:lnRef>
+          <a:fillRef idx="3">
+            <a:schemeClr val="accent1"/>
+          </a:fillRef>
+          <a:effectRef idx="2">
+            <a:schemeClr val="accent1"/>
+          </a:effectRef>
+          <a:fontRef idx="minor">
+            <a:schemeClr val="lt1"/>
+          </a:fontRef>
+        </p:style>
+        <p:txBody>
+          <a:bodyPr rtlCol="0" anchor="ctr"/>
+          <a:lstStyle/>
+          <a:p>
+            <a:pPr algn="ctr"/>
+          </a:p>
+        </p:txBody>
+      </p:sp>
+      <p:sp>
+        <p:nvSpPr>
+          <p:cNvPr id="4" name="TextBox 3"/>
+          <p:cNvSpPr txBox="1"/>
+          <p:nvPr/>
+        </p:nvSpPr>
+        <p:spPr>
+          <a:xfrm>
+            <a:off x="777240" y="411480"/>
+            <a:ext cx="5486400" cy="274320"/>
+          </a:xfrm>
+          <a:prstGeom prst="rect">
+            <a:avLst/>
+          </a:prstGeom>
+          <a:noFill/>
+        </p:spPr>
+        <p:txBody>
+          <a:bodyPr wrap="square">
+            <a:spAutoFit/>
+          </a:bodyPr>
+          <a:lstStyle/>
+          <a:p>
+            <a:pPr algn="l"/>
+            <a:r>
+              <a:rPr sz="1400" b="1">
+                <a:solidFill>
+                  <a:srgbClr val="E10600"/>
+                </a:solidFill>
+                <a:latin typeface="Calibri"/>
+              </a:rPr>
+              <a:t>SHOW IT</a:t>
+            </a:r>
+          </a:p>
+        </p:txBody>
+      </p:sp>
+      <p:sp>
+        <p:nvSpPr>
+          <p:cNvPr id="5" name="TextBox 4"/>
+          <p:cNvSpPr txBox="1"/>
+          <p:nvPr/>
+        </p:nvSpPr>
+        <p:spPr>
+          <a:xfrm>
+            <a:off x="777240" y="914400"/>
+            <a:ext cx="10058400" cy="731520"/>
+          </a:xfrm>
+          <a:prstGeom prst="rect">
+            <a:avLst/>
+          </a:prstGeom>
+          <a:noFill/>
+        </p:spPr>
+        <p:txBody>
+          <a:bodyPr wrap="square">
+            <a:spAutoFit/>
+          </a:bodyPr>
+          <a:lstStyle/>
+          <a:p>
+            <a:pPr algn="l"/>
+            <a:r>
+              <a:rPr sz="4800" b="1">
+                <a:solidFill>
+                  <a:srgbClr val="FFFFFF"/>
+                </a:solidFill>
+                <a:latin typeface="Calibri"/>
+              </a:rPr>
+              <a:t>Order KM185002</a:t>
+            </a:r>
+          </a:p>
+        </p:txBody>
+      </p:sp>
+      <p:sp>
+        <p:nvSpPr>
+          <p:cNvPr id="6" name="TextBox 5"/>
+          <p:cNvSpPr txBox="1"/>
+          <p:nvPr/>
+        </p:nvSpPr>
+        <p:spPr>
+          <a:xfrm>
+            <a:off x="777240" y="1828800"/>
+            <a:ext cx="9144000" cy="457200"/>
+          </a:xfrm>
+          <a:prstGeom prst="rect">
+            <a:avLst/>
+          </a:prstGeom>
+          <a:noFill/>
+        </p:spPr>
+        <p:txBody>
+          <a:bodyPr wrap="square">
+            <a:spAutoFit/>
+          </a:bodyPr>
+          <a:lstStyle/>
+          <a:p>
+            <a:pPr algn="l"/>
+            <a:r>
+              <a:rPr sz="2000" b="0">
+                <a:solidFill>
+                  <a:srgbClr val="E6E0D8"/>
+                </a:solidFill>
+                <a:latin typeface="Calibri"/>
+              </a:rPr>
+              <a:t>ANKO Storage Box 30L  ·  damaged on delivery  ·  cushion is fine</a:t>
+            </a:r>
+          </a:p>
+        </p:txBody>
+      </p:sp>
+      <p:sp>
+        <p:nvSpPr>
+          <p:cNvPr id="7" name="TextBox 6"/>
+          <p:cNvSpPr txBox="1"/>
+          <p:nvPr/>
+        </p:nvSpPr>
+        <p:spPr>
+          <a:xfrm>
+            <a:off x="777240" y="2834640"/>
+            <a:ext cx="10058400" cy="502920"/>
+          </a:xfrm>
+          <a:prstGeom prst="rect">
+            <a:avLst/>
+          </a:prstGeom>
+          <a:noFill/>
+        </p:spPr>
+        <p:txBody>
+          <a:bodyPr wrap="square">
+            <a:spAutoFit/>
+          </a:bodyPr>
+          <a:lstStyle/>
+          <a:p>
+            <a:pPr algn="l"/>
+            <a:r>
+              <a:rPr sz="2200" b="0">
+                <a:solidFill>
+                  <a:srgbClr val="FFFFFF"/>
+                </a:solidFill>
+                <a:latin typeface="Calibri"/>
+              </a:rPr>
+              <a:t>1    Open the order. Read the one-sentence status.</a:t>
+            </a:r>
+          </a:p>
+        </p:txBody>
+      </p:sp>
+      <p:sp>
+        <p:nvSpPr>
+          <p:cNvPr id="8" name="TextBox 7"/>
+          <p:cNvSpPr txBox="1"/>
+          <p:nvPr/>
+        </p:nvSpPr>
+        <p:spPr>
+          <a:xfrm>
+            <a:off x="777240" y="3474720"/>
+            <a:ext cx="10058400" cy="502920"/>
+          </a:xfrm>
+          <a:prstGeom prst="rect">
+            <a:avLst/>
+          </a:prstGeom>
+          <a:noFill/>
+        </p:spPr>
+        <p:txBody>
+          <a:bodyPr wrap="square">
+            <a:spAutoFit/>
+          </a:bodyPr>
+          <a:lstStyle/>
+          <a:p>
+            <a:pPr algn="l"/>
+            <a:r>
+              <a:rPr sz="2200" b="0">
+                <a:solidFill>
+                  <a:srgbClr val="FFFFFF"/>
+                </a:solidFill>
+                <a:latin typeface="Calibri"/>
+              </a:rPr>
+              <a:t>2    Confirm the problem. Keep the recommended replacement.</a:t>
+            </a:r>
+          </a:p>
+        </p:txBody>
+      </p:sp>
+      <p:sp>
+        <p:nvSpPr>
+          <p:cNvPr id="9" name="TextBox 8"/>
+          <p:cNvSpPr txBox="1"/>
+          <p:nvPr/>
+        </p:nvSpPr>
+        <p:spPr>
+          <a:xfrm>
+            <a:off x="777240" y="4114800"/>
+            <a:ext cx="10058400" cy="502920"/>
+          </a:xfrm>
+          <a:prstGeom prst="rect">
+            <a:avLst/>
+          </a:prstGeom>
+          <a:noFill/>
+        </p:spPr>
+        <p:txBody>
+          <a:bodyPr wrap="square">
+            <a:spAutoFit/>
+          </a:bodyPr>
+          <a:lstStyle/>
+          <a:p>
+            <a:pPr algn="l"/>
+            <a:r>
+              <a:rPr sz="2200" b="0">
+                <a:solidFill>
+                  <a:srgbClr val="FFFFFF"/>
+                </a:solidFill>
+                <a:latin typeface="Calibri"/>
+              </a:rPr>
+              <a:t>3    Check for an update until the case is ready.</a:t>
+            </a:r>
+          </a:p>
+        </p:txBody>
+      </p:sp>
+      <p:sp>
+        <p:nvSpPr>
+          <p:cNvPr id="10" name="TextBox 9"/>
+          <p:cNvSpPr txBox="1"/>
+          <p:nvPr/>
+        </p:nvSpPr>
+        <p:spPr>
+          <a:xfrm>
+            <a:off x="777240" y="4754879"/>
+            <a:ext cx="10058400" cy="502920"/>
+          </a:xfrm>
+          <a:prstGeom prst="rect">
+            <a:avLst/>
+          </a:prstGeom>
+          <a:noFill/>
+        </p:spPr>
+        <p:txBody>
+          <a:bodyPr wrap="square">
+            <a:spAutoFit/>
+          </a:bodyPr>
+          <a:lstStyle/>
+          <a:p>
+            <a:pPr algn="l"/>
+            <a:r>
+              <a:rPr sz="2200" b="0">
+                <a:solidFill>
+                  <a:srgbClr val="FFFFFF"/>
+                </a:solidFill>
+                <a:latin typeface="Calibri"/>
+              </a:rPr>
+              <a:t>4    Confirm. Show the SAP service request.</a:t>
+            </a:r>
+          </a:p>
+        </p:txBody>
+      </p:sp>
+    </p:spTree>
+  </p:cSld>
+  <p:clrMapOvr>
+    <a:masterClrMapping/>
+  </p:clrMapOvr>
+</p:sld>
+</file>
+
+<file path=ppt/slides/slide9.xml><?xml version="1.0" encoding="utf-8"?>
+<p:sld xmlns:a="http://schemas.openxmlformats.org/drawingml/2006/main" xmlns:p="http://schemas.openxmlformats.org/presentationml/2006/main" xmlns:r="http://schemas.openxmlformats.org/officeDocument/2006/relationships">
+  <p:cSld>
+    <p:spTree>
+      <p:nvGrpSpPr>
+        <p:cNvPr id="1" name=""/>
+        <p:cNvGrpSpPr/>
+        <p:nvPr/>
+      </p:nvGrpSpPr>
+      <p:grpSpPr/>
+      <p:sp>
+        <p:nvSpPr>
+          <p:cNvPr id="2" name="Rectangle 1"/>
+          <p:cNvSpPr/>
+          <p:nvPr/>
+        </p:nvSpPr>
+        <p:spPr>
+          <a:xfrm>
+            <a:off x="0" y="0"/>
+            <a:ext cx="12191695" cy="6858000"/>
+          </a:xfrm>
+          <a:prstGeom prst="rect">
+            <a:avLst/>
+          </a:prstGeom>
+          <a:solidFill>
+            <a:srgbClr val="FFFFFF"/>
+          </a:solidFill>
+          <a:ln>
+            <a:noFill/>
+          </a:ln>
+        </p:spPr>
+        <p:style>
+          <a:lnRef idx="1">
+            <a:schemeClr val="accent1"/>
+          </a:lnRef>
+          <a:fillRef idx="3">
+            <a:schemeClr val="accent1"/>
+          </a:fillRef>
+          <a:effectRef idx="2">
+            <a:schemeClr val="accent1"/>
+          </a:effectRef>
+          <a:fontRef idx="minor">
+            <a:schemeClr val="lt1"/>
+          </a:fontRef>
+        </p:style>
+        <p:txBody>
+          <a:bodyPr rtlCol="0" anchor="ctr"/>
+          <a:lstStyle/>
+          <a:p>
+            <a:pPr algn="ctr"/>
+          </a:p>
+        </p:txBody>
+      </p:sp>
+      <p:sp>
+        <p:nvSpPr>
+          <p:cNvPr id="3" name="Rectangle 2"/>
+          <p:cNvSpPr/>
+          <p:nvPr/>
+        </p:nvSpPr>
+        <p:spPr>
+          <a:xfrm>
+            <a:off x="0" y="0"/>
+            <a:ext cx="12191695" cy="73152"/>
+          </a:xfrm>
+          <a:prstGeom prst="rect">
+            <a:avLst/>
+          </a:prstGeom>
+          <a:solidFill>
+            <a:srgbClr val="E10600"/>
+          </a:solidFill>
+          <a:ln>
+            <a:noFill/>
+          </a:ln>
+        </p:spPr>
+        <p:style>
+          <a:lnRef idx="1">
+            <a:schemeClr val="accent1"/>
+          </a:lnRef>
+          <a:fillRef idx="3">
+            <a:schemeClr val="accent1"/>
+          </a:fillRef>
+          <a:effectRef idx="2">
+            <a:schemeClr val="accent1"/>
+          </a:effectRef>
+          <a:fontRef idx="minor">
+            <a:schemeClr val="lt1"/>
+          </a:fontRef>
+        </p:style>
+        <p:txBody>
+          <a:bodyPr rtlCol="0" anchor="ctr"/>
+          <a:lstStyle/>
+          <a:p>
+            <a:pPr algn="ctr"/>
+          </a:p>
+        </p:txBody>
+      </p:sp>
+      <p:sp>
+        <p:nvSpPr>
+          <p:cNvPr id="4" name="TextBox 3"/>
+          <p:cNvSpPr txBox="1"/>
+          <p:nvPr/>
+        </p:nvSpPr>
+        <p:spPr>
+          <a:xfrm>
+            <a:off x="502920" y="6510528"/>
+            <a:ext cx="7315200" cy="256032"/>
+          </a:xfrm>
+          <a:prstGeom prst="rect">
+            <a:avLst/>
+          </a:prstGeom>
+          <a:noFill/>
+        </p:spPr>
+        <p:txBody>
+          <a:bodyPr wrap="square">
+            <a:spAutoFit/>
+          </a:bodyPr>
+          <a:lstStyle/>
+          <a:p>
+            <a:pPr algn="l"/>
+            <a:r>
+              <a:rPr sz="1200" b="0">
+                <a:solidFill>
+                  <a:srgbClr val="5E5A55"/>
+                </a:solidFill>
+                <a:latin typeface="Calibri"/>
+              </a:rPr>
+              <a:t>Kmart Delivery Assist  ·  Managing Director</a:t>
+            </a:r>
+          </a:p>
+        </p:txBody>
+      </p:sp>
+      <p:sp>
+        <p:nvSpPr>
+          <p:cNvPr id="5" name="TextBox 4"/>
+          <p:cNvSpPr txBox="1"/>
+          <p:nvPr/>
+        </p:nvSpPr>
+        <p:spPr>
+          <a:xfrm>
+            <a:off x="9509760" y="6510528"/>
+            <a:ext cx="2194560" cy="256032"/>
+          </a:xfrm>
+          <a:prstGeom prst="rect">
+            <a:avLst/>
+          </a:prstGeom>
+          <a:noFill/>
+        </p:spPr>
+        <p:txBody>
+          <a:bodyPr wrap="square">
+            <a:spAutoFit/>
+          </a:bodyPr>
+          <a:lstStyle/>
+          <a:p>
+            <a:pPr algn="r"/>
+            <a:r>
+              <a:rPr sz="1200" b="0">
+                <a:solidFill>
+                  <a:srgbClr val="5E5A55"/>
+                </a:solidFill>
+                <a:latin typeface="Calibri"/>
+              </a:rPr>
+              <a:t>9  /  10</a:t>
+            </a:r>
+          </a:p>
+        </p:txBody>
+      </p:sp>
+      <p:sp>
+        <p:nvSpPr>
+          <p:cNvPr id="6" name="TextBox 5"/>
+          <p:cNvSpPr txBox="1"/>
+          <p:nvPr/>
+        </p:nvSpPr>
+        <p:spPr>
+          <a:xfrm>
+            <a:off x="502920" y="320040"/>
+            <a:ext cx="3657600" cy="274320"/>
+          </a:xfrm>
+          <a:prstGeom prst="rect">
+            <a:avLst/>
+          </a:prstGeom>
+          <a:noFill/>
+        </p:spPr>
+        <p:txBody>
+          <a:bodyPr wrap="square">
+            <a:spAutoFit/>
+          </a:bodyPr>
+          <a:lstStyle/>
+          <a:p>
+            <a:pPr algn="l"/>
+            <a:r>
+              <a:rPr sz="1400" b="1">
+                <a:solidFill>
+                  <a:srgbClr val="E10600"/>
+                </a:solidFill>
+                <a:latin typeface="Calibri"/>
+              </a:rPr>
+              <a:t>THE ASK</a:t>
+            </a:r>
+          </a:p>
+        </p:txBody>
+      </p:sp>
+      <p:sp>
+        <p:nvSpPr>
+          <p:cNvPr id="7" name="TextBox 6"/>
+          <p:cNvSpPr txBox="1"/>
+          <p:nvPr/>
+        </p:nvSpPr>
+        <p:spPr>
+          <a:xfrm>
+            <a:off x="502920" y="731520"/>
+            <a:ext cx="10972800" cy="1097280"/>
+          </a:xfrm>
+          <a:prstGeom prst="rect">
+            <a:avLst/>
+          </a:prstGeom>
+          <a:noFill/>
+        </p:spPr>
+        <p:txBody>
+          <a:bodyPr wrap="square">
+            <a:spAutoFit/>
+          </a:bodyPr>
+          <a:lstStyle/>
+          <a:p>
+            <a:pPr algn="l"/>
+            <a:r>
+              <a:rPr sz="3400" b="1">
+                <a:solidFill>
+                  <a:srgbClr val="1C1B1A"/>
+                </a:solidFill>
+                <a:latin typeface="Calibri"/>
+              </a:rPr>
+              <a:t>Use this as the customer face
+of exception recovery.</a:t>
+            </a:r>
+          </a:p>
+        </p:txBody>
+      </p:sp>
+      <p:sp>
+        <p:nvSpPr>
+          <p:cNvPr id="8" name="TextBox 7"/>
+          <p:cNvSpPr txBox="1"/>
+          <p:nvPr/>
+        </p:nvSpPr>
+        <p:spPr>
+          <a:xfrm>
+            <a:off x="502920" y="2468880"/>
+            <a:ext cx="2194560" cy="640080"/>
+          </a:xfrm>
+          <a:prstGeom prst="rect">
+            <a:avLst/>
+          </a:prstGeom>
+          <a:noFill/>
+        </p:spPr>
+        <p:txBody>
+          <a:bodyPr wrap="square">
+            <a:spAutoFit/>
+          </a:bodyPr>
+          <a:lstStyle/>
+          <a:p>
+            <a:pPr algn="l"/>
+            <a:r>
+              <a:rPr sz="2200" b="1">
+                <a:solidFill>
+                  <a:srgbClr val="E10600"/>
+                </a:solidFill>
+                <a:latin typeface="Calibri"/>
+              </a:rPr>
+              <a:t>Today</a:t>
+            </a:r>
+          </a:p>
+        </p:txBody>
+      </p:sp>
+      <p:sp>
+        <p:nvSpPr>
+          <p:cNvPr id="9" name="TextBox 8"/>
+          <p:cNvSpPr txBox="1"/>
+          <p:nvPr/>
+        </p:nvSpPr>
+        <p:spPr>
+          <a:xfrm>
+            <a:off x="2834640" y="2468880"/>
+            <a:ext cx="8503920" cy="822960"/>
+          </a:xfrm>
+          <a:prstGeom prst="rect">
+            <a:avLst/>
+          </a:prstGeom>
+          <a:noFill/>
+        </p:spPr>
+        <p:txBody>
+          <a:bodyPr wrap="square">
+            <a:spAutoFit/>
+          </a:bodyPr>
+          <a:lstStyle/>
+          <a:p>
+            <a:pPr algn="l"/>
+            <a:r>
+              <a:rPr sz="2200" b="0">
+                <a:solidFill>
+                  <a:srgbClr val="1C1B1A"/>
+                </a:solidFill>
+                <a:latin typeface="Calibri"/>
+              </a:rPr>
+              <a:t>A customer can finish a damaged, missed or missing delivery without a call.</a:t>
+            </a:r>
+          </a:p>
+        </p:txBody>
+      </p:sp>
+      <p:sp>
+        <p:nvSpPr>
+          <p:cNvPr id="10" name="TextBox 9"/>
+          <p:cNvSpPr txBox="1"/>
+          <p:nvPr/>
+        </p:nvSpPr>
+        <p:spPr>
+          <a:xfrm>
+            <a:off x="502920" y="3611880"/>
+            <a:ext cx="2194560" cy="640080"/>
+          </a:xfrm>
+          <a:prstGeom prst="rect">
+            <a:avLst/>
+          </a:prstGeom>
+          <a:noFill/>
+        </p:spPr>
+        <p:txBody>
+          <a:bodyPr wrap="square">
+            <a:spAutoFit/>
+          </a:bodyPr>
+          <a:lstStyle/>
+          <a:p>
+            <a:pPr algn="l"/>
+            <a:r>
+              <a:rPr sz="2200" b="1">
+                <a:solidFill>
+                  <a:srgbClr val="E10600"/>
+                </a:solidFill>
+                <a:latin typeface="Calibri"/>
+              </a:rPr>
+              <a:t>Next</a:t>
+            </a:r>
+          </a:p>
+        </p:txBody>
+      </p:sp>
+      <p:sp>
+        <p:nvSpPr>
+          <p:cNvPr id="11" name="TextBox 10"/>
+          <p:cNvSpPr txBox="1"/>
+          <p:nvPr/>
+        </p:nvSpPr>
+        <p:spPr>
+          <a:xfrm>
+            <a:off x="2834640" y="3611880"/>
+            <a:ext cx="8503920" cy="822960"/>
+          </a:xfrm>
+          <a:prstGeom prst="rect">
+            <a:avLst/>
+          </a:prstGeom>
+          <a:noFill/>
+        </p:spPr>
+        <p:txBody>
+          <a:bodyPr wrap="square">
+            <a:spAutoFit/>
+          </a:bodyPr>
+          <a:lstStyle/>
+          <a:p>
+            <a:pPr algn="l"/>
+            <a:r>
+              <a:rPr sz="2200" b="0">
+                <a:solidFill>
+                  <a:srgbClr val="1C1B1A"/>
+                </a:solidFill>
+                <a:latin typeface="Calibri"/>
+              </a:rPr>
+              <a:t>The decision-data foundation and routing automation stay on the programme, behind shadow evidence.</a:t>
+            </a:r>
+          </a:p>
+        </p:txBody>
+      </p:sp>
+      <p:sp>
+        <p:nvSpPr>
+          <p:cNvPr id="12" name="TextBox 11"/>
+          <p:cNvSpPr txBox="1"/>
+          <p:nvPr/>
+        </p:nvSpPr>
+        <p:spPr>
+          <a:xfrm>
+            <a:off x="502920" y="4754880"/>
+            <a:ext cx="2194560" cy="640080"/>
+          </a:xfrm>
+          <a:prstGeom prst="rect">
+            <a:avLst/>
+          </a:prstGeom>
+          <a:noFill/>
+        </p:spPr>
+        <p:txBody>
+          <a:bodyPr wrap="square">
+            <a:spAutoFit/>
+          </a:bodyPr>
+          <a:lstStyle/>
+          <a:p>
+            <a:pPr algn="l"/>
+            <a:r>
+              <a:rPr sz="2200" b="1">
+                <a:solidFill>
+                  <a:srgbClr val="E10600"/>
+                </a:solidFill>
+                <a:latin typeface="Calibri"/>
+              </a:rPr>
+              <a:t>Guardrail</a:t>
+            </a:r>
+          </a:p>
+        </p:txBody>
+      </p:sp>
+      <p:sp>
+        <p:nvSpPr>
+          <p:cNvPr id="13" name="TextBox 12"/>
+          <p:cNvSpPr txBox="1"/>
+          <p:nvPr/>
+        </p:nvSpPr>
+        <p:spPr>
+          <a:xfrm>
+            <a:off x="2834640" y="4754880"/>
+            <a:ext cx="8503920" cy="822960"/>
+          </a:xfrm>
+          <a:prstGeom prst="rect">
+            <a:avLst/>
+          </a:prstGeom>
+          <a:noFill/>
+        </p:spPr>
+        <p:txBody>
+          <a:bodyPr wrap="square">
+            <a:spAutoFit/>
+          </a:bodyPr>
+          <a:lstStyle/>
+          <a:p>
+            <a:pPr algn="l"/>
+            <a:r>
+              <a:rPr sz="2200" b="0">
+                <a:solidFill>
+                  <a:srgbClr val="1C1B1A"/>
+                </a:solidFill>
+                <a:latin typeface="Calibri"/>
+              </a:rPr>
+              <a:t>A refund is explicit. A healthy order is not turned into a case.</a:t>
             </a:r>
           </a:p>
         </p:txBody>

--- a/pitch/Kmart-Delivery-Assist-Lab12.pptx
+++ b/pitch/Kmart-Delivery-Assist-Lab12.pptx
@@ -7080,8 +7080,8 @@
                 </a:solidFill>
                 <a:latin typeface="Calibri"/>
               </a:rPr>
-              <a:t>Complete refund
-or replacement</a:t>
+              <a:t>Complete
+refund/replacement</a:t>
             </a:r>
           </a:p>
         </p:txBody>
